--- a/docs/presentation/Yequan_26_Intro.pptx
+++ b/docs/presentation/Yequan_26_Intro.pptx
@@ -7,6 +7,18 @@
   <p:sldIdLst>
     <p:sldId id="256" r:id="rId7"/>
     <p:sldId id="257" r:id="rId8"/>
+    <p:sldId id="258" r:id="rId9"/>
+    <p:sldId id="259" r:id="rId10"/>
+    <p:sldId id="260" r:id="rId11"/>
+    <p:sldId id="261" r:id="rId12"/>
+    <p:sldId id="262" r:id="rId13"/>
+    <p:sldId id="263" r:id="rId14"/>
+    <p:sldId id="264" r:id="rId15"/>
+    <p:sldId id="265" r:id="rId16"/>
+    <p:sldId id="266" r:id="rId17"/>
+    <p:sldId id="267" r:id="rId18"/>
+    <p:sldId id="268" r:id="rId19"/>
+    <p:sldId id="269" r:id="rId20"/>
   </p:sldIdLst>
   <p:sldSz cx="12191695" cy="6858000" type="screen4x3"/>
   <p:notesSz cx="6858000" cy="9144000"/>
@@ -4216,6 +4228,5125 @@
 </p:sld>
 </file>
 
+<file path=ppt/slides/slide10.xml><?xml version="1.0" encoding="utf-8"?>
+<p:sld xmlns:a="http://schemas.openxmlformats.org/drawingml/2006/main" xmlns:p="http://schemas.openxmlformats.org/presentationml/2006/main" xmlns:r="http://schemas.openxmlformats.org/officeDocument/2006/relationships">
+  <p:cSld>
+    <p:bg>
+      <p:bgPr>
+        <a:solidFill>
+          <a:srgbClr val="F4F6F9"/>
+        </a:solidFill>
+        <a:effectLst/>
+      </p:bgPr>
+    </p:bg>
+    <p:spTree>
+      <p:nvGrpSpPr>
+        <p:cNvPr id="1" name=""/>
+        <p:cNvGrpSpPr/>
+        <p:nvPr/>
+      </p:nvGrpSpPr>
+      <p:grpSpPr/>
+      <p:sp>
+        <p:nvSpPr>
+          <p:cNvPr id="2" name="Rectangle 1"/>
+          <p:cNvSpPr/>
+          <p:nvPr/>
+        </p:nvSpPr>
+        <p:spPr>
+          <a:xfrm>
+            <a:off x="548640" y="310896"/>
+            <a:ext cx="128016" cy="566928"/>
+          </a:xfrm>
+          <a:prstGeom prst="rect">
+            <a:avLst/>
+          </a:prstGeom>
+          <a:solidFill>
+            <a:srgbClr val="E0A32E"/>
+          </a:solidFill>
+          <a:ln>
+            <a:noFill/>
+          </a:ln>
+          <a:effectLst/>
+        </p:spPr>
+        <p:style>
+          <a:lnRef idx="1">
+            <a:schemeClr val="accent1"/>
+          </a:lnRef>
+          <a:fillRef idx="3">
+            <a:schemeClr val="accent1"/>
+          </a:fillRef>
+          <a:effectRef idx="2">
+            <a:schemeClr val="accent1"/>
+          </a:effectRef>
+          <a:fontRef idx="minor">
+            <a:schemeClr val="lt1"/>
+          </a:fontRef>
+        </p:style>
+        <p:txBody>
+          <a:bodyPr rtlCol="0" anchor="ctr"/>
+          <a:lstStyle/>
+          <a:p>
+            <a:pPr algn="ctr"/>
+          </a:p>
+        </p:txBody>
+      </p:sp>
+      <p:sp>
+        <p:nvSpPr>
+          <p:cNvPr id="3" name="TextBox 2"/>
+          <p:cNvSpPr txBox="1"/>
+          <p:nvPr/>
+        </p:nvSpPr>
+        <p:spPr>
+          <a:xfrm>
+            <a:off x="822959" y="201168"/>
+            <a:ext cx="10820095" cy="786384"/>
+          </a:xfrm>
+          <a:prstGeom prst="rect">
+            <a:avLst/>
+          </a:prstGeom>
+          <a:noFill/>
+        </p:spPr>
+        <p:txBody>
+          <a:bodyPr wrap="square" anchor="ctr" lIns="45720" rIns="45720" tIns="0" bIns="0">
+            <a:spAutoFit/>
+          </a:bodyPr>
+          <a:lstStyle/>
+          <a:p>
+            <a:pPr algn="l">
+              <a:lnSpc>
+                <a:spcPct val="100000"/>
+              </a:lnSpc>
+              <a:spcBef>
+                <a:spcPts val="0"/>
+              </a:spcBef>
+              <a:spcAft>
+                <a:spcPts val="600"/>
+              </a:spcAft>
+            </a:pPr>
+            <a:r>
+              <a:rPr sz="3000" b="1" i="0">
+                <a:solidFill>
+                  <a:srgbClr val="0E2A47"/>
+                </a:solidFill>
+                <a:latin typeface="Times New Roman"/>
+                <a:cs typeface="Times New Roman"/>
+              </a:rPr>
+              <a:t>Results: Best Offline Ranking, Still Beaten Online</a:t>
+            </a:r>
+          </a:p>
+        </p:txBody>
+      </p:sp>
+      <p:sp>
+        <p:nvSpPr>
+          <p:cNvPr id="4" name="TextBox 3"/>
+          <p:cNvSpPr txBox="1"/>
+          <p:nvPr/>
+        </p:nvSpPr>
+        <p:spPr>
+          <a:xfrm>
+            <a:off x="548640" y="1078992"/>
+            <a:ext cx="11094415" cy="457200"/>
+          </a:xfrm>
+          <a:prstGeom prst="rect">
+            <a:avLst/>
+          </a:prstGeom>
+          <a:noFill/>
+        </p:spPr>
+        <p:txBody>
+          <a:bodyPr wrap="square" anchor="t" lIns="45720" rIns="45720" tIns="0" bIns="0">
+            <a:spAutoFit/>
+          </a:bodyPr>
+          <a:lstStyle/>
+          <a:p>
+            <a:pPr algn="l">
+              <a:lnSpc>
+                <a:spcPct val="100000"/>
+              </a:lnSpc>
+              <a:spcBef>
+                <a:spcPts val="0"/>
+              </a:spcBef>
+              <a:spcAft>
+                <a:spcPts val="600"/>
+              </a:spcAft>
+            </a:pPr>
+            <a:r>
+              <a:rPr sz="2000" b="1" i="0">
+                <a:solidFill>
+                  <a:srgbClr val="1C7293"/>
+                </a:solidFill>
+                <a:latin typeface="Times New Roman"/>
+                <a:cs typeface="Times New Roman"/>
+              </a:rPr>
+              <a:t>Pivoted-Cholesky tops the offline bracket — yet trails per-token selection by 4–33 pt</a:t>
+            </a:r>
+          </a:p>
+        </p:txBody>
+      </p:sp>
+      <p:pic>
+        <p:nvPicPr>
+          <p:cNvPr id="5" name="Picture 4" descr="amazon_logo.png"/>
+          <p:cNvPicPr>
+            <a:picLocks noChangeAspect="1"/>
+          </p:cNvPicPr>
+          <p:nvPr/>
+        </p:nvPicPr>
+        <p:blipFill>
+          <a:blip r:embed="rId2"/>
+          <a:stretch>
+            <a:fillRect/>
+          </a:stretch>
+        </p:blipFill>
+        <p:spPr>
+          <a:xfrm>
+            <a:off x="192024" y="6309360"/>
+            <a:ext cx="1463040" cy="440740"/>
+          </a:xfrm>
+          <a:prstGeom prst="rect">
+            <a:avLst/>
+          </a:prstGeom>
+        </p:spPr>
+      </p:pic>
+      <p:sp>
+        <p:nvSpPr>
+          <p:cNvPr id="6" name="Rectangle 5"/>
+          <p:cNvSpPr/>
+          <p:nvPr/>
+        </p:nvSpPr>
+        <p:spPr>
+          <a:xfrm>
+            <a:off x="11140135" y="6400800"/>
+            <a:ext cx="109728" cy="237744"/>
+          </a:xfrm>
+          <a:prstGeom prst="rect">
+            <a:avLst/>
+          </a:prstGeom>
+          <a:solidFill>
+            <a:srgbClr val="E0A32E"/>
+          </a:solidFill>
+          <a:ln>
+            <a:noFill/>
+          </a:ln>
+          <a:effectLst/>
+        </p:spPr>
+        <p:style>
+          <a:lnRef idx="1">
+            <a:schemeClr val="accent1"/>
+          </a:lnRef>
+          <a:fillRef idx="3">
+            <a:schemeClr val="accent1"/>
+          </a:fillRef>
+          <a:effectRef idx="2">
+            <a:schemeClr val="accent1"/>
+          </a:effectRef>
+          <a:fontRef idx="minor">
+            <a:schemeClr val="lt1"/>
+          </a:fontRef>
+        </p:style>
+        <p:txBody>
+          <a:bodyPr rtlCol="0" anchor="ctr"/>
+          <a:lstStyle/>
+          <a:p>
+            <a:pPr algn="ctr"/>
+          </a:p>
+        </p:txBody>
+      </p:sp>
+      <p:sp>
+        <p:nvSpPr>
+          <p:cNvPr id="7" name="TextBox 6"/>
+          <p:cNvSpPr txBox="1"/>
+          <p:nvPr/>
+        </p:nvSpPr>
+        <p:spPr>
+          <a:xfrm>
+            <a:off x="11323015" y="6364224"/>
+            <a:ext cx="685800" cy="320040"/>
+          </a:xfrm>
+          <a:prstGeom prst="rect">
+            <a:avLst/>
+          </a:prstGeom>
+          <a:noFill/>
+        </p:spPr>
+        <p:txBody>
+          <a:bodyPr wrap="square" anchor="ctr" lIns="45720" rIns="45720" tIns="0" bIns="0">
+            <a:spAutoFit/>
+          </a:bodyPr>
+          <a:lstStyle/>
+          <a:p>
+            <a:pPr algn="l">
+              <a:lnSpc>
+                <a:spcPct val="100000"/>
+              </a:lnSpc>
+              <a:spcBef>
+                <a:spcPts val="0"/>
+              </a:spcBef>
+              <a:spcAft>
+                <a:spcPts val="600"/>
+              </a:spcAft>
+            </a:pPr>
+            <a:r>
+              <a:rPr sz="1200" b="1" i="0">
+                <a:solidFill>
+                  <a:srgbClr val="5C6B7A"/>
+                </a:solidFill>
+                <a:latin typeface="Times New Roman"/>
+                <a:cs typeface="Times New Roman"/>
+              </a:rPr>
+              <a:t>9</a:t>
+            </a:r>
+          </a:p>
+        </p:txBody>
+      </p:sp>
+      <p:sp>
+        <p:nvSpPr>
+          <p:cNvPr id="8" name="TextBox 7"/>
+          <p:cNvSpPr txBox="1"/>
+          <p:nvPr/>
+        </p:nvSpPr>
+        <p:spPr>
+          <a:xfrm>
+            <a:off x="1828800" y="6382512"/>
+            <a:ext cx="8229600" cy="320040"/>
+          </a:xfrm>
+          <a:prstGeom prst="rect">
+            <a:avLst/>
+          </a:prstGeom>
+          <a:noFill/>
+        </p:spPr>
+        <p:txBody>
+          <a:bodyPr wrap="square" anchor="ctr" lIns="45720" rIns="45720" tIns="0" bIns="0">
+            <a:spAutoFit/>
+          </a:bodyPr>
+          <a:lstStyle/>
+          <a:p>
+            <a:pPr algn="l">
+              <a:lnSpc>
+                <a:spcPct val="100000"/>
+              </a:lnSpc>
+              <a:spcBef>
+                <a:spcPts val="0"/>
+              </a:spcBef>
+              <a:spcAft>
+                <a:spcPts val="600"/>
+              </a:spcAft>
+            </a:pPr>
+            <a:r>
+              <a:rPr sz="1100" b="0" i="1">
+                <a:solidFill>
+                  <a:srgbClr val="5C6B7A"/>
+                </a:solidFill>
+                <a:latin typeface="Times New Roman"/>
+                <a:cs typeface="Times New Roman"/>
+              </a:rPr>
+              <a:t>Per-Token Adaptive Channel Activation for MoE</a:t>
+            </a:r>
+          </a:p>
+        </p:txBody>
+      </p:sp>
+      <p:graphicFrame>
+        <p:nvGraphicFramePr>
+          <p:cNvPr id="9" name="Table 8"/>
+          <p:cNvGraphicFramePr>
+            <a:graphicFrameLocks noGrp="1"/>
+          </p:cNvGraphicFramePr>
+          <p:nvPr/>
+        </p:nvGraphicFramePr>
+        <p:xfrm>
+          <a:off x="548640" y="1682496"/>
+          <a:ext cx="5532120" cy="2212848"/>
+        </p:xfrm>
+        <a:graphic>
+          <a:graphicData uri="http://schemas.openxmlformats.org/drawingml/2006/table">
+            <a:tbl>
+              <a:tblPr firstRow="1">
+                <a:tableStyleId>{5C22544A-7EE6-4342-B048-85BDC9FD1C3A}</a:tableStyleId>
+              </a:tblPr>
+              <a:tblGrid>
+                <a:gridCol w="1188720"/>
+                <a:gridCol w="1024128"/>
+                <a:gridCol w="1078992"/>
+                <a:gridCol w="1188720"/>
+                <a:gridCol w="1051560"/>
+              </a:tblGrid>
+              <a:tr h="384048">
+                <a:tc>
+                  <a:txBody>
+                    <a:bodyPr wrap="square"/>
+                    <a:lstStyle/>
+                    <a:p>
+                      <a:pPr algn="l"/>
+                      <a:r>
+                        <a:rPr sz="1400" b="1" i="0">
+                          <a:solidFill>
+                            <a:srgbClr val="FFFFFF"/>
+                          </a:solidFill>
+                          <a:latin typeface="Times New Roman"/>
+                          <a:cs typeface="Times New Roman"/>
+                        </a:rPr>
+                        <a:t>Active cut</a:t>
+                      </a:r>
+                    </a:p>
+                  </a:txBody>
+                  <a:tcPr marL="54864" marR="54864" marT="9144" marB="9144" anchor="ctr">
+                    <a:solidFill>
+                      <a:srgbClr val="0E2A47"/>
+                    </a:solidFill>
+                  </a:tcPr>
+                </a:tc>
+                <a:tc>
+                  <a:txBody>
+                    <a:bodyPr wrap="square"/>
+                    <a:lstStyle/>
+                    <a:p>
+                      <a:pPr algn="ctr"/>
+                      <a:r>
+                        <a:rPr sz="1400" b="1" i="0">
+                          <a:solidFill>
+                            <a:srgbClr val="FFFFFF"/>
+                          </a:solidFill>
+                          <a:latin typeface="Times New Roman"/>
+                          <a:cs typeface="Times New Roman"/>
+                        </a:rPr>
+                        <a:t>Top-k</a:t>
+                      </a:r>
+                    </a:p>
+                  </a:txBody>
+                  <a:tcPr marL="54864" marR="54864" marT="9144" marB="9144" anchor="ctr">
+                    <a:solidFill>
+                      <a:srgbClr val="0E2A47"/>
+                    </a:solidFill>
+                  </a:tcPr>
+                </a:tc>
+                <a:tc>
+                  <a:txBody>
+                    <a:bodyPr wrap="square"/>
+                    <a:lstStyle/>
+                    <a:p>
+                      <a:pPr algn="ctr"/>
+                      <a:r>
+                        <a:rPr sz="1400" b="1" i="0">
+                          <a:solidFill>
+                            <a:srgbClr val="FFFFFF"/>
+                          </a:solidFill>
+                          <a:latin typeface="Times New Roman"/>
+                          <a:cs typeface="Times New Roman"/>
+                        </a:rPr>
+                        <a:t>MoSE</a:t>
+                      </a:r>
+                    </a:p>
+                  </a:txBody>
+                  <a:tcPr marL="54864" marR="54864" marT="9144" marB="9144" anchor="ctr">
+                    <a:solidFill>
+                      <a:srgbClr val="0E2A47"/>
+                    </a:solidFill>
+                  </a:tcPr>
+                </a:tc>
+                <a:tc>
+                  <a:txBody>
+                    <a:bodyPr wrap="square"/>
+                    <a:lstStyle/>
+                    <a:p>
+                      <a:pPr algn="ctr"/>
+                      <a:r>
+                        <a:rPr sz="1400" b="1" i="0">
+                          <a:solidFill>
+                            <a:srgbClr val="FFFFFF"/>
+                          </a:solidFill>
+                          <a:latin typeface="Times New Roman"/>
+                          <a:cs typeface="Times New Roman"/>
+                        </a:rPr>
+                        <a:t>Piv-Chol</a:t>
+                      </a:r>
+                    </a:p>
+                  </a:txBody>
+                  <a:tcPr marL="54864" marR="54864" marT="9144" marB="9144" anchor="ctr">
+                    <a:solidFill>
+                      <a:srgbClr val="0E2A47"/>
+                    </a:solidFill>
+                  </a:tcPr>
+                </a:tc>
+                <a:tc>
+                  <a:txBody>
+                    <a:bodyPr wrap="square"/>
+                    <a:lstStyle/>
+                    <a:p>
+                      <a:pPr algn="ctr"/>
+                      <a:r>
+                        <a:rPr sz="1400" b="1" i="0">
+                          <a:solidFill>
+                            <a:srgbClr val="FFFFFF"/>
+                          </a:solidFill>
+                          <a:latin typeface="Times New Roman"/>
+                          <a:cs typeface="Times New Roman"/>
+                        </a:rPr>
+                        <a:t>Online</a:t>
+                      </a:r>
+                    </a:p>
+                  </a:txBody>
+                  <a:tcPr marL="54864" marR="54864" marT="9144" marB="9144" anchor="ctr">
+                    <a:solidFill>
+                      <a:srgbClr val="0E2A47"/>
+                    </a:solidFill>
+                  </a:tcPr>
+                </a:tc>
+              </a:tr>
+              <a:tr h="365760">
+                <a:tc>
+                  <a:txBody>
+                    <a:bodyPr wrap="square"/>
+                    <a:lstStyle/>
+                    <a:p>
+                      <a:pPr algn="l"/>
+                      <a:r>
+                        <a:rPr sz="1400" b="0" i="0">
+                          <a:solidFill>
+                            <a:srgbClr val="222A33"/>
+                          </a:solidFill>
+                          <a:latin typeface="Times New Roman"/>
+                          <a:cs typeface="Times New Roman"/>
+                        </a:rPr>
+                        <a:t>Dense</a:t>
+                      </a:r>
+                    </a:p>
+                  </a:txBody>
+                  <a:tcPr marL="54864" marR="54864" marT="9144" marB="9144" anchor="ctr">
+                    <a:solidFill>
+                      <a:srgbClr val="FFFFFF"/>
+                    </a:solidFill>
+                  </a:tcPr>
+                </a:tc>
+                <a:tc>
+                  <a:txBody>
+                    <a:bodyPr wrap="square"/>
+                    <a:lstStyle/>
+                    <a:p>
+                      <a:pPr algn="ctr"/>
+                      <a:r>
+                        <a:rPr sz="1400" b="0" i="0">
+                          <a:solidFill>
+                            <a:srgbClr val="222A33"/>
+                          </a:solidFill>
+                          <a:latin typeface="Times New Roman"/>
+                          <a:cs typeface="Times New Roman"/>
+                        </a:rPr>
+                        <a:t>—</a:t>
+                      </a:r>
+                    </a:p>
+                  </a:txBody>
+                  <a:tcPr marL="54864" marR="54864" marT="9144" marB="9144" anchor="ctr">
+                    <a:solidFill>
+                      <a:srgbClr val="FFFFFF"/>
+                    </a:solidFill>
+                  </a:tcPr>
+                </a:tc>
+                <a:tc>
+                  <a:txBody>
+                    <a:bodyPr wrap="square"/>
+                    <a:lstStyle/>
+                    <a:p>
+                      <a:pPr algn="ctr"/>
+                      <a:r>
+                        <a:rPr sz="1400" b="0" i="0">
+                          <a:solidFill>
+                            <a:srgbClr val="222A33"/>
+                          </a:solidFill>
+                          <a:latin typeface="Times New Roman"/>
+                          <a:cs typeface="Times New Roman"/>
+                        </a:rPr>
+                        <a:t>—</a:t>
+                      </a:r>
+                    </a:p>
+                  </a:txBody>
+                  <a:tcPr marL="54864" marR="54864" marT="9144" marB="9144" anchor="ctr">
+                    <a:solidFill>
+                      <a:srgbClr val="FFFFFF"/>
+                    </a:solidFill>
+                  </a:tcPr>
+                </a:tc>
+                <a:tc>
+                  <a:txBody>
+                    <a:bodyPr wrap="square"/>
+                    <a:lstStyle/>
+                    <a:p>
+                      <a:pPr algn="ctr"/>
+                      <a:r>
+                        <a:rPr sz="1400" b="0" i="0">
+                          <a:solidFill>
+                            <a:srgbClr val="222A33"/>
+                          </a:solidFill>
+                          <a:latin typeface="Times New Roman"/>
+                          <a:cs typeface="Times New Roman"/>
+                        </a:rPr>
+                        <a:t>—</a:t>
+                      </a:r>
+                    </a:p>
+                  </a:txBody>
+                  <a:tcPr marL="54864" marR="54864" marT="9144" marB="9144" anchor="ctr">
+                    <a:solidFill>
+                      <a:srgbClr val="FFFFFF"/>
+                    </a:solidFill>
+                  </a:tcPr>
+                </a:tc>
+                <a:tc>
+                  <a:txBody>
+                    <a:bodyPr wrap="square"/>
+                    <a:lstStyle/>
+                    <a:p>
+                      <a:pPr algn="ctr"/>
+                      <a:r>
+                        <a:rPr sz="1400" b="1" i="0">
+                          <a:solidFill>
+                            <a:srgbClr val="222A33"/>
+                          </a:solidFill>
+                          <a:latin typeface="Times New Roman"/>
+                          <a:cs typeface="Times New Roman"/>
+                        </a:rPr>
+                        <a:t>78.56</a:t>
+                      </a:r>
+                    </a:p>
+                  </a:txBody>
+                  <a:tcPr marL="54864" marR="54864" marT="9144" marB="9144" anchor="ctr">
+                    <a:solidFill>
+                      <a:srgbClr val="FCF3DC"/>
+                    </a:solidFill>
+                  </a:tcPr>
+                </a:tc>
+              </a:tr>
+              <a:tr h="365760">
+                <a:tc>
+                  <a:txBody>
+                    <a:bodyPr wrap="square"/>
+                    <a:lstStyle/>
+                    <a:p>
+                      <a:pPr algn="l"/>
+                      <a:r>
+                        <a:rPr sz="1400" b="0" i="0">
+                          <a:solidFill>
+                            <a:srgbClr val="222A33"/>
+                          </a:solidFill>
+                          <a:latin typeface="Times New Roman"/>
+                          <a:cs typeface="Times New Roman"/>
+                        </a:rPr>
+                        <a:t>−50%</a:t>
+                      </a:r>
+                    </a:p>
+                  </a:txBody>
+                  <a:tcPr marL="54864" marR="54864" marT="9144" marB="9144" anchor="ctr">
+                    <a:solidFill>
+                      <a:srgbClr val="EAEFF4"/>
+                    </a:solidFill>
+                  </a:tcPr>
+                </a:tc>
+                <a:tc>
+                  <a:txBody>
+                    <a:bodyPr wrap="square"/>
+                    <a:lstStyle/>
+                    <a:p>
+                      <a:pPr algn="ctr"/>
+                      <a:r>
+                        <a:rPr sz="1400" b="0" i="0">
+                          <a:solidFill>
+                            <a:srgbClr val="222A33"/>
+                          </a:solidFill>
+                          <a:latin typeface="Times New Roman"/>
+                          <a:cs typeface="Times New Roman"/>
+                        </a:rPr>
+                        <a:t>75.2</a:t>
+                      </a:r>
+                    </a:p>
+                  </a:txBody>
+                  <a:tcPr marL="54864" marR="54864" marT="9144" marB="9144" anchor="ctr">
+                    <a:solidFill>
+                      <a:srgbClr val="EAEFF4"/>
+                    </a:solidFill>
+                  </a:tcPr>
+                </a:tc>
+                <a:tc>
+                  <a:txBody>
+                    <a:bodyPr wrap="square"/>
+                    <a:lstStyle/>
+                    <a:p>
+                      <a:pPr algn="ctr"/>
+                      <a:r>
+                        <a:rPr sz="1400" b="0" i="0">
+                          <a:solidFill>
+                            <a:srgbClr val="222A33"/>
+                          </a:solidFill>
+                          <a:latin typeface="Times New Roman"/>
+                          <a:cs typeface="Times New Roman"/>
+                        </a:rPr>
+                        <a:t>69.45</a:t>
+                      </a:r>
+                    </a:p>
+                  </a:txBody>
+                  <a:tcPr marL="54864" marR="54864" marT="9144" marB="9144" anchor="ctr">
+                    <a:solidFill>
+                      <a:srgbClr val="EAEFF4"/>
+                    </a:solidFill>
+                  </a:tcPr>
+                </a:tc>
+                <a:tc>
+                  <a:txBody>
+                    <a:bodyPr wrap="square"/>
+                    <a:lstStyle/>
+                    <a:p>
+                      <a:pPr algn="ctr"/>
+                      <a:r>
+                        <a:rPr sz="1400" b="1" i="0">
+                          <a:solidFill>
+                            <a:srgbClr val="222A33"/>
+                          </a:solidFill>
+                          <a:latin typeface="Times New Roman"/>
+                          <a:cs typeface="Times New Roman"/>
+                        </a:rPr>
+                        <a:t>74.26</a:t>
+                      </a:r>
+                    </a:p>
+                  </a:txBody>
+                  <a:tcPr marL="54864" marR="54864" marT="9144" marB="9144" anchor="ctr">
+                    <a:solidFill>
+                      <a:srgbClr val="EAEFF4"/>
+                    </a:solidFill>
+                  </a:tcPr>
+                </a:tc>
+                <a:tc>
+                  <a:txBody>
+                    <a:bodyPr wrap="square"/>
+                    <a:lstStyle/>
+                    <a:p>
+                      <a:pPr algn="ctr"/>
+                      <a:r>
+                        <a:rPr sz="1400" b="1" i="0">
+                          <a:solidFill>
+                            <a:srgbClr val="222A33"/>
+                          </a:solidFill>
+                          <a:latin typeface="Times New Roman"/>
+                          <a:cs typeface="Times New Roman"/>
+                        </a:rPr>
+                        <a:t>78.54</a:t>
+                      </a:r>
+                    </a:p>
+                  </a:txBody>
+                  <a:tcPr marL="54864" marR="54864" marT="9144" marB="9144" anchor="ctr">
+                    <a:solidFill>
+                      <a:srgbClr val="FCF3DC"/>
+                    </a:solidFill>
+                  </a:tcPr>
+                </a:tc>
+              </a:tr>
+              <a:tr h="365760">
+                <a:tc>
+                  <a:txBody>
+                    <a:bodyPr wrap="square"/>
+                    <a:lstStyle/>
+                    <a:p>
+                      <a:pPr algn="l"/>
+                      <a:r>
+                        <a:rPr sz="1400" b="0" i="0">
+                          <a:solidFill>
+                            <a:srgbClr val="222A33"/>
+                          </a:solidFill>
+                          <a:latin typeface="Times New Roman"/>
+                          <a:cs typeface="Times New Roman"/>
+                        </a:rPr>
+                        <a:t>−62.5%</a:t>
+                      </a:r>
+                    </a:p>
+                  </a:txBody>
+                  <a:tcPr marL="54864" marR="54864" marT="9144" marB="9144" anchor="ctr">
+                    <a:solidFill>
+                      <a:srgbClr val="FFFFFF"/>
+                    </a:solidFill>
+                  </a:tcPr>
+                </a:tc>
+                <a:tc>
+                  <a:txBody>
+                    <a:bodyPr wrap="square"/>
+                    <a:lstStyle/>
+                    <a:p>
+                      <a:pPr algn="ctr"/>
+                      <a:r>
+                        <a:rPr sz="1400" b="0" i="0">
+                          <a:solidFill>
+                            <a:srgbClr val="222A33"/>
+                          </a:solidFill>
+                          <a:latin typeface="Times New Roman"/>
+                          <a:cs typeface="Times New Roman"/>
+                        </a:rPr>
+                        <a:t>69.8</a:t>
+                      </a:r>
+                    </a:p>
+                  </a:txBody>
+                  <a:tcPr marL="54864" marR="54864" marT="9144" marB="9144" anchor="ctr">
+                    <a:solidFill>
+                      <a:srgbClr val="FFFFFF"/>
+                    </a:solidFill>
+                  </a:tcPr>
+                </a:tc>
+                <a:tc>
+                  <a:txBody>
+                    <a:bodyPr wrap="square"/>
+                    <a:lstStyle/>
+                    <a:p>
+                      <a:pPr algn="ctr"/>
+                      <a:r>
+                        <a:rPr sz="1400" b="0" i="0">
+                          <a:solidFill>
+                            <a:srgbClr val="222A33"/>
+                          </a:solidFill>
+                          <a:latin typeface="Times New Roman"/>
+                          <a:cs typeface="Times New Roman"/>
+                        </a:rPr>
+                        <a:t>61.00</a:t>
+                      </a:r>
+                    </a:p>
+                  </a:txBody>
+                  <a:tcPr marL="54864" marR="54864" marT="9144" marB="9144" anchor="ctr">
+                    <a:solidFill>
+                      <a:srgbClr val="FFFFFF"/>
+                    </a:solidFill>
+                  </a:tcPr>
+                </a:tc>
+                <a:tc>
+                  <a:txBody>
+                    <a:bodyPr wrap="square"/>
+                    <a:lstStyle/>
+                    <a:p>
+                      <a:pPr algn="ctr"/>
+                      <a:r>
+                        <a:rPr sz="1400" b="1" i="0">
+                          <a:solidFill>
+                            <a:srgbClr val="222A33"/>
+                          </a:solidFill>
+                          <a:latin typeface="Times New Roman"/>
+                          <a:cs typeface="Times New Roman"/>
+                        </a:rPr>
+                        <a:t>70.54</a:t>
+                      </a:r>
+                    </a:p>
+                  </a:txBody>
+                  <a:tcPr marL="54864" marR="54864" marT="9144" marB="9144" anchor="ctr">
+                    <a:solidFill>
+                      <a:srgbClr val="FFFFFF"/>
+                    </a:solidFill>
+                  </a:tcPr>
+                </a:tc>
+                <a:tc>
+                  <a:txBody>
+                    <a:bodyPr wrap="square"/>
+                    <a:lstStyle/>
+                    <a:p>
+                      <a:pPr algn="ctr"/>
+                      <a:r>
+                        <a:rPr sz="1400" b="1" i="0">
+                          <a:solidFill>
+                            <a:srgbClr val="222A33"/>
+                          </a:solidFill>
+                          <a:latin typeface="Times New Roman"/>
+                          <a:cs typeface="Times New Roman"/>
+                        </a:rPr>
+                        <a:t>78.76</a:t>
+                      </a:r>
+                    </a:p>
+                  </a:txBody>
+                  <a:tcPr marL="54864" marR="54864" marT="9144" marB="9144" anchor="ctr">
+                    <a:solidFill>
+                      <a:srgbClr val="FCF3DC"/>
+                    </a:solidFill>
+                  </a:tcPr>
+                </a:tc>
+              </a:tr>
+              <a:tr h="365760">
+                <a:tc>
+                  <a:txBody>
+                    <a:bodyPr wrap="square"/>
+                    <a:lstStyle/>
+                    <a:p>
+                      <a:pPr algn="l"/>
+                      <a:r>
+                        <a:rPr sz="1400" b="0" i="0">
+                          <a:solidFill>
+                            <a:srgbClr val="222A33"/>
+                          </a:solidFill>
+                          <a:latin typeface="Times New Roman"/>
+                          <a:cs typeface="Times New Roman"/>
+                        </a:rPr>
+                        <a:t>−75%</a:t>
+                      </a:r>
+                    </a:p>
+                  </a:txBody>
+                  <a:tcPr marL="54864" marR="54864" marT="9144" marB="9144" anchor="ctr">
+                    <a:solidFill>
+                      <a:srgbClr val="EAEFF4"/>
+                    </a:solidFill>
+                  </a:tcPr>
+                </a:tc>
+                <a:tc>
+                  <a:txBody>
+                    <a:bodyPr wrap="square"/>
+                    <a:lstStyle/>
+                    <a:p>
+                      <a:pPr algn="ctr"/>
+                      <a:r>
+                        <a:rPr sz="1400" b="0" i="0">
+                          <a:solidFill>
+                            <a:srgbClr val="222A33"/>
+                          </a:solidFill>
+                          <a:latin typeface="Times New Roman"/>
+                          <a:cs typeface="Times New Roman"/>
+                        </a:rPr>
+                        <a:t>49.4</a:t>
+                      </a:r>
+                    </a:p>
+                  </a:txBody>
+                  <a:tcPr marL="54864" marR="54864" marT="9144" marB="9144" anchor="ctr">
+                    <a:solidFill>
+                      <a:srgbClr val="EAEFF4"/>
+                    </a:solidFill>
+                  </a:tcPr>
+                </a:tc>
+                <a:tc>
+                  <a:txBody>
+                    <a:bodyPr wrap="square"/>
+                    <a:lstStyle/>
+                    <a:p>
+                      <a:pPr algn="ctr"/>
+                      <a:r>
+                        <a:rPr sz="1400" b="0" i="0">
+                          <a:solidFill>
+                            <a:srgbClr val="222A33"/>
+                          </a:solidFill>
+                          <a:latin typeface="Times New Roman"/>
+                          <a:cs typeface="Times New Roman"/>
+                        </a:rPr>
+                        <a:t>43.66</a:t>
+                      </a:r>
+                    </a:p>
+                  </a:txBody>
+                  <a:tcPr marL="54864" marR="54864" marT="9144" marB="9144" anchor="ctr">
+                    <a:solidFill>
+                      <a:srgbClr val="EAEFF4"/>
+                    </a:solidFill>
+                  </a:tcPr>
+                </a:tc>
+                <a:tc>
+                  <a:txBody>
+                    <a:bodyPr wrap="square"/>
+                    <a:lstStyle/>
+                    <a:p>
+                      <a:pPr algn="ctr"/>
+                      <a:r>
+                        <a:rPr sz="1400" b="1" i="0">
+                          <a:solidFill>
+                            <a:srgbClr val="222A33"/>
+                          </a:solidFill>
+                          <a:latin typeface="Times New Roman"/>
+                          <a:cs typeface="Times New Roman"/>
+                        </a:rPr>
+                        <a:t>63.60</a:t>
+                      </a:r>
+                    </a:p>
+                  </a:txBody>
+                  <a:tcPr marL="54864" marR="54864" marT="9144" marB="9144" anchor="ctr">
+                    <a:solidFill>
+                      <a:srgbClr val="EAEFF4"/>
+                    </a:solidFill>
+                  </a:tcPr>
+                </a:tc>
+                <a:tc>
+                  <a:txBody>
+                    <a:bodyPr wrap="square"/>
+                    <a:lstStyle/>
+                    <a:p>
+                      <a:pPr algn="ctr"/>
+                      <a:r>
+                        <a:rPr sz="1400" b="1" i="0">
+                          <a:solidFill>
+                            <a:srgbClr val="222A33"/>
+                          </a:solidFill>
+                          <a:latin typeface="Times New Roman"/>
+                          <a:cs typeface="Times New Roman"/>
+                        </a:rPr>
+                        <a:t>78.28</a:t>
+                      </a:r>
+                    </a:p>
+                  </a:txBody>
+                  <a:tcPr marL="54864" marR="54864" marT="9144" marB="9144" anchor="ctr">
+                    <a:solidFill>
+                      <a:srgbClr val="FCF3DC"/>
+                    </a:solidFill>
+                  </a:tcPr>
+                </a:tc>
+              </a:tr>
+              <a:tr h="365760">
+                <a:tc>
+                  <a:txBody>
+                    <a:bodyPr wrap="square"/>
+                    <a:lstStyle/>
+                    <a:p>
+                      <a:pPr algn="l"/>
+                      <a:r>
+                        <a:rPr sz="1400" b="0" i="0">
+                          <a:solidFill>
+                            <a:srgbClr val="222A33"/>
+                          </a:solidFill>
+                          <a:latin typeface="Times New Roman"/>
+                          <a:cs typeface="Times New Roman"/>
+                        </a:rPr>
+                        <a:t>−87.5%</a:t>
+                      </a:r>
+                    </a:p>
+                  </a:txBody>
+                  <a:tcPr marL="54864" marR="54864" marT="9144" marB="9144" anchor="ctr">
+                    <a:solidFill>
+                      <a:srgbClr val="FFFFFF"/>
+                    </a:solidFill>
+                  </a:tcPr>
+                </a:tc>
+                <a:tc>
+                  <a:txBody>
+                    <a:bodyPr wrap="square"/>
+                    <a:lstStyle/>
+                    <a:p>
+                      <a:pPr algn="ctr"/>
+                      <a:r>
+                        <a:rPr sz="1400" b="0" i="0">
+                          <a:solidFill>
+                            <a:srgbClr val="222A33"/>
+                          </a:solidFill>
+                          <a:latin typeface="Times New Roman"/>
+                          <a:cs typeface="Times New Roman"/>
+                        </a:rPr>
+                        <a:t>26.2</a:t>
+                      </a:r>
+                    </a:p>
+                  </a:txBody>
+                  <a:tcPr marL="54864" marR="54864" marT="9144" marB="9144" anchor="ctr">
+                    <a:solidFill>
+                      <a:srgbClr val="FFFFFF"/>
+                    </a:solidFill>
+                  </a:tcPr>
+                </a:tc>
+                <a:tc>
+                  <a:txBody>
+                    <a:bodyPr wrap="square"/>
+                    <a:lstStyle/>
+                    <a:p>
+                      <a:pPr algn="ctr"/>
+                      <a:r>
+                        <a:rPr sz="1400" b="0" i="0">
+                          <a:solidFill>
+                            <a:srgbClr val="222A33"/>
+                          </a:solidFill>
+                          <a:latin typeface="Times New Roman"/>
+                          <a:cs typeface="Times New Roman"/>
+                        </a:rPr>
+                        <a:t>30.32</a:t>
+                      </a:r>
+                    </a:p>
+                  </a:txBody>
+                  <a:tcPr marL="54864" marR="54864" marT="9144" marB="9144" anchor="ctr">
+                    <a:solidFill>
+                      <a:srgbClr val="FFFFFF"/>
+                    </a:solidFill>
+                  </a:tcPr>
+                </a:tc>
+                <a:tc>
+                  <a:txBody>
+                    <a:bodyPr wrap="square"/>
+                    <a:lstStyle/>
+                    <a:p>
+                      <a:pPr algn="ctr"/>
+                      <a:r>
+                        <a:rPr sz="1400" b="1" i="0">
+                          <a:solidFill>
+                            <a:srgbClr val="222A33"/>
+                          </a:solidFill>
+                          <a:latin typeface="Times New Roman"/>
+                          <a:cs typeface="Times New Roman"/>
+                        </a:rPr>
+                        <a:t>44.15</a:t>
+                      </a:r>
+                    </a:p>
+                  </a:txBody>
+                  <a:tcPr marL="54864" marR="54864" marT="9144" marB="9144" anchor="ctr">
+                    <a:solidFill>
+                      <a:srgbClr val="FFFFFF"/>
+                    </a:solidFill>
+                  </a:tcPr>
+                </a:tc>
+                <a:tc>
+                  <a:txBody>
+                    <a:bodyPr wrap="square"/>
+                    <a:lstStyle/>
+                    <a:p>
+                      <a:pPr algn="ctr"/>
+                      <a:r>
+                        <a:rPr sz="1400" b="1" i="0">
+                          <a:solidFill>
+                            <a:srgbClr val="222A33"/>
+                          </a:solidFill>
+                          <a:latin typeface="Times New Roman"/>
+                          <a:cs typeface="Times New Roman"/>
+                        </a:rPr>
+                        <a:t>76.84</a:t>
+                      </a:r>
+                    </a:p>
+                  </a:txBody>
+                  <a:tcPr marL="54864" marR="54864" marT="9144" marB="9144" anchor="ctr">
+                    <a:solidFill>
+                      <a:srgbClr val="FCF3DC"/>
+                    </a:solidFill>
+                  </a:tcPr>
+                </a:tc>
+              </a:tr>
+            </a:tbl>
+          </a:graphicData>
+        </a:graphic>
+      </p:graphicFrame>
+      <p:sp>
+        <p:nvSpPr>
+          <p:cNvPr id="10" name="TextBox 9"/>
+          <p:cNvSpPr txBox="1"/>
+          <p:nvPr/>
+        </p:nvSpPr>
+        <p:spPr>
+          <a:xfrm>
+            <a:off x="548640" y="3931920"/>
+            <a:ext cx="5532120" cy="274320"/>
+          </a:xfrm>
+          <a:prstGeom prst="rect">
+            <a:avLst/>
+          </a:prstGeom>
+          <a:noFill/>
+        </p:spPr>
+        <p:txBody>
+          <a:bodyPr wrap="square" anchor="t" lIns="45720" rIns="45720" tIns="0" bIns="0">
+            <a:spAutoFit/>
+          </a:bodyPr>
+          <a:lstStyle/>
+          <a:p>
+            <a:pPr algn="l">
+              <a:lnSpc>
+                <a:spcPct val="100000"/>
+              </a:lnSpc>
+              <a:spcBef>
+                <a:spcPts val="0"/>
+              </a:spcBef>
+              <a:spcAft>
+                <a:spcPts val="600"/>
+              </a:spcAft>
+            </a:pPr>
+            <a:r>
+              <a:rPr sz="1000" b="0" i="1">
+                <a:solidFill>
+                  <a:srgbClr val="5C6B7A"/>
+                </a:solidFill>
+                <a:latin typeface="Times New Roman"/>
+                <a:cs typeface="Times New Roman"/>
+              </a:rPr>
+              <a:t>Top-k = drop experts 8→k;  Piv-Chol / MoSE = fixed offline rankings;  Online = per-token.  HellaSwag acc_norm, no fine-tuning.</a:t>
+            </a:r>
+          </a:p>
+        </p:txBody>
+      </p:sp>
+      <p:sp>
+        <p:nvSpPr>
+          <p:cNvPr id="11" name="TextBox 10"/>
+          <p:cNvSpPr txBox="1"/>
+          <p:nvPr/>
+        </p:nvSpPr>
+        <p:spPr>
+          <a:xfrm>
+            <a:off x="548640" y="4315968"/>
+            <a:ext cx="5532120" cy="2194560"/>
+          </a:xfrm>
+          <a:prstGeom prst="rect">
+            <a:avLst/>
+          </a:prstGeom>
+          <a:noFill/>
+        </p:spPr>
+        <p:txBody>
+          <a:bodyPr wrap="square" lIns="0" rIns="0" tIns="0" bIns="0">
+            <a:spAutoFit/>
+          </a:bodyPr>
+          <a:lstStyle/>
+          <a:p>
+            <a:pPr indent="-256032" marL="256032">
+              <a:lnSpc>
+                <a:spcPct val="102000"/>
+              </a:lnSpc>
+              <a:spcBef>
+                <a:spcPts val="0"/>
+              </a:spcBef>
+              <a:spcAft>
+                <a:spcPts val="600"/>
+              </a:spcAft>
+              <a:buClr>
+                <a:srgbClr val="E0A32E"/>
+              </a:buClr>
+              <a:buFont typeface="Times New Roman"/>
+              <a:buChar char="▪"/>
+            </a:pPr>
+            <a:r>
+              <a:rPr sz="1300" b="1" i="0">
+                <a:solidFill>
+                  <a:srgbClr val="0E2A47"/>
+                </a:solidFill>
+                <a:latin typeface="Times New Roman"/>
+                <a:cs typeface="Times New Roman"/>
+              </a:rPr>
+              <a:t>Pivoted-Cholesky dominates the offline bracket </a:t>
+            </a:r>
+            <a:r>
+              <a:rPr sz="1300" b="0" i="0">
+                <a:solidFill>
+                  <a:srgbClr val="222A33"/>
+                </a:solidFill>
+                <a:latin typeface="Times New Roman"/>
+                <a:cs typeface="Times New Roman"/>
+              </a:rPr>
+              <a:t>(+5 to +20 pt over MoSE).</a:t>
+            </a:r>
+          </a:p>
+          <a:p>
+            <a:pPr indent="-256032" marL="256032">
+              <a:lnSpc>
+                <a:spcPct val="102000"/>
+              </a:lnSpc>
+              <a:spcBef>
+                <a:spcPts val="0"/>
+              </a:spcBef>
+              <a:spcAft>
+                <a:spcPts val="600"/>
+              </a:spcAft>
+              <a:buClr>
+                <a:srgbClr val="E0A32E"/>
+              </a:buClr>
+              <a:buFont typeface="Times New Roman"/>
+              <a:buChar char="▪"/>
+            </a:pPr>
+            <a:r>
+              <a:rPr sz="1300" b="0" i="0">
+                <a:solidFill>
+                  <a:srgbClr val="222A33"/>
+                </a:solidFill>
+                <a:latin typeface="Times New Roman"/>
+                <a:cs typeface="Times New Roman"/>
+              </a:rPr>
+              <a:t>But the whole offline family caps out — trails online by </a:t>
+            </a:r>
+            <a:r>
+              <a:rPr sz="1300" b="1" i="0">
+                <a:solidFill>
+                  <a:srgbClr val="B43232"/>
+                </a:solidFill>
+                <a:latin typeface="Times New Roman"/>
+                <a:cs typeface="Times New Roman"/>
+              </a:rPr>
+              <a:t>4 / 15 / 33 pt</a:t>
+            </a:r>
+            <a:r>
+              <a:rPr sz="1300" b="0" i="0">
+                <a:solidFill>
+                  <a:srgbClr val="222A33"/>
+                </a:solidFill>
+                <a:latin typeface="Times New Roman"/>
+                <a:cs typeface="Times New Roman"/>
+              </a:rPr>
+              <a:t>.</a:t>
+            </a:r>
+          </a:p>
+          <a:p>
+            <a:pPr indent="-256032" marL="256032">
+              <a:lnSpc>
+                <a:spcPct val="102000"/>
+              </a:lnSpc>
+              <a:spcBef>
+                <a:spcPts val="0"/>
+              </a:spcBef>
+              <a:spcAft>
+                <a:spcPts val="600"/>
+              </a:spcAft>
+              <a:buClr>
+                <a:srgbClr val="E0A32E"/>
+              </a:buClr>
+              <a:buFont typeface="Times New Roman"/>
+              <a:buChar char="▪"/>
+            </a:pPr>
+            <a:r>
+              <a:rPr sz="1300" b="0" i="0">
+                <a:solidFill>
+                  <a:srgbClr val="222A33"/>
+                </a:solidFill>
+                <a:latin typeface="Times New Roman"/>
+                <a:cs typeface="Times New Roman"/>
+              </a:rPr>
+              <a:t>Cross-expert offline coupling buys nothing (&lt;2% selection change).</a:t>
+            </a:r>
+          </a:p>
+          <a:p>
+            <a:pPr indent="-256032" marL="256032">
+              <a:lnSpc>
+                <a:spcPct val="102000"/>
+              </a:lnSpc>
+              <a:spcBef>
+                <a:spcPts val="0"/>
+              </a:spcBef>
+              <a:spcAft>
+                <a:spcPts val="600"/>
+              </a:spcAft>
+              <a:buClr>
+                <a:srgbClr val="E0A32E"/>
+              </a:buClr>
+              <a:buFont typeface="Times New Roman"/>
+              <a:buChar char="▪"/>
+            </a:pPr>
+            <a:r>
+              <a:rPr sz="1300" b="0" i="0">
+                <a:solidFill>
+                  <a:srgbClr val="222A33"/>
+                </a:solidFill>
+                <a:latin typeface="Times New Roman"/>
+                <a:cs typeface="Times New Roman"/>
+              </a:rPr>
+              <a:t>The headroom is </a:t>
+            </a:r>
+            <a:r>
+              <a:rPr sz="1300" b="1" i="0">
+                <a:solidFill>
+                  <a:srgbClr val="0E2A47"/>
+                </a:solidFill>
+                <a:latin typeface="Times New Roman"/>
+                <a:cs typeface="Times New Roman"/>
+              </a:rPr>
+              <a:t>per-token activation information</a:t>
+            </a:r>
+            <a:r>
+              <a:rPr sz="1300" b="0" i="0">
+                <a:solidFill>
+                  <a:srgbClr val="222A33"/>
+                </a:solidFill>
+                <a:latin typeface="Times New Roman"/>
+                <a:cs typeface="Times New Roman"/>
+              </a:rPr>
+              <a:t> no fixed ranking can capture.</a:t>
+            </a:r>
+          </a:p>
+        </p:txBody>
+      </p:sp>
+      <p:pic>
+        <p:nvPicPr>
+          <p:cNvPr id="12" name="Picture 11" descr="fig_offline_vs_online.png"/>
+          <p:cNvPicPr>
+            <a:picLocks noChangeAspect="1"/>
+          </p:cNvPicPr>
+          <p:nvPr/>
+        </p:nvPicPr>
+        <p:blipFill>
+          <a:blip r:embed="rId3"/>
+          <a:stretch>
+            <a:fillRect/>
+          </a:stretch>
+        </p:blipFill>
+        <p:spPr>
+          <a:xfrm>
+            <a:off x="6355079" y="1755648"/>
+            <a:ext cx="5287975" cy="3634036"/>
+          </a:xfrm>
+          <a:prstGeom prst="rect">
+            <a:avLst/>
+          </a:prstGeom>
+        </p:spPr>
+      </p:pic>
+      <p:sp>
+        <p:nvSpPr>
+          <p:cNvPr id="13" name="TextBox 12"/>
+          <p:cNvSpPr txBox="1"/>
+          <p:nvPr/>
+        </p:nvSpPr>
+        <p:spPr>
+          <a:xfrm>
+            <a:off x="6355079" y="5444548"/>
+            <a:ext cx="5287975" cy="365760"/>
+          </a:xfrm>
+          <a:prstGeom prst="rect">
+            <a:avLst/>
+          </a:prstGeom>
+          <a:noFill/>
+        </p:spPr>
+        <p:txBody>
+          <a:bodyPr wrap="square" anchor="t" lIns="45720" rIns="45720" tIns="0" bIns="0">
+            <a:spAutoFit/>
+          </a:bodyPr>
+          <a:lstStyle/>
+          <a:p>
+            <a:pPr algn="ctr">
+              <a:lnSpc>
+                <a:spcPct val="100000"/>
+              </a:lnSpc>
+              <a:spcBef>
+                <a:spcPts val="0"/>
+              </a:spcBef>
+              <a:spcAft>
+                <a:spcPts val="600"/>
+              </a:spcAft>
+            </a:pPr>
+            <a:r>
+              <a:rPr sz="1500" b="1" i="0">
+                <a:solidFill>
+                  <a:srgbClr val="0E2A47"/>
+                </a:solidFill>
+                <a:latin typeface="Times New Roman"/>
+                <a:cs typeface="Times New Roman"/>
+              </a:rPr>
+              <a:t>→ The deployable method must score online.</a:t>
+            </a:r>
+          </a:p>
+        </p:txBody>
+      </p:sp>
+    </p:spTree>
+  </p:cSld>
+  <p:clrMapOvr>
+    <a:masterClrMapping/>
+  </p:clrMapOvr>
+</p:sld>
+</file>
+
+<file path=ppt/slides/slide11.xml><?xml version="1.0" encoding="utf-8"?>
+<p:sld xmlns:a="http://schemas.openxmlformats.org/drawingml/2006/main" xmlns:p="http://schemas.openxmlformats.org/presentationml/2006/main" xmlns:r="http://schemas.openxmlformats.org/officeDocument/2006/relationships">
+  <p:cSld>
+    <p:bg>
+      <p:bgPr>
+        <a:solidFill>
+          <a:srgbClr val="0E2A47"/>
+        </a:solidFill>
+        <a:effectLst/>
+      </p:bgPr>
+    </p:bg>
+    <p:spTree>
+      <p:nvGrpSpPr>
+        <p:cNvPr id="1" name=""/>
+        <p:cNvGrpSpPr/>
+        <p:nvPr/>
+      </p:nvGrpSpPr>
+      <p:grpSpPr/>
+      <p:sp>
+        <p:nvSpPr>
+          <p:cNvPr id="2" name="Rectangle 1"/>
+          <p:cNvSpPr/>
+          <p:nvPr/>
+        </p:nvSpPr>
+        <p:spPr>
+          <a:xfrm>
+            <a:off x="548640" y="2514600"/>
+            <a:ext cx="1280160" cy="128016"/>
+          </a:xfrm>
+          <a:prstGeom prst="rect">
+            <a:avLst/>
+          </a:prstGeom>
+          <a:solidFill>
+            <a:srgbClr val="E0A32E"/>
+          </a:solidFill>
+          <a:ln>
+            <a:noFill/>
+          </a:ln>
+          <a:effectLst/>
+        </p:spPr>
+        <p:style>
+          <a:lnRef idx="1">
+            <a:schemeClr val="accent1"/>
+          </a:lnRef>
+          <a:fillRef idx="3">
+            <a:schemeClr val="accent1"/>
+          </a:fillRef>
+          <a:effectRef idx="2">
+            <a:schemeClr val="accent1"/>
+          </a:effectRef>
+          <a:fontRef idx="minor">
+            <a:schemeClr val="lt1"/>
+          </a:fontRef>
+        </p:style>
+        <p:txBody>
+          <a:bodyPr rtlCol="0" anchor="ctr"/>
+          <a:lstStyle/>
+          <a:p>
+            <a:pPr algn="ctr"/>
+          </a:p>
+        </p:txBody>
+      </p:sp>
+      <p:sp>
+        <p:nvSpPr>
+          <p:cNvPr id="3" name="TextBox 2"/>
+          <p:cNvSpPr txBox="1"/>
+          <p:nvPr/>
+        </p:nvSpPr>
+        <p:spPr>
+          <a:xfrm>
+            <a:off x="548640" y="2852928"/>
+            <a:ext cx="11094415" cy="1097280"/>
+          </a:xfrm>
+          <a:prstGeom prst="rect">
+            <a:avLst/>
+          </a:prstGeom>
+          <a:noFill/>
+        </p:spPr>
+        <p:txBody>
+          <a:bodyPr wrap="square" anchor="t" lIns="45720" rIns="45720" tIns="0" bIns="0">
+            <a:spAutoFit/>
+          </a:bodyPr>
+          <a:lstStyle/>
+          <a:p>
+            <a:pPr algn="l">
+              <a:lnSpc>
+                <a:spcPct val="100000"/>
+              </a:lnSpc>
+              <a:spcBef>
+                <a:spcPts val="0"/>
+              </a:spcBef>
+              <a:spcAft>
+                <a:spcPts val="600"/>
+              </a:spcAft>
+            </a:pPr>
+            <a:r>
+              <a:rPr sz="4000" b="1" i="0">
+                <a:solidFill>
+                  <a:srgbClr val="FFFFFF"/>
+                </a:solidFill>
+                <a:latin typeface="Times New Roman"/>
+                <a:cs typeface="Times New Roman"/>
+              </a:rPr>
+              <a:t>Bonus Results</a:t>
+            </a:r>
+          </a:p>
+        </p:txBody>
+      </p:sp>
+      <p:sp>
+        <p:nvSpPr>
+          <p:cNvPr id="4" name="TextBox 3"/>
+          <p:cNvSpPr txBox="1"/>
+          <p:nvPr/>
+        </p:nvSpPr>
+        <p:spPr>
+          <a:xfrm>
+            <a:off x="548640" y="3703320"/>
+            <a:ext cx="11094415" cy="822960"/>
+          </a:xfrm>
+          <a:prstGeom prst="rect">
+            <a:avLst/>
+          </a:prstGeom>
+          <a:noFill/>
+        </p:spPr>
+        <p:txBody>
+          <a:bodyPr wrap="square" anchor="t" lIns="45720" rIns="45720" tIns="0" bIns="0">
+            <a:spAutoFit/>
+          </a:bodyPr>
+          <a:lstStyle/>
+          <a:p>
+            <a:pPr algn="l">
+              <a:lnSpc>
+                <a:spcPct val="100000"/>
+              </a:lnSpc>
+              <a:spcBef>
+                <a:spcPts val="0"/>
+              </a:spcBef>
+              <a:spcAft>
+                <a:spcPts val="600"/>
+              </a:spcAft>
+            </a:pPr>
+            <a:r>
+              <a:rPr sz="2000" b="0" i="0">
+                <a:solidFill>
+                  <a:srgbClr val="C9D6E3"/>
+                </a:solidFill>
+                <a:latin typeface="Times New Roman"/>
+                <a:cs typeface="Times New Roman"/>
+              </a:rPr>
+              <a:t>Online selection composes, a threshold beats top-B, and where the cloud win really is</a:t>
+            </a:r>
+          </a:p>
+        </p:txBody>
+      </p:sp>
+      <p:pic>
+        <p:nvPicPr>
+          <p:cNvPr id="5" name="Picture 4" descr="amazon_logo.png"/>
+          <p:cNvPicPr>
+            <a:picLocks noChangeAspect="1"/>
+          </p:cNvPicPr>
+          <p:nvPr/>
+        </p:nvPicPr>
+        <p:blipFill>
+          <a:blip r:embed="rId2"/>
+          <a:stretch>
+            <a:fillRect/>
+          </a:stretch>
+        </p:blipFill>
+        <p:spPr>
+          <a:xfrm>
+            <a:off x="192024" y="6309360"/>
+            <a:ext cx="1463040" cy="440740"/>
+          </a:xfrm>
+          <a:prstGeom prst="rect">
+            <a:avLst/>
+          </a:prstGeom>
+        </p:spPr>
+      </p:pic>
+    </p:spTree>
+  </p:cSld>
+  <p:clrMapOvr>
+    <a:masterClrMapping/>
+  </p:clrMapOvr>
+</p:sld>
+</file>
+
+<file path=ppt/slides/slide12.xml><?xml version="1.0" encoding="utf-8"?>
+<p:sld xmlns:a="http://schemas.openxmlformats.org/drawingml/2006/main" xmlns:p="http://schemas.openxmlformats.org/presentationml/2006/main" xmlns:r="http://schemas.openxmlformats.org/officeDocument/2006/relationships">
+  <p:cSld>
+    <p:bg>
+      <p:bgPr>
+        <a:solidFill>
+          <a:srgbClr val="F4F6F9"/>
+        </a:solidFill>
+        <a:effectLst/>
+      </p:bgPr>
+    </p:bg>
+    <p:spTree>
+      <p:nvGrpSpPr>
+        <p:cNvPr id="1" name=""/>
+        <p:cNvGrpSpPr/>
+        <p:nvPr/>
+      </p:nvGrpSpPr>
+      <p:grpSpPr/>
+      <p:sp>
+        <p:nvSpPr>
+          <p:cNvPr id="2" name="Rectangle 1"/>
+          <p:cNvSpPr/>
+          <p:nvPr/>
+        </p:nvSpPr>
+        <p:spPr>
+          <a:xfrm>
+            <a:off x="548640" y="310896"/>
+            <a:ext cx="128016" cy="566928"/>
+          </a:xfrm>
+          <a:prstGeom prst="rect">
+            <a:avLst/>
+          </a:prstGeom>
+          <a:solidFill>
+            <a:srgbClr val="E0A32E"/>
+          </a:solidFill>
+          <a:ln>
+            <a:noFill/>
+          </a:ln>
+          <a:effectLst/>
+        </p:spPr>
+        <p:style>
+          <a:lnRef idx="1">
+            <a:schemeClr val="accent1"/>
+          </a:lnRef>
+          <a:fillRef idx="3">
+            <a:schemeClr val="accent1"/>
+          </a:fillRef>
+          <a:effectRef idx="2">
+            <a:schemeClr val="accent1"/>
+          </a:effectRef>
+          <a:fontRef idx="minor">
+            <a:schemeClr val="lt1"/>
+          </a:fontRef>
+        </p:style>
+        <p:txBody>
+          <a:bodyPr rtlCol="0" anchor="ctr"/>
+          <a:lstStyle/>
+          <a:p>
+            <a:pPr algn="ctr"/>
+          </a:p>
+        </p:txBody>
+      </p:sp>
+      <p:sp>
+        <p:nvSpPr>
+          <p:cNvPr id="3" name="TextBox 2"/>
+          <p:cNvSpPr txBox="1"/>
+          <p:nvPr/>
+        </p:nvSpPr>
+        <p:spPr>
+          <a:xfrm>
+            <a:off x="822959" y="201168"/>
+            <a:ext cx="10820095" cy="786384"/>
+          </a:xfrm>
+          <a:prstGeom prst="rect">
+            <a:avLst/>
+          </a:prstGeom>
+          <a:noFill/>
+        </p:spPr>
+        <p:txBody>
+          <a:bodyPr wrap="square" anchor="ctr" lIns="45720" rIns="45720" tIns="0" bIns="0">
+            <a:spAutoFit/>
+          </a:bodyPr>
+          <a:lstStyle/>
+          <a:p>
+            <a:pPr algn="l">
+              <a:lnSpc>
+                <a:spcPct val="100000"/>
+              </a:lnSpc>
+              <a:spcBef>
+                <a:spcPts val="0"/>
+              </a:spcBef>
+              <a:spcAft>
+                <a:spcPts val="600"/>
+              </a:spcAft>
+            </a:pPr>
+            <a:r>
+              <a:rPr sz="3000" b="1" i="0">
+                <a:solidFill>
+                  <a:srgbClr val="0E2A47"/>
+                </a:solidFill>
+                <a:latin typeface="Times New Roman"/>
+                <a:cs typeface="Times New Roman"/>
+              </a:rPr>
+              <a:t>Online Selection Stacks on a Compressed Base</a:t>
+            </a:r>
+          </a:p>
+        </p:txBody>
+      </p:sp>
+      <p:sp>
+        <p:nvSpPr>
+          <p:cNvPr id="4" name="TextBox 3"/>
+          <p:cNvSpPr txBox="1"/>
+          <p:nvPr/>
+        </p:nvSpPr>
+        <p:spPr>
+          <a:xfrm>
+            <a:off x="548640" y="1078992"/>
+            <a:ext cx="11094415" cy="457200"/>
+          </a:xfrm>
+          <a:prstGeom prst="rect">
+            <a:avLst/>
+          </a:prstGeom>
+          <a:noFill/>
+        </p:spPr>
+        <p:txBody>
+          <a:bodyPr wrap="square" anchor="t" lIns="45720" rIns="45720" tIns="0" bIns="0">
+            <a:spAutoFit/>
+          </a:bodyPr>
+          <a:lstStyle/>
+          <a:p>
+            <a:pPr algn="l">
+              <a:lnSpc>
+                <a:spcPct val="100000"/>
+              </a:lnSpc>
+              <a:spcBef>
+                <a:spcPts val="0"/>
+              </a:spcBef>
+              <a:spcAft>
+                <a:spcPts val="600"/>
+              </a:spcAft>
+            </a:pPr>
+            <a:r>
+              <a:rPr sz="2000" b="1" i="0">
+                <a:solidFill>
+                  <a:srgbClr val="1C7293"/>
+                </a:solidFill>
+                <a:latin typeface="Times New Roman"/>
+                <a:cs typeface="Times New Roman"/>
+              </a:rPr>
+              <a:t>On a 33%-Nyström + KD-healed base, per-token selection degrades like the dense model</a:t>
+            </a:r>
+          </a:p>
+        </p:txBody>
+      </p:sp>
+      <p:pic>
+        <p:nvPicPr>
+          <p:cNvPr id="5" name="Picture 4" descr="amazon_logo.png"/>
+          <p:cNvPicPr>
+            <a:picLocks noChangeAspect="1"/>
+          </p:cNvPicPr>
+          <p:nvPr/>
+        </p:nvPicPr>
+        <p:blipFill>
+          <a:blip r:embed="rId2"/>
+          <a:stretch>
+            <a:fillRect/>
+          </a:stretch>
+        </p:blipFill>
+        <p:spPr>
+          <a:xfrm>
+            <a:off x="192024" y="6309360"/>
+            <a:ext cx="1463040" cy="440740"/>
+          </a:xfrm>
+          <a:prstGeom prst="rect">
+            <a:avLst/>
+          </a:prstGeom>
+        </p:spPr>
+      </p:pic>
+      <p:sp>
+        <p:nvSpPr>
+          <p:cNvPr id="6" name="Rectangle 5"/>
+          <p:cNvSpPr/>
+          <p:nvPr/>
+        </p:nvSpPr>
+        <p:spPr>
+          <a:xfrm>
+            <a:off x="11140135" y="6400800"/>
+            <a:ext cx="109728" cy="237744"/>
+          </a:xfrm>
+          <a:prstGeom prst="rect">
+            <a:avLst/>
+          </a:prstGeom>
+          <a:solidFill>
+            <a:srgbClr val="E0A32E"/>
+          </a:solidFill>
+          <a:ln>
+            <a:noFill/>
+          </a:ln>
+          <a:effectLst/>
+        </p:spPr>
+        <p:style>
+          <a:lnRef idx="1">
+            <a:schemeClr val="accent1"/>
+          </a:lnRef>
+          <a:fillRef idx="3">
+            <a:schemeClr val="accent1"/>
+          </a:fillRef>
+          <a:effectRef idx="2">
+            <a:schemeClr val="accent1"/>
+          </a:effectRef>
+          <a:fontRef idx="minor">
+            <a:schemeClr val="lt1"/>
+          </a:fontRef>
+        </p:style>
+        <p:txBody>
+          <a:bodyPr rtlCol="0" anchor="ctr"/>
+          <a:lstStyle/>
+          <a:p>
+            <a:pPr algn="ctr"/>
+          </a:p>
+        </p:txBody>
+      </p:sp>
+      <p:sp>
+        <p:nvSpPr>
+          <p:cNvPr id="7" name="TextBox 6"/>
+          <p:cNvSpPr txBox="1"/>
+          <p:nvPr/>
+        </p:nvSpPr>
+        <p:spPr>
+          <a:xfrm>
+            <a:off x="11323015" y="6364224"/>
+            <a:ext cx="685800" cy="320040"/>
+          </a:xfrm>
+          <a:prstGeom prst="rect">
+            <a:avLst/>
+          </a:prstGeom>
+          <a:noFill/>
+        </p:spPr>
+        <p:txBody>
+          <a:bodyPr wrap="square" anchor="ctr" lIns="45720" rIns="45720" tIns="0" bIns="0">
+            <a:spAutoFit/>
+          </a:bodyPr>
+          <a:lstStyle/>
+          <a:p>
+            <a:pPr algn="l">
+              <a:lnSpc>
+                <a:spcPct val="100000"/>
+              </a:lnSpc>
+              <a:spcBef>
+                <a:spcPts val="0"/>
+              </a:spcBef>
+              <a:spcAft>
+                <a:spcPts val="600"/>
+              </a:spcAft>
+            </a:pPr>
+            <a:r>
+              <a:rPr sz="1200" b="1" i="0">
+                <a:solidFill>
+                  <a:srgbClr val="5C6B7A"/>
+                </a:solidFill>
+                <a:latin typeface="Times New Roman"/>
+                <a:cs typeface="Times New Roman"/>
+              </a:rPr>
+              <a:t>10</a:t>
+            </a:r>
+          </a:p>
+        </p:txBody>
+      </p:sp>
+      <p:sp>
+        <p:nvSpPr>
+          <p:cNvPr id="8" name="TextBox 7"/>
+          <p:cNvSpPr txBox="1"/>
+          <p:nvPr/>
+        </p:nvSpPr>
+        <p:spPr>
+          <a:xfrm>
+            <a:off x="1828800" y="6382512"/>
+            <a:ext cx="8229600" cy="320040"/>
+          </a:xfrm>
+          <a:prstGeom prst="rect">
+            <a:avLst/>
+          </a:prstGeom>
+          <a:noFill/>
+        </p:spPr>
+        <p:txBody>
+          <a:bodyPr wrap="square" anchor="ctr" lIns="45720" rIns="45720" tIns="0" bIns="0">
+            <a:spAutoFit/>
+          </a:bodyPr>
+          <a:lstStyle/>
+          <a:p>
+            <a:pPr algn="l">
+              <a:lnSpc>
+                <a:spcPct val="100000"/>
+              </a:lnSpc>
+              <a:spcBef>
+                <a:spcPts val="0"/>
+              </a:spcBef>
+              <a:spcAft>
+                <a:spcPts val="600"/>
+              </a:spcAft>
+            </a:pPr>
+            <a:r>
+              <a:rPr sz="1100" b="0" i="1">
+                <a:solidFill>
+                  <a:srgbClr val="5C6B7A"/>
+                </a:solidFill>
+                <a:latin typeface="Times New Roman"/>
+                <a:cs typeface="Times New Roman"/>
+              </a:rPr>
+              <a:t>Per-Token Adaptive Channel Activation for MoE</a:t>
+            </a:r>
+          </a:p>
+        </p:txBody>
+      </p:sp>
+      <p:graphicFrame>
+        <p:nvGraphicFramePr>
+          <p:cNvPr id="9" name="Table 8"/>
+          <p:cNvGraphicFramePr>
+            <a:graphicFrameLocks noGrp="1"/>
+          </p:cNvGraphicFramePr>
+          <p:nvPr/>
+        </p:nvGraphicFramePr>
+        <p:xfrm>
+          <a:off x="1706727" y="1892808"/>
+          <a:ext cx="8778239" cy="2139696"/>
+        </p:xfrm>
+        <a:graphic>
+          <a:graphicData uri="http://schemas.openxmlformats.org/drawingml/2006/table">
+            <a:tbl>
+              <a:tblPr firstRow="1">
+                <a:tableStyleId>{5C22544A-7EE6-4342-B048-85BDC9FD1C3A}</a:tableStyleId>
+              </a:tblPr>
+              <a:tblGrid>
+                <a:gridCol w="1234440"/>
+                <a:gridCol w="1600200"/>
+                <a:gridCol w="1874519"/>
+                <a:gridCol w="1325880"/>
+                <a:gridCol w="1691640"/>
+                <a:gridCol w="1051560"/>
+              </a:tblGrid>
+              <a:tr h="457200">
+                <a:tc>
+                  <a:txBody>
+                    <a:bodyPr wrap="square"/>
+                    <a:lstStyle/>
+                    <a:p>
+                      <a:pPr algn="l"/>
+                      <a:r>
+                        <a:rPr sz="1500" b="1" i="0">
+                          <a:solidFill>
+                            <a:srgbClr val="FFFFFF"/>
+                          </a:solidFill>
+                          <a:latin typeface="Times New Roman"/>
+                          <a:cs typeface="Times New Roman"/>
+                        </a:rPr>
+                        <a:t>nominal</a:t>
+                      </a:r>
+                    </a:p>
+                  </a:txBody>
+                  <a:tcPr marL="54864" marR="54864" marT="9144" marB="9144" anchor="ctr">
+                    <a:solidFill>
+                      <a:srgbClr val="0E2A47"/>
+                    </a:solidFill>
+                  </a:tcPr>
+                </a:tc>
+                <a:tc>
+                  <a:txBody>
+                    <a:bodyPr wrap="square"/>
+                    <a:lstStyle/>
+                    <a:p>
+                      <a:pPr algn="ctr"/>
+                      <a:r>
+                        <a:rPr sz="1500" b="1" i="0">
+                          <a:solidFill>
+                            <a:srgbClr val="FFFFFF"/>
+                          </a:solidFill>
+                          <a:latin typeface="Times New Roman"/>
+                          <a:cs typeface="Times New Roman"/>
+                        </a:rPr>
+                        <a:t>online cut</a:t>
+                      </a:r>
+                    </a:p>
+                  </a:txBody>
+                  <a:tcPr marL="54864" marR="54864" marT="9144" marB="9144" anchor="ctr">
+                    <a:solidFill>
+                      <a:srgbClr val="0E2A47"/>
+                    </a:solidFill>
+                  </a:tcPr>
+                </a:tc>
+                <a:tc>
+                  <a:txBody>
+                    <a:bodyPr wrap="square"/>
+                    <a:lstStyle/>
+                    <a:p>
+                      <a:pPr algn="ctr"/>
+                      <a:r>
+                        <a:rPr sz="1500" b="1" i="0">
+                          <a:solidFill>
+                            <a:srgbClr val="FFFFFF"/>
+                          </a:solidFill>
+                          <a:latin typeface="Times New Roman"/>
+                          <a:cs typeface="Times New Roman"/>
+                        </a:rPr>
+                        <a:t>wikitext ppl ↓</a:t>
+                      </a:r>
+                    </a:p>
+                  </a:txBody>
+                  <a:tcPr marL="54864" marR="54864" marT="9144" marB="9144" anchor="ctr">
+                    <a:solidFill>
+                      <a:srgbClr val="0E2A47"/>
+                    </a:solidFill>
+                  </a:tcPr>
+                </a:tc>
+                <a:tc>
+                  <a:txBody>
+                    <a:bodyPr wrap="square"/>
+                    <a:lstStyle/>
+                    <a:p>
+                      <a:pPr algn="ctr"/>
+                      <a:r>
+                        <a:rPr sz="1500" b="1" i="0">
+                          <a:solidFill>
+                            <a:srgbClr val="FFFFFF"/>
+                          </a:solidFill>
+                          <a:latin typeface="Times New Roman"/>
+                          <a:cs typeface="Times New Roman"/>
+                        </a:rPr>
+                        <a:t>mmlu ↑</a:t>
+                      </a:r>
+                    </a:p>
+                  </a:txBody>
+                  <a:tcPr marL="54864" marR="54864" marT="9144" marB="9144" anchor="ctr">
+                    <a:solidFill>
+                      <a:srgbClr val="0E2A47"/>
+                    </a:solidFill>
+                  </a:tcPr>
+                </a:tc>
+                <a:tc>
+                  <a:txBody>
+                    <a:bodyPr wrap="square"/>
+                    <a:lstStyle/>
+                    <a:p>
+                      <a:pPr algn="ctr"/>
+                      <a:r>
+                        <a:rPr sz="1500" b="1" i="0">
+                          <a:solidFill>
+                            <a:srgbClr val="FFFFFF"/>
+                          </a:solidFill>
+                          <a:latin typeface="Times New Roman"/>
+                          <a:cs typeface="Times New Roman"/>
+                        </a:rPr>
+                        <a:t>hellaswag ↑</a:t>
+                      </a:r>
+                    </a:p>
+                  </a:txBody>
+                  <a:tcPr marL="54864" marR="54864" marT="9144" marB="9144" anchor="ctr">
+                    <a:solidFill>
+                      <a:srgbClr val="0E2A47"/>
+                    </a:solidFill>
+                  </a:tcPr>
+                </a:tc>
+                <a:tc>
+                  <a:txBody>
+                    <a:bodyPr wrap="square"/>
+                    <a:lstStyle/>
+                    <a:p>
+                      <a:pPr algn="ctr"/>
+                      <a:r>
+                        <a:rPr sz="1500" b="1" i="0">
+                          <a:solidFill>
+                            <a:srgbClr val="FFFFFF"/>
+                          </a:solidFill>
+                          <a:latin typeface="Times New Roman"/>
+                          <a:cs typeface="Times New Roman"/>
+                        </a:rPr>
+                        <a:t>gsm8k ↑</a:t>
+                      </a:r>
+                    </a:p>
+                  </a:txBody>
+                  <a:tcPr marL="54864" marR="54864" marT="9144" marB="9144" anchor="ctr">
+                    <a:solidFill>
+                      <a:srgbClr val="0E2A47"/>
+                    </a:solidFill>
+                  </a:tcPr>
+                </a:tc>
+              </a:tr>
+              <a:tr h="420624">
+                <a:tc>
+                  <a:txBody>
+                    <a:bodyPr wrap="square"/>
+                    <a:lstStyle/>
+                    <a:p>
+                      <a:pPr algn="l"/>
+                      <a:r>
+                        <a:rPr sz="1500" b="0" i="0">
+                          <a:solidFill>
+                            <a:srgbClr val="222A33"/>
+                          </a:solidFill>
+                          <a:latin typeface="Times New Roman"/>
+                          <a:cs typeface="Times New Roman"/>
+                        </a:rPr>
+                        <a:t>base</a:t>
+                      </a:r>
+                    </a:p>
+                  </a:txBody>
+                  <a:tcPr marL="54864" marR="54864" marT="9144" marB="9144" anchor="ctr">
+                    <a:solidFill>
+                      <a:srgbClr val="FFFFFF"/>
+                    </a:solidFill>
+                  </a:tcPr>
+                </a:tc>
+                <a:tc>
+                  <a:txBody>
+                    <a:bodyPr wrap="square"/>
+                    <a:lstStyle/>
+                    <a:p>
+                      <a:pPr algn="ctr"/>
+                      <a:r>
+                        <a:rPr sz="1500" b="0" i="0">
+                          <a:solidFill>
+                            <a:srgbClr val="222A33"/>
+                          </a:solidFill>
+                          <a:latin typeface="Times New Roman"/>
+                          <a:cs typeface="Times New Roman"/>
+                        </a:rPr>
+                        <a:t>0%</a:t>
+                      </a:r>
+                    </a:p>
+                  </a:txBody>
+                  <a:tcPr marL="54864" marR="54864" marT="9144" marB="9144" anchor="ctr">
+                    <a:solidFill>
+                      <a:srgbClr val="FFFFFF"/>
+                    </a:solidFill>
+                  </a:tcPr>
+                </a:tc>
+                <a:tc>
+                  <a:txBody>
+                    <a:bodyPr wrap="square"/>
+                    <a:lstStyle/>
+                    <a:p>
+                      <a:pPr algn="ctr"/>
+                      <a:r>
+                        <a:rPr sz="1500" b="0" i="0">
+                          <a:solidFill>
+                            <a:srgbClr val="222A33"/>
+                          </a:solidFill>
+                          <a:latin typeface="Times New Roman"/>
+                          <a:cs typeface="Times New Roman"/>
+                        </a:rPr>
+                        <a:t>10.11</a:t>
+                      </a:r>
+                    </a:p>
+                  </a:txBody>
+                  <a:tcPr marL="54864" marR="54864" marT="9144" marB="9144" anchor="ctr">
+                    <a:solidFill>
+                      <a:srgbClr val="FFFFFF"/>
+                    </a:solidFill>
+                  </a:tcPr>
+                </a:tc>
+                <a:tc>
+                  <a:txBody>
+                    <a:bodyPr wrap="square"/>
+                    <a:lstStyle/>
+                    <a:p>
+                      <a:pPr algn="ctr"/>
+                      <a:r>
+                        <a:rPr sz="1500" b="0" i="0">
+                          <a:solidFill>
+                            <a:srgbClr val="222A33"/>
+                          </a:solidFill>
+                          <a:latin typeface="Times New Roman"/>
+                          <a:cs typeface="Times New Roman"/>
+                        </a:rPr>
+                        <a:t>0.767</a:t>
+                      </a:r>
+                    </a:p>
+                  </a:txBody>
+                  <a:tcPr marL="54864" marR="54864" marT="9144" marB="9144" anchor="ctr">
+                    <a:solidFill>
+                      <a:srgbClr val="FFFFFF"/>
+                    </a:solidFill>
+                  </a:tcPr>
+                </a:tc>
+                <a:tc>
+                  <a:txBody>
+                    <a:bodyPr wrap="square"/>
+                    <a:lstStyle/>
+                    <a:p>
+                      <a:pPr algn="ctr"/>
+                      <a:r>
+                        <a:rPr sz="1500" b="0" i="0">
+                          <a:solidFill>
+                            <a:srgbClr val="222A33"/>
+                          </a:solidFill>
+                          <a:latin typeface="Times New Roman"/>
+                          <a:cs typeface="Times New Roman"/>
+                        </a:rPr>
+                        <a:t>0.799</a:t>
+                      </a:r>
+                    </a:p>
+                  </a:txBody>
+                  <a:tcPr marL="54864" marR="54864" marT="9144" marB="9144" anchor="ctr">
+                    <a:solidFill>
+                      <a:srgbClr val="FFFFFF"/>
+                    </a:solidFill>
+                  </a:tcPr>
+                </a:tc>
+                <a:tc>
+                  <a:txBody>
+                    <a:bodyPr wrap="square"/>
+                    <a:lstStyle/>
+                    <a:p>
+                      <a:pPr algn="ctr"/>
+                      <a:r>
+                        <a:rPr sz="1500" b="0" i="0">
+                          <a:solidFill>
+                            <a:srgbClr val="222A33"/>
+                          </a:solidFill>
+                          <a:latin typeface="Times New Roman"/>
+                          <a:cs typeface="Times New Roman"/>
+                        </a:rPr>
+                        <a:t>0.817</a:t>
+                      </a:r>
+                    </a:p>
+                  </a:txBody>
+                  <a:tcPr marL="54864" marR="54864" marT="9144" marB="9144" anchor="ctr">
+                    <a:solidFill>
+                      <a:srgbClr val="FFFFFF"/>
+                    </a:solidFill>
+                  </a:tcPr>
+                </a:tc>
+              </a:tr>
+              <a:tr h="420624">
+                <a:tc>
+                  <a:txBody>
+                    <a:bodyPr wrap="square"/>
+                    <a:lstStyle/>
+                    <a:p>
+                      <a:pPr algn="l"/>
+                      <a:r>
+                        <a:rPr sz="1500" b="0" i="0">
+                          <a:solidFill>
+                            <a:srgbClr val="222A33"/>
+                          </a:solidFill>
+                          <a:latin typeface="Times New Roman"/>
+                          <a:cs typeface="Times New Roman"/>
+                        </a:rPr>
+                        <a:t>50%</a:t>
+                      </a:r>
+                    </a:p>
+                  </a:txBody>
+                  <a:tcPr marL="54864" marR="54864" marT="9144" marB="9144" anchor="ctr">
+                    <a:solidFill>
+                      <a:srgbClr val="EAEFF4"/>
+                    </a:solidFill>
+                  </a:tcPr>
+                </a:tc>
+                <a:tc>
+                  <a:txBody>
+                    <a:bodyPr wrap="square"/>
+                    <a:lstStyle/>
+                    <a:p>
+                      <a:pPr algn="ctr"/>
+                      <a:r>
+                        <a:rPr sz="1500" b="0" i="0">
+                          <a:solidFill>
+                            <a:srgbClr val="222A33"/>
+                          </a:solidFill>
+                          <a:latin typeface="Times New Roman"/>
+                          <a:cs typeface="Times New Roman"/>
+                        </a:rPr>
+                        <a:t>−32.6%</a:t>
+                      </a:r>
+                    </a:p>
+                  </a:txBody>
+                  <a:tcPr marL="54864" marR="54864" marT="9144" marB="9144" anchor="ctr">
+                    <a:solidFill>
+                      <a:srgbClr val="EAEFF4"/>
+                    </a:solidFill>
+                  </a:tcPr>
+                </a:tc>
+                <a:tc>
+                  <a:txBody>
+                    <a:bodyPr wrap="square"/>
+                    <a:lstStyle/>
+                    <a:p>
+                      <a:pPr algn="ctr"/>
+                      <a:r>
+                        <a:rPr sz="1500" b="0" i="0">
+                          <a:solidFill>
+                            <a:srgbClr val="222A33"/>
+                          </a:solidFill>
+                          <a:latin typeface="Times New Roman"/>
+                          <a:cs typeface="Times New Roman"/>
+                        </a:rPr>
+                        <a:t>10.30</a:t>
+                      </a:r>
+                    </a:p>
+                  </a:txBody>
+                  <a:tcPr marL="54864" marR="54864" marT="9144" marB="9144" anchor="ctr">
+                    <a:solidFill>
+                      <a:srgbClr val="EAEFF4"/>
+                    </a:solidFill>
+                  </a:tcPr>
+                </a:tc>
+                <a:tc>
+                  <a:txBody>
+                    <a:bodyPr wrap="square"/>
+                    <a:lstStyle/>
+                    <a:p>
+                      <a:pPr algn="ctr"/>
+                      <a:r>
+                        <a:rPr sz="1500" b="0" i="0">
+                          <a:solidFill>
+                            <a:srgbClr val="222A33"/>
+                          </a:solidFill>
+                          <a:latin typeface="Times New Roman"/>
+                          <a:cs typeface="Times New Roman"/>
+                        </a:rPr>
+                        <a:t>0.763</a:t>
+                      </a:r>
+                    </a:p>
+                  </a:txBody>
+                  <a:tcPr marL="54864" marR="54864" marT="9144" marB="9144" anchor="ctr">
+                    <a:solidFill>
+                      <a:srgbClr val="EAEFF4"/>
+                    </a:solidFill>
+                  </a:tcPr>
+                </a:tc>
+                <a:tc>
+                  <a:txBody>
+                    <a:bodyPr wrap="square"/>
+                    <a:lstStyle/>
+                    <a:p>
+                      <a:pPr algn="ctr"/>
+                      <a:r>
+                        <a:rPr sz="1500" b="0" i="0">
+                          <a:solidFill>
+                            <a:srgbClr val="222A33"/>
+                          </a:solidFill>
+                          <a:latin typeface="Times New Roman"/>
+                          <a:cs typeface="Times New Roman"/>
+                        </a:rPr>
+                        <a:t>0.795</a:t>
+                      </a:r>
+                    </a:p>
+                  </a:txBody>
+                  <a:tcPr marL="54864" marR="54864" marT="9144" marB="9144" anchor="ctr">
+                    <a:solidFill>
+                      <a:srgbClr val="EAEFF4"/>
+                    </a:solidFill>
+                  </a:tcPr>
+                </a:tc>
+                <a:tc>
+                  <a:txBody>
+                    <a:bodyPr wrap="square"/>
+                    <a:lstStyle/>
+                    <a:p>
+                      <a:pPr algn="ctr"/>
+                      <a:r>
+                        <a:rPr sz="1500" b="0" i="0">
+                          <a:solidFill>
+                            <a:srgbClr val="222A33"/>
+                          </a:solidFill>
+                          <a:latin typeface="Times New Roman"/>
+                          <a:cs typeface="Times New Roman"/>
+                        </a:rPr>
+                        <a:t>0.820</a:t>
+                      </a:r>
+                    </a:p>
+                  </a:txBody>
+                  <a:tcPr marL="54864" marR="54864" marT="9144" marB="9144" anchor="ctr">
+                    <a:solidFill>
+                      <a:srgbClr val="EAEFF4"/>
+                    </a:solidFill>
+                  </a:tcPr>
+                </a:tc>
+              </a:tr>
+              <a:tr h="420624">
+                <a:tc>
+                  <a:txBody>
+                    <a:bodyPr wrap="square"/>
+                    <a:lstStyle/>
+                    <a:p>
+                      <a:pPr algn="l"/>
+                      <a:r>
+                        <a:rPr sz="1500" b="0" i="0">
+                          <a:solidFill>
+                            <a:srgbClr val="222A33"/>
+                          </a:solidFill>
+                          <a:latin typeface="Times New Roman"/>
+                          <a:cs typeface="Times New Roman"/>
+                        </a:rPr>
+                        <a:t>70%</a:t>
+                      </a:r>
+                    </a:p>
+                  </a:txBody>
+                  <a:tcPr marL="54864" marR="54864" marT="9144" marB="9144" anchor="ctr">
+                    <a:solidFill>
+                      <a:srgbClr val="FFFFFF"/>
+                    </a:solidFill>
+                  </a:tcPr>
+                </a:tc>
+                <a:tc>
+                  <a:txBody>
+                    <a:bodyPr wrap="square"/>
+                    <a:lstStyle/>
+                    <a:p>
+                      <a:pPr algn="ctr"/>
+                      <a:r>
+                        <a:rPr sz="1500" b="0" i="0">
+                          <a:solidFill>
+                            <a:srgbClr val="222A33"/>
+                          </a:solidFill>
+                          <a:latin typeface="Times New Roman"/>
+                          <a:cs typeface="Times New Roman"/>
+                        </a:rPr>
+                        <a:t>−45.7%</a:t>
+                      </a:r>
+                    </a:p>
+                  </a:txBody>
+                  <a:tcPr marL="54864" marR="54864" marT="9144" marB="9144" anchor="ctr">
+                    <a:solidFill>
+                      <a:srgbClr val="FFFFFF"/>
+                    </a:solidFill>
+                  </a:tcPr>
+                </a:tc>
+                <a:tc>
+                  <a:txBody>
+                    <a:bodyPr wrap="square"/>
+                    <a:lstStyle/>
+                    <a:p>
+                      <a:pPr algn="ctr"/>
+                      <a:r>
+                        <a:rPr sz="1500" b="0" i="0">
+                          <a:solidFill>
+                            <a:srgbClr val="222A33"/>
+                          </a:solidFill>
+                          <a:latin typeface="Times New Roman"/>
+                          <a:cs typeface="Times New Roman"/>
+                        </a:rPr>
+                        <a:t>10.96</a:t>
+                      </a:r>
+                    </a:p>
+                  </a:txBody>
+                  <a:tcPr marL="54864" marR="54864" marT="9144" marB="9144" anchor="ctr">
+                    <a:solidFill>
+                      <a:srgbClr val="FFFFFF"/>
+                    </a:solidFill>
+                  </a:tcPr>
+                </a:tc>
+                <a:tc>
+                  <a:txBody>
+                    <a:bodyPr wrap="square"/>
+                    <a:lstStyle/>
+                    <a:p>
+                      <a:pPr algn="ctr"/>
+                      <a:r>
+                        <a:rPr sz="1500" b="0" i="0">
+                          <a:solidFill>
+                            <a:srgbClr val="222A33"/>
+                          </a:solidFill>
+                          <a:latin typeface="Times New Roman"/>
+                          <a:cs typeface="Times New Roman"/>
+                        </a:rPr>
+                        <a:t>0.749</a:t>
+                      </a:r>
+                    </a:p>
+                  </a:txBody>
+                  <a:tcPr marL="54864" marR="54864" marT="9144" marB="9144" anchor="ctr">
+                    <a:solidFill>
+                      <a:srgbClr val="FFFFFF"/>
+                    </a:solidFill>
+                  </a:tcPr>
+                </a:tc>
+                <a:tc>
+                  <a:txBody>
+                    <a:bodyPr wrap="square"/>
+                    <a:lstStyle/>
+                    <a:p>
+                      <a:pPr algn="ctr"/>
+                      <a:r>
+                        <a:rPr sz="1500" b="0" i="0">
+                          <a:solidFill>
+                            <a:srgbClr val="222A33"/>
+                          </a:solidFill>
+                          <a:latin typeface="Times New Roman"/>
+                          <a:cs typeface="Times New Roman"/>
+                        </a:rPr>
+                        <a:t>0.786</a:t>
+                      </a:r>
+                    </a:p>
+                  </a:txBody>
+                  <a:tcPr marL="54864" marR="54864" marT="9144" marB="9144" anchor="ctr">
+                    <a:solidFill>
+                      <a:srgbClr val="FFFFFF"/>
+                    </a:solidFill>
+                  </a:tcPr>
+                </a:tc>
+                <a:tc>
+                  <a:txBody>
+                    <a:bodyPr wrap="square"/>
+                    <a:lstStyle/>
+                    <a:p>
+                      <a:pPr algn="ctr"/>
+                      <a:r>
+                        <a:rPr sz="1500" b="0" i="0">
+                          <a:solidFill>
+                            <a:srgbClr val="222A33"/>
+                          </a:solidFill>
+                          <a:latin typeface="Times New Roman"/>
+                          <a:cs typeface="Times New Roman"/>
+                        </a:rPr>
+                        <a:t>0.787</a:t>
+                      </a:r>
+                    </a:p>
+                  </a:txBody>
+                  <a:tcPr marL="54864" marR="54864" marT="9144" marB="9144" anchor="ctr">
+                    <a:solidFill>
+                      <a:srgbClr val="FFFFFF"/>
+                    </a:solidFill>
+                  </a:tcPr>
+                </a:tc>
+              </a:tr>
+              <a:tr h="420624">
+                <a:tc>
+                  <a:txBody>
+                    <a:bodyPr wrap="square"/>
+                    <a:lstStyle/>
+                    <a:p>
+                      <a:pPr algn="l"/>
+                      <a:r>
+                        <a:rPr sz="1500" b="0" i="0">
+                          <a:solidFill>
+                            <a:srgbClr val="222A33"/>
+                          </a:solidFill>
+                          <a:latin typeface="Times New Roman"/>
+                          <a:cs typeface="Times New Roman"/>
+                        </a:rPr>
+                        <a:t>80%</a:t>
+                      </a:r>
+                    </a:p>
+                  </a:txBody>
+                  <a:tcPr marL="54864" marR="54864" marT="9144" marB="9144" anchor="ctr">
+                    <a:solidFill>
+                      <a:srgbClr val="EAEFF4"/>
+                    </a:solidFill>
+                  </a:tcPr>
+                </a:tc>
+                <a:tc>
+                  <a:txBody>
+                    <a:bodyPr wrap="square"/>
+                    <a:lstStyle/>
+                    <a:p>
+                      <a:pPr algn="ctr"/>
+                      <a:r>
+                        <a:rPr sz="1500" b="0" i="0">
+                          <a:solidFill>
+                            <a:srgbClr val="222A33"/>
+                          </a:solidFill>
+                          <a:latin typeface="Times New Roman"/>
+                          <a:cs typeface="Times New Roman"/>
+                        </a:rPr>
+                        <a:t>−52.2%</a:t>
+                      </a:r>
+                    </a:p>
+                  </a:txBody>
+                  <a:tcPr marL="54864" marR="54864" marT="9144" marB="9144" anchor="ctr">
+                    <a:solidFill>
+                      <a:srgbClr val="EAEFF4"/>
+                    </a:solidFill>
+                  </a:tcPr>
+                </a:tc>
+                <a:tc>
+                  <a:txBody>
+                    <a:bodyPr wrap="square"/>
+                    <a:lstStyle/>
+                    <a:p>
+                      <a:pPr algn="ctr"/>
+                      <a:r>
+                        <a:rPr sz="1500" b="0" i="0">
+                          <a:solidFill>
+                            <a:srgbClr val="222A33"/>
+                          </a:solidFill>
+                          <a:latin typeface="Times New Roman"/>
+                          <a:cs typeface="Times New Roman"/>
+                        </a:rPr>
+                        <a:t>11.90</a:t>
+                      </a:r>
+                    </a:p>
+                  </a:txBody>
+                  <a:tcPr marL="54864" marR="54864" marT="9144" marB="9144" anchor="ctr">
+                    <a:solidFill>
+                      <a:srgbClr val="EAEFF4"/>
+                    </a:solidFill>
+                  </a:tcPr>
+                </a:tc>
+                <a:tc>
+                  <a:txBody>
+                    <a:bodyPr wrap="square"/>
+                    <a:lstStyle/>
+                    <a:p>
+                      <a:pPr algn="ctr"/>
+                      <a:r>
+                        <a:rPr sz="1500" b="0" i="0">
+                          <a:solidFill>
+                            <a:srgbClr val="222A33"/>
+                          </a:solidFill>
+                          <a:latin typeface="Times New Roman"/>
+                          <a:cs typeface="Times New Roman"/>
+                        </a:rPr>
+                        <a:t>0.733</a:t>
+                      </a:r>
+                    </a:p>
+                  </a:txBody>
+                  <a:tcPr marL="54864" marR="54864" marT="9144" marB="9144" anchor="ctr">
+                    <a:solidFill>
+                      <a:srgbClr val="EAEFF4"/>
+                    </a:solidFill>
+                  </a:tcPr>
+                </a:tc>
+                <a:tc>
+                  <a:txBody>
+                    <a:bodyPr wrap="square"/>
+                    <a:lstStyle/>
+                    <a:p>
+                      <a:pPr algn="ctr"/>
+                      <a:r>
+                        <a:rPr sz="1500" b="0" i="0">
+                          <a:solidFill>
+                            <a:srgbClr val="222A33"/>
+                          </a:solidFill>
+                          <a:latin typeface="Times New Roman"/>
+                          <a:cs typeface="Times New Roman"/>
+                        </a:rPr>
+                        <a:t>0.767</a:t>
+                      </a:r>
+                    </a:p>
+                  </a:txBody>
+                  <a:tcPr marL="54864" marR="54864" marT="9144" marB="9144" anchor="ctr">
+                    <a:solidFill>
+                      <a:srgbClr val="EAEFF4"/>
+                    </a:solidFill>
+                  </a:tcPr>
+                </a:tc>
+                <a:tc>
+                  <a:txBody>
+                    <a:bodyPr wrap="square"/>
+                    <a:lstStyle/>
+                    <a:p>
+                      <a:pPr algn="ctr"/>
+                      <a:r>
+                        <a:rPr sz="1500" b="0" i="0">
+                          <a:solidFill>
+                            <a:srgbClr val="222A33"/>
+                          </a:solidFill>
+                          <a:latin typeface="Times New Roman"/>
+                          <a:cs typeface="Times New Roman"/>
+                        </a:rPr>
+                        <a:t>0.748</a:t>
+                      </a:r>
+                    </a:p>
+                  </a:txBody>
+                  <a:tcPr marL="54864" marR="54864" marT="9144" marB="9144" anchor="ctr">
+                    <a:solidFill>
+                      <a:srgbClr val="EAEFF4"/>
+                    </a:solidFill>
+                  </a:tcPr>
+                </a:tc>
+              </a:tr>
+            </a:tbl>
+          </a:graphicData>
+        </a:graphic>
+      </p:graphicFrame>
+      <p:sp>
+        <p:nvSpPr>
+          <p:cNvPr id="10" name="Rectangle 9"/>
+          <p:cNvSpPr/>
+          <p:nvPr/>
+        </p:nvSpPr>
+        <p:spPr>
+          <a:xfrm>
+            <a:off x="548640" y="5303520"/>
+            <a:ext cx="11094415" cy="932688"/>
+          </a:xfrm>
+          <a:prstGeom prst="rect">
+            <a:avLst/>
+          </a:prstGeom>
+          <a:solidFill>
+            <a:srgbClr val="0E2A47"/>
+          </a:solidFill>
+          <a:ln>
+            <a:noFill/>
+          </a:ln>
+          <a:effectLst/>
+        </p:spPr>
+        <p:style>
+          <a:lnRef idx="1">
+            <a:schemeClr val="accent1"/>
+          </a:lnRef>
+          <a:fillRef idx="3">
+            <a:schemeClr val="accent1"/>
+          </a:fillRef>
+          <a:effectRef idx="2">
+            <a:schemeClr val="accent1"/>
+          </a:effectRef>
+          <a:fontRef idx="minor">
+            <a:schemeClr val="lt1"/>
+          </a:fontRef>
+        </p:style>
+        <p:txBody>
+          <a:bodyPr rtlCol="0" anchor="ctr"/>
+          <a:lstStyle/>
+          <a:p>
+            <a:pPr algn="ctr"/>
+          </a:p>
+        </p:txBody>
+      </p:sp>
+      <p:sp>
+        <p:nvSpPr>
+          <p:cNvPr id="11" name="Rectangle 10"/>
+          <p:cNvSpPr/>
+          <p:nvPr/>
+        </p:nvSpPr>
+        <p:spPr>
+          <a:xfrm>
+            <a:off x="548640" y="5303520"/>
+            <a:ext cx="128016" cy="932688"/>
+          </a:xfrm>
+          <a:prstGeom prst="rect">
+            <a:avLst/>
+          </a:prstGeom>
+          <a:solidFill>
+            <a:srgbClr val="E0A32E"/>
+          </a:solidFill>
+          <a:ln>
+            <a:noFill/>
+          </a:ln>
+          <a:effectLst/>
+        </p:spPr>
+        <p:style>
+          <a:lnRef idx="1">
+            <a:schemeClr val="accent1"/>
+          </a:lnRef>
+          <a:fillRef idx="3">
+            <a:schemeClr val="accent1"/>
+          </a:fillRef>
+          <a:effectRef idx="2">
+            <a:schemeClr val="accent1"/>
+          </a:effectRef>
+          <a:fontRef idx="minor">
+            <a:schemeClr val="lt1"/>
+          </a:fontRef>
+        </p:style>
+        <p:txBody>
+          <a:bodyPr rtlCol="0" anchor="ctr"/>
+          <a:lstStyle/>
+          <a:p>
+            <a:pPr algn="ctr"/>
+          </a:p>
+        </p:txBody>
+      </p:sp>
+      <p:sp>
+        <p:nvSpPr>
+          <p:cNvPr id="12" name="TextBox 11"/>
+          <p:cNvSpPr txBox="1"/>
+          <p:nvPr/>
+        </p:nvSpPr>
+        <p:spPr>
+          <a:xfrm>
+            <a:off x="868680" y="5394960"/>
+            <a:ext cx="10454335" cy="768096"/>
+          </a:xfrm>
+          <a:prstGeom prst="rect">
+            <a:avLst/>
+          </a:prstGeom>
+          <a:noFill/>
+        </p:spPr>
+        <p:txBody>
+          <a:bodyPr wrap="square" anchor="ctr" lIns="45720" rIns="45720" tIns="0" bIns="0">
+            <a:spAutoFit/>
+          </a:bodyPr>
+          <a:lstStyle/>
+          <a:p>
+            <a:pPr algn="l">
+              <a:lnSpc>
+                <a:spcPct val="105000"/>
+              </a:lnSpc>
+              <a:spcBef>
+                <a:spcPts val="0"/>
+              </a:spcBef>
+              <a:spcAft>
+                <a:spcPts val="500"/>
+              </a:spcAft>
+            </a:pPr>
+            <a:r>
+              <a:rPr sz="1700" b="0" i="0">
+                <a:solidFill>
+                  <a:srgbClr val="FFFFFF"/>
+                </a:solidFill>
+                <a:latin typeface="Times New Roman"/>
+                <a:cs typeface="Times New Roman"/>
+              </a:rPr>
+              <a:t>Cumulative </a:t>
+            </a:r>
+            <a:r>
+              <a:rPr sz="1700" b="1" i="0">
+                <a:solidFill>
+                  <a:srgbClr val="E0A32E"/>
+                </a:solidFill>
+                <a:latin typeface="Times New Roman"/>
+                <a:cs typeface="Times New Roman"/>
+              </a:rPr>
+              <a:t>~68% reduction</a:t>
+            </a:r>
+            <a:r>
+              <a:rPr sz="1700" b="0" i="0">
+                <a:solidFill>
+                  <a:srgbClr val="FFFFFF"/>
+                </a:solidFill>
+                <a:latin typeface="Times New Roman"/>
+                <a:cs typeface="Times New Roman"/>
+              </a:rPr>
+              <a:t> of the original expert weights at 80% nominal — for only </a:t>
+            </a:r>
+            <a:r>
+              <a:rPr sz="1700" b="1" i="0">
+                <a:solidFill>
+                  <a:srgbClr val="E0A32E"/>
+                </a:solidFill>
+                <a:latin typeface="Times New Roman"/>
+                <a:cs typeface="Times New Roman"/>
+              </a:rPr>
+              <a:t>+1.79 ppl</a:t>
+            </a:r>
+            <a:r>
+              <a:rPr sz="1700" b="0" i="0">
+                <a:solidFill>
+                  <a:srgbClr val="FFFFFF"/>
+                </a:solidFill>
+                <a:latin typeface="Times New Roman"/>
+                <a:cs typeface="Times New Roman"/>
+              </a:rPr>
+              <a:t>.</a:t>
+            </a:r>
+          </a:p>
+          <a:p>
+            <a:pPr algn="l">
+              <a:lnSpc>
+                <a:spcPct val="105000"/>
+              </a:lnSpc>
+              <a:spcBef>
+                <a:spcPts val="0"/>
+              </a:spcBef>
+              <a:spcAft>
+                <a:spcPts val="500"/>
+              </a:spcAft>
+            </a:pPr>
+            <a:r>
+              <a:rPr sz="1700" b="0" i="0">
+                <a:solidFill>
+                  <a:srgbClr val="FFFFFF"/>
+                </a:solidFill>
+                <a:latin typeface="Times New Roman"/>
+                <a:cs typeface="Times New Roman"/>
+              </a:rPr>
+              <a:t>The two axes — offline weight compression + online channel selection — stack independently.</a:t>
+            </a:r>
+          </a:p>
+        </p:txBody>
+      </p:sp>
+    </p:spTree>
+  </p:cSld>
+  <p:clrMapOvr>
+    <a:masterClrMapping/>
+  </p:clrMapOvr>
+</p:sld>
+</file>
+
+<file path=ppt/slides/slide13.xml><?xml version="1.0" encoding="utf-8"?>
+<p:sld xmlns:a="http://schemas.openxmlformats.org/drawingml/2006/main" xmlns:p="http://schemas.openxmlformats.org/presentationml/2006/main" xmlns:r="http://schemas.openxmlformats.org/officeDocument/2006/relationships">
+  <p:cSld>
+    <p:bg>
+      <p:bgPr>
+        <a:solidFill>
+          <a:srgbClr val="F4F6F9"/>
+        </a:solidFill>
+        <a:effectLst/>
+      </p:bgPr>
+    </p:bg>
+    <p:spTree>
+      <p:nvGrpSpPr>
+        <p:cNvPr id="1" name=""/>
+        <p:cNvGrpSpPr/>
+        <p:nvPr/>
+      </p:nvGrpSpPr>
+      <p:grpSpPr/>
+      <p:sp>
+        <p:nvSpPr>
+          <p:cNvPr id="2" name="Rectangle 1"/>
+          <p:cNvSpPr/>
+          <p:nvPr/>
+        </p:nvSpPr>
+        <p:spPr>
+          <a:xfrm>
+            <a:off x="548640" y="310896"/>
+            <a:ext cx="128016" cy="566928"/>
+          </a:xfrm>
+          <a:prstGeom prst="rect">
+            <a:avLst/>
+          </a:prstGeom>
+          <a:solidFill>
+            <a:srgbClr val="E0A32E"/>
+          </a:solidFill>
+          <a:ln>
+            <a:noFill/>
+          </a:ln>
+          <a:effectLst/>
+        </p:spPr>
+        <p:style>
+          <a:lnRef idx="1">
+            <a:schemeClr val="accent1"/>
+          </a:lnRef>
+          <a:fillRef idx="3">
+            <a:schemeClr val="accent1"/>
+          </a:fillRef>
+          <a:effectRef idx="2">
+            <a:schemeClr val="accent1"/>
+          </a:effectRef>
+          <a:fontRef idx="minor">
+            <a:schemeClr val="lt1"/>
+          </a:fontRef>
+        </p:style>
+        <p:txBody>
+          <a:bodyPr rtlCol="0" anchor="ctr"/>
+          <a:lstStyle/>
+          <a:p>
+            <a:pPr algn="ctr"/>
+          </a:p>
+        </p:txBody>
+      </p:sp>
+      <p:sp>
+        <p:nvSpPr>
+          <p:cNvPr id="3" name="TextBox 2"/>
+          <p:cNvSpPr txBox="1"/>
+          <p:nvPr/>
+        </p:nvSpPr>
+        <p:spPr>
+          <a:xfrm>
+            <a:off x="822959" y="201168"/>
+            <a:ext cx="10820095" cy="786384"/>
+          </a:xfrm>
+          <a:prstGeom prst="rect">
+            <a:avLst/>
+          </a:prstGeom>
+          <a:noFill/>
+        </p:spPr>
+        <p:txBody>
+          <a:bodyPr wrap="square" anchor="ctr" lIns="45720" rIns="45720" tIns="0" bIns="0">
+            <a:spAutoFit/>
+          </a:bodyPr>
+          <a:lstStyle/>
+          <a:p>
+            <a:pPr algn="l">
+              <a:lnSpc>
+                <a:spcPct val="100000"/>
+              </a:lnSpc>
+              <a:spcBef>
+                <a:spcPts val="0"/>
+              </a:spcBef>
+              <a:spcAft>
+                <a:spcPts val="600"/>
+              </a:spcAft>
+            </a:pPr>
+            <a:r>
+              <a:rPr sz="3000" b="1" i="0">
+                <a:solidFill>
+                  <a:srgbClr val="0E2A47"/>
+                </a:solidFill>
+                <a:latin typeface="Times New Roman"/>
+                <a:cs typeface="Times New Roman"/>
+              </a:rPr>
+              <a:t>A Fixed Per-Layer Threshold Beats Top-B</a:t>
+            </a:r>
+          </a:p>
+        </p:txBody>
+      </p:sp>
+      <p:sp>
+        <p:nvSpPr>
+          <p:cNvPr id="4" name="TextBox 3"/>
+          <p:cNvSpPr txBox="1"/>
+          <p:nvPr/>
+        </p:nvSpPr>
+        <p:spPr>
+          <a:xfrm>
+            <a:off x="548640" y="1078992"/>
+            <a:ext cx="11094415" cy="457200"/>
+          </a:xfrm>
+          <a:prstGeom prst="rect">
+            <a:avLst/>
+          </a:prstGeom>
+          <a:noFill/>
+        </p:spPr>
+        <p:txBody>
+          <a:bodyPr wrap="square" anchor="t" lIns="45720" rIns="45720" tIns="0" bIns="0">
+            <a:spAutoFit/>
+          </a:bodyPr>
+          <a:lstStyle/>
+          <a:p>
+            <a:pPr algn="l">
+              <a:lnSpc>
+                <a:spcPct val="100000"/>
+              </a:lnSpc>
+              <a:spcBef>
+                <a:spcPts val="0"/>
+              </a:spcBef>
+              <a:spcAft>
+                <a:spcPts val="600"/>
+              </a:spcAft>
+            </a:pPr>
+            <a:r>
+              <a:rPr sz="2000" b="1" i="0">
+                <a:solidFill>
+                  <a:srgbClr val="1C7293"/>
+                </a:solidFill>
+                <a:latin typeface="Times New Roman"/>
+                <a:cs typeface="Times New Roman"/>
+              </a:rPr>
+              <a:t>A per-layer score threshold beats pooled top-B on every metric at matched budget</a:t>
+            </a:r>
+          </a:p>
+        </p:txBody>
+      </p:sp>
+      <p:pic>
+        <p:nvPicPr>
+          <p:cNvPr id="5" name="Picture 4" descr="amazon_logo.png"/>
+          <p:cNvPicPr>
+            <a:picLocks noChangeAspect="1"/>
+          </p:cNvPicPr>
+          <p:nvPr/>
+        </p:nvPicPr>
+        <p:blipFill>
+          <a:blip r:embed="rId2"/>
+          <a:stretch>
+            <a:fillRect/>
+          </a:stretch>
+        </p:blipFill>
+        <p:spPr>
+          <a:xfrm>
+            <a:off x="192024" y="6309360"/>
+            <a:ext cx="1463040" cy="440740"/>
+          </a:xfrm>
+          <a:prstGeom prst="rect">
+            <a:avLst/>
+          </a:prstGeom>
+        </p:spPr>
+      </p:pic>
+      <p:sp>
+        <p:nvSpPr>
+          <p:cNvPr id="6" name="Rectangle 5"/>
+          <p:cNvSpPr/>
+          <p:nvPr/>
+        </p:nvSpPr>
+        <p:spPr>
+          <a:xfrm>
+            <a:off x="11140135" y="6400800"/>
+            <a:ext cx="109728" cy="237744"/>
+          </a:xfrm>
+          <a:prstGeom prst="rect">
+            <a:avLst/>
+          </a:prstGeom>
+          <a:solidFill>
+            <a:srgbClr val="E0A32E"/>
+          </a:solidFill>
+          <a:ln>
+            <a:noFill/>
+          </a:ln>
+          <a:effectLst/>
+        </p:spPr>
+        <p:style>
+          <a:lnRef idx="1">
+            <a:schemeClr val="accent1"/>
+          </a:lnRef>
+          <a:fillRef idx="3">
+            <a:schemeClr val="accent1"/>
+          </a:fillRef>
+          <a:effectRef idx="2">
+            <a:schemeClr val="accent1"/>
+          </a:effectRef>
+          <a:fontRef idx="minor">
+            <a:schemeClr val="lt1"/>
+          </a:fontRef>
+        </p:style>
+        <p:txBody>
+          <a:bodyPr rtlCol="0" anchor="ctr"/>
+          <a:lstStyle/>
+          <a:p>
+            <a:pPr algn="ctr"/>
+          </a:p>
+        </p:txBody>
+      </p:sp>
+      <p:sp>
+        <p:nvSpPr>
+          <p:cNvPr id="7" name="TextBox 6"/>
+          <p:cNvSpPr txBox="1"/>
+          <p:nvPr/>
+        </p:nvSpPr>
+        <p:spPr>
+          <a:xfrm>
+            <a:off x="11323015" y="6364224"/>
+            <a:ext cx="685800" cy="320040"/>
+          </a:xfrm>
+          <a:prstGeom prst="rect">
+            <a:avLst/>
+          </a:prstGeom>
+          <a:noFill/>
+        </p:spPr>
+        <p:txBody>
+          <a:bodyPr wrap="square" anchor="ctr" lIns="45720" rIns="45720" tIns="0" bIns="0">
+            <a:spAutoFit/>
+          </a:bodyPr>
+          <a:lstStyle/>
+          <a:p>
+            <a:pPr algn="l">
+              <a:lnSpc>
+                <a:spcPct val="100000"/>
+              </a:lnSpc>
+              <a:spcBef>
+                <a:spcPts val="0"/>
+              </a:spcBef>
+              <a:spcAft>
+                <a:spcPts val="600"/>
+              </a:spcAft>
+            </a:pPr>
+            <a:r>
+              <a:rPr sz="1200" b="1" i="0">
+                <a:solidFill>
+                  <a:srgbClr val="5C6B7A"/>
+                </a:solidFill>
+                <a:latin typeface="Times New Roman"/>
+                <a:cs typeface="Times New Roman"/>
+              </a:rPr>
+              <a:t>11</a:t>
+            </a:r>
+          </a:p>
+        </p:txBody>
+      </p:sp>
+      <p:sp>
+        <p:nvSpPr>
+          <p:cNvPr id="8" name="TextBox 7"/>
+          <p:cNvSpPr txBox="1"/>
+          <p:nvPr/>
+        </p:nvSpPr>
+        <p:spPr>
+          <a:xfrm>
+            <a:off x="1828800" y="6382512"/>
+            <a:ext cx="8229600" cy="320040"/>
+          </a:xfrm>
+          <a:prstGeom prst="rect">
+            <a:avLst/>
+          </a:prstGeom>
+          <a:noFill/>
+        </p:spPr>
+        <p:txBody>
+          <a:bodyPr wrap="square" anchor="ctr" lIns="45720" rIns="45720" tIns="0" bIns="0">
+            <a:spAutoFit/>
+          </a:bodyPr>
+          <a:lstStyle/>
+          <a:p>
+            <a:pPr algn="l">
+              <a:lnSpc>
+                <a:spcPct val="100000"/>
+              </a:lnSpc>
+              <a:spcBef>
+                <a:spcPts val="0"/>
+              </a:spcBef>
+              <a:spcAft>
+                <a:spcPts val="600"/>
+              </a:spcAft>
+            </a:pPr>
+            <a:r>
+              <a:rPr sz="1100" b="0" i="1">
+                <a:solidFill>
+                  <a:srgbClr val="5C6B7A"/>
+                </a:solidFill>
+                <a:latin typeface="Times New Roman"/>
+                <a:cs typeface="Times New Roman"/>
+              </a:rPr>
+              <a:t>Per-Token Adaptive Channel Activation for MoE</a:t>
+            </a:r>
+          </a:p>
+        </p:txBody>
+      </p:sp>
+      <p:sp>
+        <p:nvSpPr>
+          <p:cNvPr id="9" name="TextBox 8"/>
+          <p:cNvSpPr txBox="1"/>
+          <p:nvPr/>
+        </p:nvSpPr>
+        <p:spPr>
+          <a:xfrm>
+            <a:off x="548640" y="1664208"/>
+            <a:ext cx="11094415" cy="822960"/>
+          </a:xfrm>
+          <a:prstGeom prst="rect">
+            <a:avLst/>
+          </a:prstGeom>
+          <a:noFill/>
+        </p:spPr>
+        <p:txBody>
+          <a:bodyPr wrap="square" anchor="t" lIns="45720" rIns="45720" tIns="0" bIns="0">
+            <a:spAutoFit/>
+          </a:bodyPr>
+          <a:lstStyle/>
+          <a:p>
+            <a:pPr algn="l">
+              <a:lnSpc>
+                <a:spcPct val="105000"/>
+              </a:lnSpc>
+              <a:spcBef>
+                <a:spcPts val="0"/>
+              </a:spcBef>
+              <a:spcAft>
+                <a:spcPts val="600"/>
+              </a:spcAft>
+            </a:pPr>
+            <a:r>
+              <a:rPr sz="1600" b="0" i="0">
+                <a:solidFill>
+                  <a:srgbClr val="222A33"/>
+                </a:solidFill>
+                <a:latin typeface="Times New Roman"/>
+                <a:cs typeface="Times New Roman"/>
+              </a:rPr>
+              <a:t>A threshold </a:t>
+            </a:r>
+            <a:r>
+              <a:rPr sz="1600" b="1" i="0">
+                <a:solidFill>
+                  <a:srgbClr val="0E2A47"/>
+                </a:solidFill>
+                <a:latin typeface="Consolas"/>
+                <a:cs typeface="Consolas"/>
+              </a:rPr>
+              <a:t>keep iff score ≥ τ</a:t>
+            </a:r>
+            <a:r>
+              <a:rPr sz="1600" b="0" i="0">
+                <a:solidFill>
+                  <a:srgbClr val="222A33"/>
+                </a:solidFill>
+                <a:latin typeface="Times New Roman"/>
+                <a:cs typeface="Times New Roman"/>
+              </a:rPr>
+              <a:t> is </a:t>
+            </a:r>
+            <a:r>
+              <a:rPr sz="1600" b="1" i="0">
+                <a:solidFill>
+                  <a:srgbClr val="1C7293"/>
+                </a:solidFill>
+                <a:latin typeface="Times New Roman"/>
+                <a:cs typeface="Times New Roman"/>
+              </a:rPr>
+              <a:t>elementwise</a:t>
+            </a:r>
+            <a:r>
+              <a:rPr sz="1600" b="0" i="0">
+                <a:solidFill>
+                  <a:srgbClr val="222A33"/>
+                </a:solidFill>
+                <a:latin typeface="Times New Roman"/>
+                <a:cs typeface="Times New Roman"/>
+              </a:rPr>
+              <a:t> — each channel decided independently, no cross-expert sync. Budget floats per token: hot tokens keep more, quiet tokens fewer.</a:t>
+            </a:r>
+          </a:p>
+        </p:txBody>
+      </p:sp>
+      <p:graphicFrame>
+        <p:nvGraphicFramePr>
+          <p:cNvPr id="10" name="Table 9"/>
+          <p:cNvGraphicFramePr>
+            <a:graphicFrameLocks noGrp="1"/>
+          </p:cNvGraphicFramePr>
+          <p:nvPr/>
+        </p:nvGraphicFramePr>
+        <p:xfrm>
+          <a:off x="1249527" y="2624328"/>
+          <a:ext cx="9692640" cy="1883664"/>
+        </p:xfrm>
+        <a:graphic>
+          <a:graphicData uri="http://schemas.openxmlformats.org/drawingml/2006/table">
+            <a:tbl>
+              <a:tblPr firstRow="1">
+                <a:tableStyleId>{5C22544A-7EE6-4342-B048-85BDC9FD1C3A}</a:tableStyleId>
+              </a:tblPr>
+              <a:tblGrid>
+                <a:gridCol w="3840480"/>
+                <a:gridCol w="1325880"/>
+                <a:gridCol w="1417320"/>
+                <a:gridCol w="1737360"/>
+                <a:gridCol w="1371600"/>
+              </a:tblGrid>
+              <a:tr h="566928">
+                <a:tc>
+                  <a:txBody>
+                    <a:bodyPr wrap="square"/>
+                    <a:lstStyle/>
+                    <a:p>
+                      <a:pPr algn="l"/>
+                      <a:r>
+                        <a:rPr sz="1500" b="1" i="0">
+                          <a:solidFill>
+                            <a:srgbClr val="FFFFFF"/>
+                          </a:solidFill>
+                          <a:latin typeface="Times New Roman"/>
+                          <a:cs typeface="Times New Roman"/>
+                        </a:rPr>
+                        <a:t>selection rule (80% nominal, matched budget)</a:t>
+                      </a:r>
+                    </a:p>
+                  </a:txBody>
+                  <a:tcPr marL="54864" marR="54864" marT="9144" marB="9144" anchor="ctr">
+                    <a:solidFill>
+                      <a:srgbClr val="0E2A47"/>
+                    </a:solidFill>
+                  </a:tcPr>
+                </a:tc>
+                <a:tc>
+                  <a:txBody>
+                    <a:bodyPr wrap="square"/>
+                    <a:lstStyle/>
+                    <a:p>
+                      <a:pPr algn="ctr"/>
+                      <a:r>
+                        <a:rPr sz="1500" b="1" i="0">
+                          <a:solidFill>
+                            <a:srgbClr val="FFFFFF"/>
+                          </a:solidFill>
+                          <a:latin typeface="Times New Roman"/>
+                          <a:cs typeface="Times New Roman"/>
+                        </a:rPr>
+                        <a:t>ppl ↓</a:t>
+                      </a:r>
+                    </a:p>
+                  </a:txBody>
+                  <a:tcPr marL="54864" marR="54864" marT="9144" marB="9144" anchor="ctr">
+                    <a:solidFill>
+                      <a:srgbClr val="0E2A47"/>
+                    </a:solidFill>
+                  </a:tcPr>
+                </a:tc>
+                <a:tc>
+                  <a:txBody>
+                    <a:bodyPr wrap="square"/>
+                    <a:lstStyle/>
+                    <a:p>
+                      <a:pPr algn="ctr"/>
+                      <a:r>
+                        <a:rPr sz="1500" b="1" i="0">
+                          <a:solidFill>
+                            <a:srgbClr val="FFFFFF"/>
+                          </a:solidFill>
+                          <a:latin typeface="Times New Roman"/>
+                          <a:cs typeface="Times New Roman"/>
+                        </a:rPr>
+                        <a:t>mmlu ↑</a:t>
+                      </a:r>
+                    </a:p>
+                  </a:txBody>
+                  <a:tcPr marL="54864" marR="54864" marT="9144" marB="9144" anchor="ctr">
+                    <a:solidFill>
+                      <a:srgbClr val="0E2A47"/>
+                    </a:solidFill>
+                  </a:tcPr>
+                </a:tc>
+                <a:tc>
+                  <a:txBody>
+                    <a:bodyPr wrap="square"/>
+                    <a:lstStyle/>
+                    <a:p>
+                      <a:pPr algn="ctr"/>
+                      <a:r>
+                        <a:rPr sz="1500" b="1" i="0">
+                          <a:solidFill>
+                            <a:srgbClr val="FFFFFF"/>
+                          </a:solidFill>
+                          <a:latin typeface="Times New Roman"/>
+                          <a:cs typeface="Times New Roman"/>
+                        </a:rPr>
+                        <a:t>hellaswag ↑</a:t>
+                      </a:r>
+                    </a:p>
+                  </a:txBody>
+                  <a:tcPr marL="54864" marR="54864" marT="9144" marB="9144" anchor="ctr">
+                    <a:solidFill>
+                      <a:srgbClr val="0E2A47"/>
+                    </a:solidFill>
+                  </a:tcPr>
+                </a:tc>
+                <a:tc>
+                  <a:txBody>
+                    <a:bodyPr wrap="square"/>
+                    <a:lstStyle/>
+                    <a:p>
+                      <a:pPr algn="ctr"/>
+                      <a:r>
+                        <a:rPr sz="1500" b="1" i="0">
+                          <a:solidFill>
+                            <a:srgbClr val="FFFFFF"/>
+                          </a:solidFill>
+                          <a:latin typeface="Times New Roman"/>
+                          <a:cs typeface="Times New Roman"/>
+                        </a:rPr>
+                        <a:t>winogrande ↑</a:t>
+                      </a:r>
+                    </a:p>
+                  </a:txBody>
+                  <a:tcPr marL="54864" marR="54864" marT="9144" marB="9144" anchor="ctr">
+                    <a:solidFill>
+                      <a:srgbClr val="0E2A47"/>
+                    </a:solidFill>
+                  </a:tcPr>
+                </a:tc>
+              </a:tr>
+              <a:tr h="438912">
+                <a:tc>
+                  <a:txBody>
+                    <a:bodyPr wrap="square"/>
+                    <a:lstStyle/>
+                    <a:p>
+                      <a:pPr algn="l"/>
+                      <a:r>
+                        <a:rPr sz="1500" b="0" i="0">
+                          <a:solidFill>
+                            <a:srgbClr val="222A33"/>
+                          </a:solidFill>
+                          <a:latin typeface="Times New Roman"/>
+                          <a:cs typeface="Times New Roman"/>
+                        </a:rPr>
+                        <a:t>online top-B (B=1229)</a:t>
+                      </a:r>
+                    </a:p>
+                  </a:txBody>
+                  <a:tcPr marL="54864" marR="54864" marT="9144" marB="9144" anchor="ctr">
+                    <a:solidFill>
+                      <a:srgbClr val="FFFFFF"/>
+                    </a:solidFill>
+                  </a:tcPr>
+                </a:tc>
+                <a:tc>
+                  <a:txBody>
+                    <a:bodyPr wrap="square"/>
+                    <a:lstStyle/>
+                    <a:p>
+                      <a:pPr algn="ctr"/>
+                      <a:r>
+                        <a:rPr sz="1500" b="0" i="0">
+                          <a:solidFill>
+                            <a:srgbClr val="222A33"/>
+                          </a:solidFill>
+                          <a:latin typeface="Times New Roman"/>
+                          <a:cs typeface="Times New Roman"/>
+                        </a:rPr>
+                        <a:t>12.65</a:t>
+                      </a:r>
+                    </a:p>
+                  </a:txBody>
+                  <a:tcPr marL="54864" marR="54864" marT="9144" marB="9144" anchor="ctr">
+                    <a:solidFill>
+                      <a:srgbClr val="FFFFFF"/>
+                    </a:solidFill>
+                  </a:tcPr>
+                </a:tc>
+                <a:tc>
+                  <a:txBody>
+                    <a:bodyPr wrap="square"/>
+                    <a:lstStyle/>
+                    <a:p>
+                      <a:pPr algn="ctr"/>
+                      <a:r>
+                        <a:rPr sz="1500" b="0" i="0">
+                          <a:solidFill>
+                            <a:srgbClr val="222A33"/>
+                          </a:solidFill>
+                          <a:latin typeface="Times New Roman"/>
+                          <a:cs typeface="Times New Roman"/>
+                        </a:rPr>
+                        <a:t>0.779</a:t>
+                      </a:r>
+                    </a:p>
+                  </a:txBody>
+                  <a:tcPr marL="54864" marR="54864" marT="9144" marB="9144" anchor="ctr">
+                    <a:solidFill>
+                      <a:srgbClr val="FFFFFF"/>
+                    </a:solidFill>
+                  </a:tcPr>
+                </a:tc>
+                <a:tc>
+                  <a:txBody>
+                    <a:bodyPr wrap="square"/>
+                    <a:lstStyle/>
+                    <a:p>
+                      <a:pPr algn="ctr"/>
+                      <a:r>
+                        <a:rPr sz="1500" b="0" i="0">
+                          <a:solidFill>
+                            <a:srgbClr val="222A33"/>
+                          </a:solidFill>
+                          <a:latin typeface="Times New Roman"/>
+                          <a:cs typeface="Times New Roman"/>
+                        </a:rPr>
+                        <a:t>0.758</a:t>
+                      </a:r>
+                    </a:p>
+                  </a:txBody>
+                  <a:tcPr marL="54864" marR="54864" marT="9144" marB="9144" anchor="ctr">
+                    <a:solidFill>
+                      <a:srgbClr val="FFFFFF"/>
+                    </a:solidFill>
+                  </a:tcPr>
+                </a:tc>
+                <a:tc>
+                  <a:txBody>
+                    <a:bodyPr wrap="square"/>
+                    <a:lstStyle/>
+                    <a:p>
+                      <a:pPr algn="ctr"/>
+                      <a:r>
+                        <a:rPr sz="1500" b="0" i="0">
+                          <a:solidFill>
+                            <a:srgbClr val="222A33"/>
+                          </a:solidFill>
+                          <a:latin typeface="Times New Roman"/>
+                          <a:cs typeface="Times New Roman"/>
+                        </a:rPr>
+                        <a:t>0.671</a:t>
+                      </a:r>
+                    </a:p>
+                  </a:txBody>
+                  <a:tcPr marL="54864" marR="54864" marT="9144" marB="9144" anchor="ctr">
+                    <a:solidFill>
+                      <a:srgbClr val="FFFFFF"/>
+                    </a:solidFill>
+                  </a:tcPr>
+                </a:tc>
+              </a:tr>
+              <a:tr h="438912">
+                <a:tc>
+                  <a:txBody>
+                    <a:bodyPr wrap="square"/>
+                    <a:lstStyle/>
+                    <a:p>
+                      <a:pPr algn="l"/>
+                      <a:r>
+                        <a:rPr sz="1500" b="1" i="0">
+                          <a:solidFill>
+                            <a:srgbClr val="222A33"/>
+                          </a:solidFill>
+                          <a:latin typeface="Times New Roman"/>
+                          <a:cs typeface="Times New Roman"/>
+                        </a:rPr>
+                        <a:t>fixed per-layer threshold</a:t>
+                      </a:r>
+                    </a:p>
+                  </a:txBody>
+                  <a:tcPr marL="54864" marR="54864" marT="9144" marB="9144" anchor="ctr">
+                    <a:solidFill>
+                      <a:srgbClr val="FCF3DC"/>
+                    </a:solidFill>
+                  </a:tcPr>
+                </a:tc>
+                <a:tc>
+                  <a:txBody>
+                    <a:bodyPr wrap="square"/>
+                    <a:lstStyle/>
+                    <a:p>
+                      <a:pPr algn="ctr"/>
+                      <a:r>
+                        <a:rPr sz="1500" b="0" i="0">
+                          <a:solidFill>
+                            <a:srgbClr val="222A33"/>
+                          </a:solidFill>
+                          <a:latin typeface="Times New Roman"/>
+                          <a:cs typeface="Times New Roman"/>
+                        </a:rPr>
+                        <a:t>12.32</a:t>
+                      </a:r>
+                    </a:p>
+                  </a:txBody>
+                  <a:tcPr marL="54864" marR="54864" marT="9144" marB="9144" anchor="ctr">
+                    <a:solidFill>
+                      <a:srgbClr val="FCF3DC"/>
+                    </a:solidFill>
+                  </a:tcPr>
+                </a:tc>
+                <a:tc>
+                  <a:txBody>
+                    <a:bodyPr wrap="square"/>
+                    <a:lstStyle/>
+                    <a:p>
+                      <a:pPr algn="ctr"/>
+                      <a:r>
+                        <a:rPr sz="1500" b="0" i="0">
+                          <a:solidFill>
+                            <a:srgbClr val="222A33"/>
+                          </a:solidFill>
+                          <a:latin typeface="Times New Roman"/>
+                          <a:cs typeface="Times New Roman"/>
+                        </a:rPr>
+                        <a:t>0.785</a:t>
+                      </a:r>
+                    </a:p>
+                  </a:txBody>
+                  <a:tcPr marL="54864" marR="54864" marT="9144" marB="9144" anchor="ctr">
+                    <a:solidFill>
+                      <a:srgbClr val="FCF3DC"/>
+                    </a:solidFill>
+                  </a:tcPr>
+                </a:tc>
+                <a:tc>
+                  <a:txBody>
+                    <a:bodyPr wrap="square"/>
+                    <a:lstStyle/>
+                    <a:p>
+                      <a:pPr algn="ctr"/>
+                      <a:r>
+                        <a:rPr sz="1500" b="0" i="0">
+                          <a:solidFill>
+                            <a:srgbClr val="222A33"/>
+                          </a:solidFill>
+                          <a:latin typeface="Times New Roman"/>
+                          <a:cs typeface="Times New Roman"/>
+                        </a:rPr>
+                        <a:t>0.762</a:t>
+                      </a:r>
+                    </a:p>
+                  </a:txBody>
+                  <a:tcPr marL="54864" marR="54864" marT="9144" marB="9144" anchor="ctr">
+                    <a:solidFill>
+                      <a:srgbClr val="FCF3DC"/>
+                    </a:solidFill>
+                  </a:tcPr>
+                </a:tc>
+                <a:tc>
+                  <a:txBody>
+                    <a:bodyPr wrap="square"/>
+                    <a:lstStyle/>
+                    <a:p>
+                      <a:pPr algn="ctr"/>
+                      <a:r>
+                        <a:rPr sz="1500" b="0" i="0">
+                          <a:solidFill>
+                            <a:srgbClr val="222A33"/>
+                          </a:solidFill>
+                          <a:latin typeface="Times New Roman"/>
+                          <a:cs typeface="Times New Roman"/>
+                        </a:rPr>
+                        <a:t>0.691</a:t>
+                      </a:r>
+                    </a:p>
+                  </a:txBody>
+                  <a:tcPr marL="54864" marR="54864" marT="9144" marB="9144" anchor="ctr">
+                    <a:solidFill>
+                      <a:srgbClr val="FCF3DC"/>
+                    </a:solidFill>
+                  </a:tcPr>
+                </a:tc>
+              </a:tr>
+              <a:tr h="438912">
+                <a:tc>
+                  <a:txBody>
+                    <a:bodyPr wrap="square"/>
+                    <a:lstStyle/>
+                    <a:p>
+                      <a:pPr algn="l"/>
+                      <a:r>
+                        <a:rPr sz="1500" b="0" i="0">
+                          <a:solidFill>
+                            <a:srgbClr val="222A33"/>
+                          </a:solidFill>
+                          <a:latin typeface="Times New Roman"/>
+                          <a:cs typeface="Times New Roman"/>
+                        </a:rPr>
+                        <a:t>threshold + FloE predictor</a:t>
+                      </a:r>
+                    </a:p>
+                  </a:txBody>
+                  <a:tcPr marL="54864" marR="54864" marT="9144" marB="9144" anchor="ctr">
+                    <a:solidFill>
+                      <a:srgbClr val="FFFFFF"/>
+                    </a:solidFill>
+                  </a:tcPr>
+                </a:tc>
+                <a:tc>
+                  <a:txBody>
+                    <a:bodyPr wrap="square"/>
+                    <a:lstStyle/>
+                    <a:p>
+                      <a:pPr algn="ctr"/>
+                      <a:r>
+                        <a:rPr sz="1500" b="0" i="0">
+                          <a:solidFill>
+                            <a:srgbClr val="222A33"/>
+                          </a:solidFill>
+                          <a:latin typeface="Times New Roman"/>
+                          <a:cs typeface="Times New Roman"/>
+                        </a:rPr>
+                        <a:t>12.98</a:t>
+                      </a:r>
+                    </a:p>
+                  </a:txBody>
+                  <a:tcPr marL="54864" marR="54864" marT="9144" marB="9144" anchor="ctr">
+                    <a:solidFill>
+                      <a:srgbClr val="FFFFFF"/>
+                    </a:solidFill>
+                  </a:tcPr>
+                </a:tc>
+                <a:tc>
+                  <a:txBody>
+                    <a:bodyPr wrap="square"/>
+                    <a:lstStyle/>
+                    <a:p>
+                      <a:pPr algn="ctr"/>
+                      <a:r>
+                        <a:rPr sz="1500" b="0" i="0">
+                          <a:solidFill>
+                            <a:srgbClr val="222A33"/>
+                          </a:solidFill>
+                          <a:latin typeface="Times New Roman"/>
+                          <a:cs typeface="Times New Roman"/>
+                        </a:rPr>
+                        <a:t>0.771</a:t>
+                      </a:r>
+                    </a:p>
+                  </a:txBody>
+                  <a:tcPr marL="54864" marR="54864" marT="9144" marB="9144" anchor="ctr">
+                    <a:solidFill>
+                      <a:srgbClr val="FFFFFF"/>
+                    </a:solidFill>
+                  </a:tcPr>
+                </a:tc>
+                <a:tc>
+                  <a:txBody>
+                    <a:bodyPr wrap="square"/>
+                    <a:lstStyle/>
+                    <a:p>
+                      <a:pPr algn="ctr"/>
+                      <a:r>
+                        <a:rPr sz="1500" b="0" i="0">
+                          <a:solidFill>
+                            <a:srgbClr val="222A33"/>
+                          </a:solidFill>
+                          <a:latin typeface="Times New Roman"/>
+                          <a:cs typeface="Times New Roman"/>
+                        </a:rPr>
+                        <a:t>0.745</a:t>
+                      </a:r>
+                    </a:p>
+                  </a:txBody>
+                  <a:tcPr marL="54864" marR="54864" marT="9144" marB="9144" anchor="ctr">
+                    <a:solidFill>
+                      <a:srgbClr val="FFFFFF"/>
+                    </a:solidFill>
+                  </a:tcPr>
+                </a:tc>
+                <a:tc>
+                  <a:txBody>
+                    <a:bodyPr wrap="square"/>
+                    <a:lstStyle/>
+                    <a:p>
+                      <a:pPr algn="ctr"/>
+                      <a:r>
+                        <a:rPr sz="1500" b="0" i="0">
+                          <a:solidFill>
+                            <a:srgbClr val="222A33"/>
+                          </a:solidFill>
+                          <a:latin typeface="Times New Roman"/>
+                          <a:cs typeface="Times New Roman"/>
+                        </a:rPr>
+                        <a:t>0.690</a:t>
+                      </a:r>
+                    </a:p>
+                  </a:txBody>
+                  <a:tcPr marL="54864" marR="54864" marT="9144" marB="9144" anchor="ctr">
+                    <a:solidFill>
+                      <a:srgbClr val="FFFFFF"/>
+                    </a:solidFill>
+                  </a:tcPr>
+                </a:tc>
+              </a:tr>
+            </a:tbl>
+          </a:graphicData>
+        </a:graphic>
+      </p:graphicFrame>
+      <p:sp>
+        <p:nvSpPr>
+          <p:cNvPr id="11" name="Rectangle 10"/>
+          <p:cNvSpPr/>
+          <p:nvPr/>
+        </p:nvSpPr>
+        <p:spPr>
+          <a:xfrm>
+            <a:off x="548640" y="5303520"/>
+            <a:ext cx="11094415" cy="932688"/>
+          </a:xfrm>
+          <a:prstGeom prst="rect">
+            <a:avLst/>
+          </a:prstGeom>
+          <a:solidFill>
+            <a:srgbClr val="0E2A47"/>
+          </a:solidFill>
+          <a:ln>
+            <a:noFill/>
+          </a:ln>
+          <a:effectLst/>
+        </p:spPr>
+        <p:style>
+          <a:lnRef idx="1">
+            <a:schemeClr val="accent1"/>
+          </a:lnRef>
+          <a:fillRef idx="3">
+            <a:schemeClr val="accent1"/>
+          </a:fillRef>
+          <a:effectRef idx="2">
+            <a:schemeClr val="accent1"/>
+          </a:effectRef>
+          <a:fontRef idx="minor">
+            <a:schemeClr val="lt1"/>
+          </a:fontRef>
+        </p:style>
+        <p:txBody>
+          <a:bodyPr rtlCol="0" anchor="ctr"/>
+          <a:lstStyle/>
+          <a:p>
+            <a:pPr algn="ctr"/>
+          </a:p>
+        </p:txBody>
+      </p:sp>
+      <p:sp>
+        <p:nvSpPr>
+          <p:cNvPr id="12" name="Rectangle 11"/>
+          <p:cNvSpPr/>
+          <p:nvPr/>
+        </p:nvSpPr>
+        <p:spPr>
+          <a:xfrm>
+            <a:off x="548640" y="5303520"/>
+            <a:ext cx="128016" cy="932688"/>
+          </a:xfrm>
+          <a:prstGeom prst="rect">
+            <a:avLst/>
+          </a:prstGeom>
+          <a:solidFill>
+            <a:srgbClr val="E0A32E"/>
+          </a:solidFill>
+          <a:ln>
+            <a:noFill/>
+          </a:ln>
+          <a:effectLst/>
+        </p:spPr>
+        <p:style>
+          <a:lnRef idx="1">
+            <a:schemeClr val="accent1"/>
+          </a:lnRef>
+          <a:fillRef idx="3">
+            <a:schemeClr val="accent1"/>
+          </a:fillRef>
+          <a:effectRef idx="2">
+            <a:schemeClr val="accent1"/>
+          </a:effectRef>
+          <a:fontRef idx="minor">
+            <a:schemeClr val="lt1"/>
+          </a:fontRef>
+        </p:style>
+        <p:txBody>
+          <a:bodyPr rtlCol="0" anchor="ctr"/>
+          <a:lstStyle/>
+          <a:p>
+            <a:pPr algn="ctr"/>
+          </a:p>
+        </p:txBody>
+      </p:sp>
+      <p:sp>
+        <p:nvSpPr>
+          <p:cNvPr id="13" name="TextBox 12"/>
+          <p:cNvSpPr txBox="1"/>
+          <p:nvPr/>
+        </p:nvSpPr>
+        <p:spPr>
+          <a:xfrm>
+            <a:off x="868680" y="5394960"/>
+            <a:ext cx="10454335" cy="768096"/>
+          </a:xfrm>
+          <a:prstGeom prst="rect">
+            <a:avLst/>
+          </a:prstGeom>
+          <a:noFill/>
+        </p:spPr>
+        <p:txBody>
+          <a:bodyPr wrap="square" anchor="ctr" lIns="45720" rIns="45720" tIns="0" bIns="0">
+            <a:spAutoFit/>
+          </a:bodyPr>
+          <a:lstStyle/>
+          <a:p>
+            <a:pPr algn="l">
+              <a:lnSpc>
+                <a:spcPct val="105000"/>
+              </a:lnSpc>
+              <a:spcBef>
+                <a:spcPts val="0"/>
+              </a:spcBef>
+              <a:spcAft>
+                <a:spcPts val="500"/>
+              </a:spcAft>
+            </a:pPr>
+            <a:r>
+              <a:rPr sz="1700" b="0" i="0">
+                <a:solidFill>
+                  <a:srgbClr val="FFFFFF"/>
+                </a:solidFill>
+                <a:latin typeface="Times New Roman"/>
+                <a:cs typeface="Times New Roman"/>
+              </a:rPr>
+              <a:t>Threshold wins by </a:t>
+            </a:r>
+            <a:r>
+              <a:rPr sz="1700" b="1" i="0">
+                <a:solidFill>
+                  <a:srgbClr val="E0A32E"/>
+                </a:solidFill>
+                <a:latin typeface="Times New Roman"/>
+                <a:cs typeface="Times New Roman"/>
+              </a:rPr>
+              <a:t>reallocating budget across tokens</a:t>
+            </a:r>
+            <a:r>
+              <a:rPr sz="1700" b="0" i="0">
+                <a:solidFill>
+                  <a:srgbClr val="FFFFFF"/>
+                </a:solidFill>
+                <a:latin typeface="Times New Roman"/>
+                <a:cs typeface="Times New Roman"/>
+              </a:rPr>
+              <a:t> — variable spend &gt; fixed spend.</a:t>
+            </a:r>
+          </a:p>
+          <a:p>
+            <a:pPr algn="l">
+              <a:lnSpc>
+                <a:spcPct val="105000"/>
+              </a:lnSpc>
+              <a:spcBef>
+                <a:spcPts val="0"/>
+              </a:spcBef>
+              <a:spcAft>
+                <a:spcPts val="500"/>
+              </a:spcAft>
+            </a:pPr>
+            <a:r>
+              <a:rPr sz="1700" b="0" i="0">
+                <a:solidFill>
+                  <a:srgbClr val="FFFFFF"/>
+                </a:solidFill>
+                <a:latin typeface="Times New Roman"/>
+                <a:cs typeface="Times New Roman"/>
+              </a:rPr>
+              <a:t>It does not compose with predict-ahead: a stale signal moves both the count and the choice.</a:t>
+            </a:r>
+          </a:p>
+        </p:txBody>
+      </p:sp>
+    </p:spTree>
+  </p:cSld>
+  <p:clrMapOvr>
+    <a:masterClrMapping/>
+  </p:clrMapOvr>
+</p:sld>
+</file>
+
+<file path=ppt/slides/slide14.xml><?xml version="1.0" encoding="utf-8"?>
+<p:sld xmlns:a="http://schemas.openxmlformats.org/drawingml/2006/main" xmlns:p="http://schemas.openxmlformats.org/presentationml/2006/main" xmlns:r="http://schemas.openxmlformats.org/officeDocument/2006/relationships">
+  <p:cSld>
+    <p:bg>
+      <p:bgPr>
+        <a:solidFill>
+          <a:srgbClr val="F4F6F9"/>
+        </a:solidFill>
+        <a:effectLst/>
+      </p:bgPr>
+    </p:bg>
+    <p:spTree>
+      <p:nvGrpSpPr>
+        <p:cNvPr id="1" name=""/>
+        <p:cNvGrpSpPr/>
+        <p:nvPr/>
+      </p:nvGrpSpPr>
+      <p:grpSpPr/>
+      <p:sp>
+        <p:nvSpPr>
+          <p:cNvPr id="2" name="Rectangle 1"/>
+          <p:cNvSpPr/>
+          <p:nvPr/>
+        </p:nvSpPr>
+        <p:spPr>
+          <a:xfrm>
+            <a:off x="548640" y="310896"/>
+            <a:ext cx="128016" cy="566928"/>
+          </a:xfrm>
+          <a:prstGeom prst="rect">
+            <a:avLst/>
+          </a:prstGeom>
+          <a:solidFill>
+            <a:srgbClr val="E0A32E"/>
+          </a:solidFill>
+          <a:ln>
+            <a:noFill/>
+          </a:ln>
+          <a:effectLst/>
+        </p:spPr>
+        <p:style>
+          <a:lnRef idx="1">
+            <a:schemeClr val="accent1"/>
+          </a:lnRef>
+          <a:fillRef idx="3">
+            <a:schemeClr val="accent1"/>
+          </a:fillRef>
+          <a:effectRef idx="2">
+            <a:schemeClr val="accent1"/>
+          </a:effectRef>
+          <a:fontRef idx="minor">
+            <a:schemeClr val="lt1"/>
+          </a:fontRef>
+        </p:style>
+        <p:txBody>
+          <a:bodyPr rtlCol="0" anchor="ctr"/>
+          <a:lstStyle/>
+          <a:p>
+            <a:pPr algn="ctr"/>
+          </a:p>
+        </p:txBody>
+      </p:sp>
+      <p:sp>
+        <p:nvSpPr>
+          <p:cNvPr id="3" name="TextBox 2"/>
+          <p:cNvSpPr txBox="1"/>
+          <p:nvPr/>
+        </p:nvSpPr>
+        <p:spPr>
+          <a:xfrm>
+            <a:off x="822959" y="201168"/>
+            <a:ext cx="10820095" cy="786384"/>
+          </a:xfrm>
+          <a:prstGeom prst="rect">
+            <a:avLst/>
+          </a:prstGeom>
+          <a:noFill/>
+        </p:spPr>
+        <p:txBody>
+          <a:bodyPr wrap="square" anchor="ctr" lIns="45720" rIns="45720" tIns="0" bIns="0">
+            <a:spAutoFit/>
+          </a:bodyPr>
+          <a:lstStyle/>
+          <a:p>
+            <a:pPr algn="l">
+              <a:lnSpc>
+                <a:spcPct val="100000"/>
+              </a:lnSpc>
+              <a:spcBef>
+                <a:spcPts val="0"/>
+              </a:spcBef>
+              <a:spcAft>
+                <a:spcPts val="600"/>
+              </a:spcAft>
+            </a:pPr>
+            <a:r>
+              <a:rPr sz="3000" b="1" i="0">
+                <a:solidFill>
+                  <a:srgbClr val="0E2A47"/>
+                </a:solidFill>
+                <a:latin typeface="Times New Roman"/>
+                <a:cs typeface="Times New Roman"/>
+              </a:rPr>
+              <a:t>Cloud Decode: Dynamic Selection Is the Wrong Lever</a:t>
+            </a:r>
+          </a:p>
+        </p:txBody>
+      </p:sp>
+      <p:sp>
+        <p:nvSpPr>
+          <p:cNvPr id="4" name="TextBox 3"/>
+          <p:cNvSpPr txBox="1"/>
+          <p:nvPr/>
+        </p:nvSpPr>
+        <p:spPr>
+          <a:xfrm>
+            <a:off x="548640" y="1078992"/>
+            <a:ext cx="11094415" cy="457200"/>
+          </a:xfrm>
+          <a:prstGeom prst="rect">
+            <a:avLst/>
+          </a:prstGeom>
+          <a:noFill/>
+        </p:spPr>
+        <p:txBody>
+          <a:bodyPr wrap="square" anchor="t" lIns="45720" rIns="45720" tIns="0" bIns="0">
+            <a:spAutoFit/>
+          </a:bodyPr>
+          <a:lstStyle/>
+          <a:p>
+            <a:pPr algn="l">
+              <a:lnSpc>
+                <a:spcPct val="100000"/>
+              </a:lnSpc>
+              <a:spcBef>
+                <a:spcPts val="0"/>
+              </a:spcBef>
+              <a:spcAft>
+                <a:spcPts val="600"/>
+              </a:spcAft>
+            </a:pPr>
+            <a:r>
+              <a:rPr sz="2000" b="1" i="0">
+                <a:solidFill>
+                  <a:srgbClr val="1C7293"/>
+                </a:solidFill>
+                <a:latin typeface="Times New Roman"/>
+                <a:cs typeface="Times New Roman"/>
+              </a:rPr>
+              <a:t>On resident GPUs, dynamic selection hurts throughput — tensor parallelism is the win</a:t>
+            </a:r>
+          </a:p>
+        </p:txBody>
+      </p:sp>
+      <p:pic>
+        <p:nvPicPr>
+          <p:cNvPr id="5" name="Picture 4" descr="amazon_logo.png"/>
+          <p:cNvPicPr>
+            <a:picLocks noChangeAspect="1"/>
+          </p:cNvPicPr>
+          <p:nvPr/>
+        </p:nvPicPr>
+        <p:blipFill>
+          <a:blip r:embed="rId2"/>
+          <a:stretch>
+            <a:fillRect/>
+          </a:stretch>
+        </p:blipFill>
+        <p:spPr>
+          <a:xfrm>
+            <a:off x="192024" y="6309360"/>
+            <a:ext cx="1463040" cy="440740"/>
+          </a:xfrm>
+          <a:prstGeom prst="rect">
+            <a:avLst/>
+          </a:prstGeom>
+        </p:spPr>
+      </p:pic>
+      <p:sp>
+        <p:nvSpPr>
+          <p:cNvPr id="6" name="Rectangle 5"/>
+          <p:cNvSpPr/>
+          <p:nvPr/>
+        </p:nvSpPr>
+        <p:spPr>
+          <a:xfrm>
+            <a:off x="11140135" y="6400800"/>
+            <a:ext cx="109728" cy="237744"/>
+          </a:xfrm>
+          <a:prstGeom prst="rect">
+            <a:avLst/>
+          </a:prstGeom>
+          <a:solidFill>
+            <a:srgbClr val="E0A32E"/>
+          </a:solidFill>
+          <a:ln>
+            <a:noFill/>
+          </a:ln>
+          <a:effectLst/>
+        </p:spPr>
+        <p:style>
+          <a:lnRef idx="1">
+            <a:schemeClr val="accent1"/>
+          </a:lnRef>
+          <a:fillRef idx="3">
+            <a:schemeClr val="accent1"/>
+          </a:fillRef>
+          <a:effectRef idx="2">
+            <a:schemeClr val="accent1"/>
+          </a:effectRef>
+          <a:fontRef idx="minor">
+            <a:schemeClr val="lt1"/>
+          </a:fontRef>
+        </p:style>
+        <p:txBody>
+          <a:bodyPr rtlCol="0" anchor="ctr"/>
+          <a:lstStyle/>
+          <a:p>
+            <a:pPr algn="ctr"/>
+          </a:p>
+        </p:txBody>
+      </p:sp>
+      <p:sp>
+        <p:nvSpPr>
+          <p:cNvPr id="7" name="TextBox 6"/>
+          <p:cNvSpPr txBox="1"/>
+          <p:nvPr/>
+        </p:nvSpPr>
+        <p:spPr>
+          <a:xfrm>
+            <a:off x="11323015" y="6364224"/>
+            <a:ext cx="685800" cy="320040"/>
+          </a:xfrm>
+          <a:prstGeom prst="rect">
+            <a:avLst/>
+          </a:prstGeom>
+          <a:noFill/>
+        </p:spPr>
+        <p:txBody>
+          <a:bodyPr wrap="square" anchor="ctr" lIns="45720" rIns="45720" tIns="0" bIns="0">
+            <a:spAutoFit/>
+          </a:bodyPr>
+          <a:lstStyle/>
+          <a:p>
+            <a:pPr algn="l">
+              <a:lnSpc>
+                <a:spcPct val="100000"/>
+              </a:lnSpc>
+              <a:spcBef>
+                <a:spcPts val="0"/>
+              </a:spcBef>
+              <a:spcAft>
+                <a:spcPts val="600"/>
+              </a:spcAft>
+            </a:pPr>
+            <a:r>
+              <a:rPr sz="1200" b="1" i="0">
+                <a:solidFill>
+                  <a:srgbClr val="5C6B7A"/>
+                </a:solidFill>
+                <a:latin typeface="Times New Roman"/>
+                <a:cs typeface="Times New Roman"/>
+              </a:rPr>
+              <a:t>12</a:t>
+            </a:r>
+          </a:p>
+        </p:txBody>
+      </p:sp>
+      <p:sp>
+        <p:nvSpPr>
+          <p:cNvPr id="8" name="TextBox 7"/>
+          <p:cNvSpPr txBox="1"/>
+          <p:nvPr/>
+        </p:nvSpPr>
+        <p:spPr>
+          <a:xfrm>
+            <a:off x="1828800" y="6382512"/>
+            <a:ext cx="8229600" cy="320040"/>
+          </a:xfrm>
+          <a:prstGeom prst="rect">
+            <a:avLst/>
+          </a:prstGeom>
+          <a:noFill/>
+        </p:spPr>
+        <p:txBody>
+          <a:bodyPr wrap="square" anchor="ctr" lIns="45720" rIns="45720" tIns="0" bIns="0">
+            <a:spAutoFit/>
+          </a:bodyPr>
+          <a:lstStyle/>
+          <a:p>
+            <a:pPr algn="l">
+              <a:lnSpc>
+                <a:spcPct val="100000"/>
+              </a:lnSpc>
+              <a:spcBef>
+                <a:spcPts val="0"/>
+              </a:spcBef>
+              <a:spcAft>
+                <a:spcPts val="600"/>
+              </a:spcAft>
+            </a:pPr>
+            <a:r>
+              <a:rPr sz="1100" b="0" i="1">
+                <a:solidFill>
+                  <a:srgbClr val="5C6B7A"/>
+                </a:solidFill>
+                <a:latin typeface="Times New Roman"/>
+                <a:cs typeface="Times New Roman"/>
+              </a:rPr>
+              <a:t>Per-Token Adaptive Channel Activation for MoE</a:t>
+            </a:r>
+          </a:p>
+        </p:txBody>
+      </p:sp>
+      <p:graphicFrame>
+        <p:nvGraphicFramePr>
+          <p:cNvPr id="9" name="Table 8"/>
+          <p:cNvGraphicFramePr>
+            <a:graphicFrameLocks noGrp="1"/>
+          </p:cNvGraphicFramePr>
+          <p:nvPr/>
+        </p:nvGraphicFramePr>
+        <p:xfrm>
+          <a:off x="548640" y="1709928"/>
+          <a:ext cx="5394960" cy="1828800"/>
+        </p:xfrm>
+        <a:graphic>
+          <a:graphicData uri="http://schemas.openxmlformats.org/drawingml/2006/table">
+            <a:tbl>
+              <a:tblPr firstRow="1">
+                <a:tableStyleId>{5C22544A-7EE6-4342-B048-85BDC9FD1C3A}</a:tableStyleId>
+              </a:tblPr>
+              <a:tblGrid>
+                <a:gridCol w="1554480"/>
+                <a:gridCol w="1554480"/>
+                <a:gridCol w="1691640"/>
+                <a:gridCol w="594360"/>
+              </a:tblGrid>
+              <a:tr h="457200">
+                <a:tc>
+                  <a:txBody>
+                    <a:bodyPr wrap="square"/>
+                    <a:lstStyle/>
+                    <a:p>
+                      <a:pPr algn="l"/>
+                      <a:r>
+                        <a:rPr sz="1400" b="1" i="0">
+                          <a:solidFill>
+                            <a:srgbClr val="FFFFFF"/>
+                          </a:solidFill>
+                          <a:latin typeface="Times New Roman"/>
+                          <a:cs typeface="Times New Roman"/>
+                        </a:rPr>
+                        <a:t>Parallelism</a:t>
+                      </a:r>
+                    </a:p>
+                  </a:txBody>
+                  <a:tcPr marL="54864" marR="54864" marT="9144" marB="9144" anchor="ctr">
+                    <a:solidFill>
+                      <a:srgbClr val="0E2A47"/>
+                    </a:solidFill>
+                  </a:tcPr>
+                </a:tc>
+                <a:tc>
+                  <a:txBody>
+                    <a:bodyPr wrap="square"/>
+                    <a:lstStyle/>
+                    <a:p>
+                      <a:pPr algn="ctr"/>
+                      <a:r>
+                        <a:rPr sz="1400" b="1" i="0">
+                          <a:solidFill>
+                            <a:srgbClr val="FFFFFF"/>
+                          </a:solidFill>
+                          <a:latin typeface="Times New Roman"/>
+                          <a:cs typeface="Times New Roman"/>
+                        </a:rPr>
+                        <a:t>Dense</a:t>
+                      </a:r>
+                    </a:p>
+                  </a:txBody>
+                  <a:tcPr marL="54864" marR="54864" marT="9144" marB="9144" anchor="ctr">
+                    <a:solidFill>
+                      <a:srgbClr val="0E2A47"/>
+                    </a:solidFill>
+                  </a:tcPr>
+                </a:tc>
+                <a:tc>
+                  <a:txBody>
+                    <a:bodyPr wrap="square"/>
+                    <a:lstStyle/>
+                    <a:p>
+                      <a:pPr algn="ctr"/>
+                      <a:r>
+                        <a:rPr sz="1400" b="1" i="0">
+                          <a:solidFill>
+                            <a:srgbClr val="FFFFFF"/>
+                          </a:solidFill>
+                          <a:latin typeface="Times New Roman"/>
+                          <a:cs typeface="Times New Roman"/>
+                        </a:rPr>
+                        <a:t>Dynamic</a:t>
+                      </a:r>
+                    </a:p>
+                  </a:txBody>
+                  <a:tcPr marL="54864" marR="54864" marT="9144" marB="9144" anchor="ctr">
+                    <a:solidFill>
+                      <a:srgbClr val="0E2A47"/>
+                    </a:solidFill>
+                  </a:tcPr>
+                </a:tc>
+                <a:tc>
+                  <a:txBody>
+                    <a:bodyPr wrap="square"/>
+                    <a:lstStyle/>
+                    <a:p>
+                      <a:pPr algn="ctr"/>
+                      <a:r>
+                        <a:rPr sz="1400" b="1" i="0">
+                          <a:solidFill>
+                            <a:srgbClr val="FFFFFF"/>
+                          </a:solidFill>
+                          <a:latin typeface="Times New Roman"/>
+                          <a:cs typeface="Times New Roman"/>
+                        </a:rPr>
+                        <a:t/>
+                      </a:r>
+                    </a:p>
+                  </a:txBody>
+                  <a:tcPr marL="54864" marR="54864" marT="9144" marB="9144" anchor="ctr">
+                    <a:solidFill>
+                      <a:srgbClr val="0E2A47"/>
+                    </a:solidFill>
+                  </a:tcPr>
+                </a:tc>
+              </a:tr>
+              <a:tr h="457200">
+                <a:tc>
+                  <a:txBody>
+                    <a:bodyPr wrap="square"/>
+                    <a:lstStyle/>
+                    <a:p>
+                      <a:pPr algn="l"/>
+                      <a:r>
+                        <a:rPr sz="1400" b="0" i="0">
+                          <a:solidFill>
+                            <a:srgbClr val="222A33"/>
+                          </a:solidFill>
+                          <a:latin typeface="Times New Roman"/>
+                          <a:cs typeface="Times New Roman"/>
+                        </a:rPr>
+                        <a:t>FSDP2 (dp)</a:t>
+                      </a:r>
+                    </a:p>
+                  </a:txBody>
+                  <a:tcPr marL="54864" marR="54864" marT="9144" marB="9144" anchor="ctr">
+                    <a:solidFill>
+                      <a:srgbClr val="FFFFFF"/>
+                    </a:solidFill>
+                  </a:tcPr>
+                </a:tc>
+                <a:tc>
+                  <a:txBody>
+                    <a:bodyPr wrap="square"/>
+                    <a:lstStyle/>
+                    <a:p>
+                      <a:pPr algn="ctr"/>
+                      <a:r>
+                        <a:rPr sz="1400" b="0" i="0">
+                          <a:solidFill>
+                            <a:srgbClr val="222A33"/>
+                          </a:solidFill>
+                          <a:latin typeface="Times New Roman"/>
+                          <a:cs typeface="Times New Roman"/>
+                        </a:rPr>
+                        <a:t>base</a:t>
+                      </a:r>
+                    </a:p>
+                  </a:txBody>
+                  <a:tcPr marL="54864" marR="54864" marT="9144" marB="9144" anchor="ctr">
+                    <a:solidFill>
+                      <a:srgbClr val="FFFFFF"/>
+                    </a:solidFill>
+                  </a:tcPr>
+                </a:tc>
+                <a:tc>
+                  <a:txBody>
+                    <a:bodyPr wrap="square"/>
+                    <a:lstStyle/>
+                    <a:p>
+                      <a:pPr algn="ctr"/>
+                      <a:r>
+                        <a:rPr sz="1400" b="0" i="0">
+                          <a:solidFill>
+                            <a:srgbClr val="222A33"/>
+                          </a:solidFill>
+                          <a:latin typeface="Times New Roman"/>
+                          <a:cs typeface="Times New Roman"/>
+                        </a:rPr>
+                        <a:t>0.83–0.88×</a:t>
+                      </a:r>
+                    </a:p>
+                  </a:txBody>
+                  <a:tcPr marL="54864" marR="54864" marT="9144" marB="9144" anchor="ctr">
+                    <a:solidFill>
+                      <a:srgbClr val="FFFFFF"/>
+                    </a:solidFill>
+                  </a:tcPr>
+                </a:tc>
+                <a:tc>
+                  <a:txBody>
+                    <a:bodyPr wrap="square"/>
+                    <a:lstStyle/>
+                    <a:p>
+                      <a:pPr algn="ctr"/>
+                      <a:r>
+                        <a:rPr sz="1400" b="0" i="0">
+                          <a:solidFill>
+                            <a:srgbClr val="222A33"/>
+                          </a:solidFill>
+                          <a:latin typeface="Times New Roman"/>
+                          <a:cs typeface="Times New Roman"/>
+                        </a:rPr>
+                        <a:t>↓</a:t>
+                      </a:r>
+                    </a:p>
+                  </a:txBody>
+                  <a:tcPr marL="54864" marR="54864" marT="9144" marB="9144" anchor="ctr">
+                    <a:solidFill>
+                      <a:srgbClr val="FFFFFF"/>
+                    </a:solidFill>
+                  </a:tcPr>
+                </a:tc>
+              </a:tr>
+              <a:tr h="457200">
+                <a:tc>
+                  <a:txBody>
+                    <a:bodyPr wrap="square"/>
+                    <a:lstStyle/>
+                    <a:p>
+                      <a:pPr algn="l"/>
+                      <a:r>
+                        <a:rPr sz="1400" b="0" i="0">
+                          <a:solidFill>
+                            <a:srgbClr val="222A33"/>
+                          </a:solidFill>
+                          <a:latin typeface="Times New Roman"/>
+                          <a:cs typeface="Times New Roman"/>
+                        </a:rPr>
+                        <a:t>TP = 2</a:t>
+                      </a:r>
+                    </a:p>
+                  </a:txBody>
+                  <a:tcPr marL="54864" marR="54864" marT="9144" marB="9144" anchor="ctr">
+                    <a:solidFill>
+                      <a:srgbClr val="EAEFF4"/>
+                    </a:solidFill>
+                  </a:tcPr>
+                </a:tc>
+                <a:tc>
+                  <a:txBody>
+                    <a:bodyPr wrap="square"/>
+                    <a:lstStyle/>
+                    <a:p>
+                      <a:pPr algn="ctr"/>
+                      <a:r>
+                        <a:rPr sz="1400" b="0" i="0">
+                          <a:solidFill>
+                            <a:srgbClr val="222A33"/>
+                          </a:solidFill>
+                          <a:latin typeface="Times New Roman"/>
+                          <a:cs typeface="Times New Roman"/>
+                        </a:rPr>
+                        <a:t>~2.2× base</a:t>
+                      </a:r>
+                    </a:p>
+                  </a:txBody>
+                  <a:tcPr marL="54864" marR="54864" marT="9144" marB="9144" anchor="ctr">
+                    <a:solidFill>
+                      <a:srgbClr val="EAEFF4"/>
+                    </a:solidFill>
+                  </a:tcPr>
+                </a:tc>
+                <a:tc>
+                  <a:txBody>
+                    <a:bodyPr wrap="square"/>
+                    <a:lstStyle/>
+                    <a:p>
+                      <a:pPr algn="ctr"/>
+                      <a:r>
+                        <a:rPr sz="1400" b="0" i="0">
+                          <a:solidFill>
+                            <a:srgbClr val="222A33"/>
+                          </a:solidFill>
+                          <a:latin typeface="Times New Roman"/>
+                          <a:cs typeface="Times New Roman"/>
+                        </a:rPr>
+                        <a:t>0.77× dense</a:t>
+                      </a:r>
+                    </a:p>
+                  </a:txBody>
+                  <a:tcPr marL="54864" marR="54864" marT="9144" marB="9144" anchor="ctr">
+                    <a:solidFill>
+                      <a:srgbClr val="EAEFF4"/>
+                    </a:solidFill>
+                  </a:tcPr>
+                </a:tc>
+                <a:tc>
+                  <a:txBody>
+                    <a:bodyPr wrap="square"/>
+                    <a:lstStyle/>
+                    <a:p>
+                      <a:pPr algn="ctr"/>
+                      <a:r>
+                        <a:rPr sz="1400" b="0" i="0">
+                          <a:solidFill>
+                            <a:srgbClr val="222A33"/>
+                          </a:solidFill>
+                          <a:latin typeface="Times New Roman"/>
+                          <a:cs typeface="Times New Roman"/>
+                        </a:rPr>
+                        <a:t>↓</a:t>
+                      </a:r>
+                    </a:p>
+                  </a:txBody>
+                  <a:tcPr marL="54864" marR="54864" marT="9144" marB="9144" anchor="ctr">
+                    <a:solidFill>
+                      <a:srgbClr val="EAEFF4"/>
+                    </a:solidFill>
+                  </a:tcPr>
+                </a:tc>
+              </a:tr>
+              <a:tr h="457200">
+                <a:tc>
+                  <a:txBody>
+                    <a:bodyPr wrap="square"/>
+                    <a:lstStyle/>
+                    <a:p>
+                      <a:pPr algn="l"/>
+                      <a:r>
+                        <a:rPr sz="1400" b="0" i="0">
+                          <a:solidFill>
+                            <a:srgbClr val="222A33"/>
+                          </a:solidFill>
+                          <a:latin typeface="Times New Roman"/>
+                          <a:cs typeface="Times New Roman"/>
+                        </a:rPr>
+                        <a:t>TP = 4</a:t>
+                      </a:r>
+                    </a:p>
+                  </a:txBody>
+                  <a:tcPr marL="54864" marR="54864" marT="9144" marB="9144" anchor="ctr">
+                    <a:solidFill>
+                      <a:srgbClr val="FFFFFF"/>
+                    </a:solidFill>
+                  </a:tcPr>
+                </a:tc>
+                <a:tc>
+                  <a:txBody>
+                    <a:bodyPr wrap="square"/>
+                    <a:lstStyle/>
+                    <a:p>
+                      <a:pPr algn="ctr"/>
+                      <a:r>
+                        <a:rPr sz="1400" b="0" i="0">
+                          <a:solidFill>
+                            <a:srgbClr val="222A33"/>
+                          </a:solidFill>
+                          <a:latin typeface="Times New Roman"/>
+                          <a:cs typeface="Times New Roman"/>
+                        </a:rPr>
+                        <a:t>~2.4× base</a:t>
+                      </a:r>
+                    </a:p>
+                  </a:txBody>
+                  <a:tcPr marL="54864" marR="54864" marT="9144" marB="9144" anchor="ctr">
+                    <a:solidFill>
+                      <a:srgbClr val="FFFFFF"/>
+                    </a:solidFill>
+                  </a:tcPr>
+                </a:tc>
+                <a:tc>
+                  <a:txBody>
+                    <a:bodyPr wrap="square"/>
+                    <a:lstStyle/>
+                    <a:p>
+                      <a:pPr algn="ctr"/>
+                      <a:r>
+                        <a:rPr sz="1400" b="0" i="0">
+                          <a:solidFill>
+                            <a:srgbClr val="222A33"/>
+                          </a:solidFill>
+                          <a:latin typeface="Times New Roman"/>
+                          <a:cs typeface="Times New Roman"/>
+                        </a:rPr>
+                        <a:t>0.65× dense</a:t>
+                      </a:r>
+                    </a:p>
+                  </a:txBody>
+                  <a:tcPr marL="54864" marR="54864" marT="9144" marB="9144" anchor="ctr">
+                    <a:solidFill>
+                      <a:srgbClr val="FFFFFF"/>
+                    </a:solidFill>
+                  </a:tcPr>
+                </a:tc>
+                <a:tc>
+                  <a:txBody>
+                    <a:bodyPr wrap="square"/>
+                    <a:lstStyle/>
+                    <a:p>
+                      <a:pPr algn="ctr"/>
+                      <a:r>
+                        <a:rPr sz="1400" b="0" i="0">
+                          <a:solidFill>
+                            <a:srgbClr val="222A33"/>
+                          </a:solidFill>
+                          <a:latin typeface="Times New Roman"/>
+                          <a:cs typeface="Times New Roman"/>
+                        </a:rPr>
+                        <a:t>↓</a:t>
+                      </a:r>
+                    </a:p>
+                  </a:txBody>
+                  <a:tcPr marL="54864" marR="54864" marT="9144" marB="9144" anchor="ctr">
+                    <a:solidFill>
+                      <a:srgbClr val="FFFFFF"/>
+                    </a:solidFill>
+                  </a:tcPr>
+                </a:tc>
+              </a:tr>
+            </a:tbl>
+          </a:graphicData>
+        </a:graphic>
+      </p:graphicFrame>
+      <p:sp>
+        <p:nvSpPr>
+          <p:cNvPr id="10" name="TextBox 9"/>
+          <p:cNvSpPr txBox="1"/>
+          <p:nvPr/>
+        </p:nvSpPr>
+        <p:spPr>
+          <a:xfrm>
+            <a:off x="548640" y="3584448"/>
+            <a:ext cx="5394960" cy="274320"/>
+          </a:xfrm>
+          <a:prstGeom prst="rect">
+            <a:avLst/>
+          </a:prstGeom>
+          <a:noFill/>
+        </p:spPr>
+        <p:txBody>
+          <a:bodyPr wrap="square" anchor="t" lIns="45720" rIns="45720" tIns="0" bIns="0">
+            <a:spAutoFit/>
+          </a:bodyPr>
+          <a:lstStyle/>
+          <a:p>
+            <a:pPr algn="l">
+              <a:lnSpc>
+                <a:spcPct val="100000"/>
+              </a:lnSpc>
+              <a:spcBef>
+                <a:spcPts val="0"/>
+              </a:spcBef>
+              <a:spcAft>
+                <a:spcPts val="600"/>
+              </a:spcAft>
+            </a:pPr>
+            <a:r>
+              <a:rPr sz="1000" b="0" i="1">
+                <a:solidFill>
+                  <a:srgbClr val="5C6B7A"/>
+                </a:solidFill>
+                <a:latin typeface="Times New Roman"/>
+                <a:cs typeface="Times New Roman"/>
+              </a:rPr>
+              <a:t>Throughput vs. the dense baseline for the same layout (tok/s).</a:t>
+            </a:r>
+          </a:p>
+        </p:txBody>
+      </p:sp>
+      <p:sp>
+        <p:nvSpPr>
+          <p:cNvPr id="11" name="TextBox 10"/>
+          <p:cNvSpPr txBox="1"/>
+          <p:nvPr/>
+        </p:nvSpPr>
+        <p:spPr>
+          <a:xfrm>
+            <a:off x="6263640" y="1645920"/>
+            <a:ext cx="5379415" cy="320040"/>
+          </a:xfrm>
+          <a:prstGeom prst="rect">
+            <a:avLst/>
+          </a:prstGeom>
+          <a:noFill/>
+        </p:spPr>
+        <p:txBody>
+          <a:bodyPr wrap="square" anchor="t" lIns="45720" rIns="45720" tIns="0" bIns="0">
+            <a:spAutoFit/>
+          </a:bodyPr>
+          <a:lstStyle/>
+          <a:p>
+            <a:pPr algn="l">
+              <a:lnSpc>
+                <a:spcPct val="100000"/>
+              </a:lnSpc>
+              <a:spcBef>
+                <a:spcPts val="0"/>
+              </a:spcBef>
+              <a:spcAft>
+                <a:spcPts val="600"/>
+              </a:spcAft>
+            </a:pPr>
+            <a:r>
+              <a:rPr sz="1600" b="1" i="0">
+                <a:solidFill>
+                  <a:srgbClr val="0E2A47"/>
+                </a:solidFill>
+                <a:latin typeface="Times New Roman"/>
+                <a:cs typeface="Times New Roman"/>
+              </a:rPr>
+              <a:t>Why it hurts instead of helps:</a:t>
+            </a:r>
+          </a:p>
+        </p:txBody>
+      </p:sp>
+      <p:sp>
+        <p:nvSpPr>
+          <p:cNvPr id="12" name="TextBox 11"/>
+          <p:cNvSpPr txBox="1"/>
+          <p:nvPr/>
+        </p:nvSpPr>
+        <p:spPr>
+          <a:xfrm>
+            <a:off x="6263640" y="2011680"/>
+            <a:ext cx="5379415" cy="2743200"/>
+          </a:xfrm>
+          <a:prstGeom prst="rect">
+            <a:avLst/>
+          </a:prstGeom>
+          <a:noFill/>
+        </p:spPr>
+        <p:txBody>
+          <a:bodyPr wrap="square" lIns="0" rIns="0" tIns="0" bIns="0">
+            <a:spAutoFit/>
+          </a:bodyPr>
+          <a:lstStyle/>
+          <a:p>
+            <a:pPr indent="-256032" marL="256032">
+              <a:lnSpc>
+                <a:spcPct val="104000"/>
+              </a:lnSpc>
+              <a:spcBef>
+                <a:spcPts val="0"/>
+              </a:spcBef>
+              <a:spcAft>
+                <a:spcPts val="800"/>
+              </a:spcAft>
+              <a:buClr>
+                <a:srgbClr val="E0A32E"/>
+              </a:buClr>
+              <a:buFont typeface="Times New Roman"/>
+              <a:buChar char="▪"/>
+            </a:pPr>
+            <a:r>
+              <a:rPr sz="1350" b="1" i="0">
+                <a:solidFill>
+                  <a:srgbClr val="1C7293"/>
+                </a:solidFill>
+                <a:latin typeface="Times New Roman"/>
+                <a:cs typeface="Times New Roman"/>
+              </a:rPr>
+              <a:t>FSDP2: </a:t>
+            </a:r>
+            <a:r>
+              <a:rPr sz="1350" b="0" i="0">
+                <a:solidFill>
+                  <a:srgbClr val="222A33"/>
+                </a:solidFill>
+                <a:latin typeface="Times New Roman"/>
+                <a:cs typeface="Times New Roman"/>
+              </a:rPr>
+              <a:t>the all-gather of each block's sharded weights (~83% of GPU-busy time) is independent of per-token budget.</a:t>
+            </a:r>
+          </a:p>
+          <a:p>
+            <a:pPr indent="-256032" marL="256032">
+              <a:lnSpc>
+                <a:spcPct val="104000"/>
+              </a:lnSpc>
+              <a:spcBef>
+                <a:spcPts val="0"/>
+              </a:spcBef>
+              <a:spcAft>
+                <a:spcPts val="800"/>
+              </a:spcAft>
+              <a:buClr>
+                <a:srgbClr val="E0A32E"/>
+              </a:buClr>
+              <a:buFont typeface="Times New Roman"/>
+              <a:buChar char="▪"/>
+            </a:pPr>
+            <a:r>
+              <a:rPr sz="1350" b="1" i="0">
+                <a:solidFill>
+                  <a:srgbClr val="1C7293"/>
+                </a:solidFill>
+                <a:latin typeface="Times New Roman"/>
+                <a:cs typeface="Times New Roman"/>
+              </a:rPr>
+              <a:t>TP: </a:t>
+            </a:r>
+            <a:r>
+              <a:rPr sz="1350" b="0" i="0">
+                <a:solidFill>
+                  <a:srgbClr val="222A33"/>
+                </a:solidFill>
+                <a:latin typeface="Times New Roman"/>
+                <a:cs typeface="Times New Roman"/>
+              </a:rPr>
+              <a:t>the weight read is already split tp-ways to a tiny slice (18.9 MB/rank at tp=4) — nothing left worth cutting.</a:t>
+            </a:r>
+          </a:p>
+          <a:p>
+            <a:pPr indent="-256032" marL="256032">
+              <a:lnSpc>
+                <a:spcPct val="104000"/>
+              </a:lnSpc>
+              <a:spcBef>
+                <a:spcPts val="0"/>
+              </a:spcBef>
+              <a:spcAft>
+                <a:spcPts val="800"/>
+              </a:spcAft>
+              <a:buClr>
+                <a:srgbClr val="E0A32E"/>
+              </a:buClr>
+              <a:buFont typeface="Times New Roman"/>
+              <a:buChar char="▪"/>
+            </a:pPr>
+            <a:r>
+              <a:rPr sz="1350" b="1" i="0">
+                <a:solidFill>
+                  <a:srgbClr val="B43232"/>
+                </a:solidFill>
+                <a:latin typeface="Times New Roman"/>
+                <a:cs typeface="Times New Roman"/>
+              </a:rPr>
+              <a:t>Fixed overhead added: </a:t>
+            </a:r>
+            <a:r>
+              <a:rPr sz="1350" b="0" i="0">
+                <a:solidFill>
+                  <a:srgbClr val="222A33"/>
+                </a:solidFill>
+                <a:latin typeface="Times New Roman"/>
+                <a:cs typeface="Times New Roman"/>
+              </a:rPr>
+              <a:t>~0.17 ms/token top-k + gather/scatter, plus ~0.1 ms all-reduce over H under TP.</a:t>
+            </a:r>
+          </a:p>
+        </p:txBody>
+      </p:sp>
+      <p:sp>
+        <p:nvSpPr>
+          <p:cNvPr id="13" name="Rectangle 12"/>
+          <p:cNvSpPr/>
+          <p:nvPr/>
+        </p:nvSpPr>
+        <p:spPr>
+          <a:xfrm>
+            <a:off x="548640" y="5303520"/>
+            <a:ext cx="11094415" cy="932688"/>
+          </a:xfrm>
+          <a:prstGeom prst="rect">
+            <a:avLst/>
+          </a:prstGeom>
+          <a:solidFill>
+            <a:srgbClr val="0E2A47"/>
+          </a:solidFill>
+          <a:ln>
+            <a:noFill/>
+          </a:ln>
+          <a:effectLst/>
+        </p:spPr>
+        <p:style>
+          <a:lnRef idx="1">
+            <a:schemeClr val="accent1"/>
+          </a:lnRef>
+          <a:fillRef idx="3">
+            <a:schemeClr val="accent1"/>
+          </a:fillRef>
+          <a:effectRef idx="2">
+            <a:schemeClr val="accent1"/>
+          </a:effectRef>
+          <a:fontRef idx="minor">
+            <a:schemeClr val="lt1"/>
+          </a:fontRef>
+        </p:style>
+        <p:txBody>
+          <a:bodyPr rtlCol="0" anchor="ctr"/>
+          <a:lstStyle/>
+          <a:p>
+            <a:pPr algn="ctr"/>
+          </a:p>
+        </p:txBody>
+      </p:sp>
+      <p:sp>
+        <p:nvSpPr>
+          <p:cNvPr id="14" name="Rectangle 13"/>
+          <p:cNvSpPr/>
+          <p:nvPr/>
+        </p:nvSpPr>
+        <p:spPr>
+          <a:xfrm>
+            <a:off x="548640" y="5303520"/>
+            <a:ext cx="128016" cy="932688"/>
+          </a:xfrm>
+          <a:prstGeom prst="rect">
+            <a:avLst/>
+          </a:prstGeom>
+          <a:solidFill>
+            <a:srgbClr val="E0A32E"/>
+          </a:solidFill>
+          <a:ln>
+            <a:noFill/>
+          </a:ln>
+          <a:effectLst/>
+        </p:spPr>
+        <p:style>
+          <a:lnRef idx="1">
+            <a:schemeClr val="accent1"/>
+          </a:lnRef>
+          <a:fillRef idx="3">
+            <a:schemeClr val="accent1"/>
+          </a:fillRef>
+          <a:effectRef idx="2">
+            <a:schemeClr val="accent1"/>
+          </a:effectRef>
+          <a:fontRef idx="minor">
+            <a:schemeClr val="lt1"/>
+          </a:fontRef>
+        </p:style>
+        <p:txBody>
+          <a:bodyPr rtlCol="0" anchor="ctr"/>
+          <a:lstStyle/>
+          <a:p>
+            <a:pPr algn="ctr"/>
+          </a:p>
+        </p:txBody>
+      </p:sp>
+      <p:sp>
+        <p:nvSpPr>
+          <p:cNvPr id="15" name="TextBox 14"/>
+          <p:cNvSpPr txBox="1"/>
+          <p:nvPr/>
+        </p:nvSpPr>
+        <p:spPr>
+          <a:xfrm>
+            <a:off x="868680" y="5394960"/>
+            <a:ext cx="10454335" cy="768096"/>
+          </a:xfrm>
+          <a:prstGeom prst="rect">
+            <a:avLst/>
+          </a:prstGeom>
+          <a:noFill/>
+        </p:spPr>
+        <p:txBody>
+          <a:bodyPr wrap="square" anchor="ctr" lIns="45720" rIns="45720" tIns="0" bIns="0">
+            <a:spAutoFit/>
+          </a:bodyPr>
+          <a:lstStyle/>
+          <a:p>
+            <a:pPr algn="l">
+              <a:lnSpc>
+                <a:spcPct val="105000"/>
+              </a:lnSpc>
+              <a:spcBef>
+                <a:spcPts val="0"/>
+              </a:spcBef>
+              <a:spcAft>
+                <a:spcPts val="500"/>
+              </a:spcAft>
+            </a:pPr>
+            <a:r>
+              <a:rPr sz="1600" b="0" i="0">
+                <a:solidFill>
+                  <a:srgbClr val="FFFFFF"/>
+                </a:solidFill>
+                <a:latin typeface="Times New Roman"/>
+                <a:cs typeface="Times New Roman"/>
+              </a:rPr>
+              <a:t>Cloud throughput levers are </a:t>
+            </a:r>
+            <a:r>
+              <a:rPr sz="1600" b="1" i="0">
+                <a:solidFill>
+                  <a:srgbClr val="E0A32E"/>
+                </a:solidFill>
+                <a:latin typeface="Times New Roman"/>
+                <a:cs typeface="Times New Roman"/>
+              </a:rPr>
+              <a:t>collectives + batch/parallelism layout</a:t>
+            </a:r>
+            <a:r>
+              <a:rPr sz="1600" b="0" i="0">
+                <a:solidFill>
+                  <a:srgbClr val="FFFFFF"/>
+                </a:solidFill>
+                <a:latin typeface="Times New Roman"/>
+                <a:cs typeface="Times New Roman"/>
+              </a:rPr>
+              <a:t>, not activated-parameter count.</a:t>
+            </a:r>
+          </a:p>
+          <a:p>
+            <a:pPr algn="l">
+              <a:lnSpc>
+                <a:spcPct val="105000"/>
+              </a:lnSpc>
+              <a:spcBef>
+                <a:spcPts val="0"/>
+              </a:spcBef>
+              <a:spcAft>
+                <a:spcPts val="500"/>
+              </a:spcAft>
+            </a:pPr>
+            <a:r>
+              <a:rPr sz="1600" b="0" i="0">
+                <a:solidFill>
+                  <a:srgbClr val="FFFFFF"/>
+                </a:solidFill>
+                <a:latin typeface="Times New Roman"/>
+                <a:cs typeface="Times New Roman"/>
+              </a:rPr>
+              <a:t>The dynamic method's cloud payoff is </a:t>
+            </a:r>
+            <a:r>
+              <a:rPr sz="1600" b="1" i="0">
+                <a:solidFill>
+                  <a:srgbClr val="E0A32E"/>
+                </a:solidFill>
+                <a:latin typeface="Times New Roman"/>
+                <a:cs typeface="Times New Roman"/>
+              </a:rPr>
+              <a:t>activation memory, not tokens/s</a:t>
+            </a:r>
+            <a:r>
+              <a:rPr sz="1600" b="0" i="0">
+                <a:solidFill>
+                  <a:srgbClr val="FFFFFF"/>
+                </a:solidFill>
+                <a:latin typeface="Times New Roman"/>
+                <a:cs typeface="Times New Roman"/>
+              </a:rPr>
+              <a:t> — it targets edge, not cloud.</a:t>
+            </a:r>
+          </a:p>
+        </p:txBody>
+      </p:sp>
+    </p:spTree>
+  </p:cSld>
+  <p:clrMapOvr>
+    <a:masterClrMapping/>
+  </p:clrMapOvr>
+</p:sld>
+</file>
+
 <file path=ppt/slides/slide2.xml><?xml version="1.0" encoding="utf-8"?>
 <p:sld xmlns:a="http://schemas.openxmlformats.org/drawingml/2006/main" xmlns:p="http://schemas.openxmlformats.org/presentationml/2006/main" xmlns:r="http://schemas.openxmlformats.org/officeDocument/2006/relationships">
   <p:cSld>
@@ -4546,8 +9677,8 @@
         </p:blipFill>
         <p:spPr>
           <a:xfrm>
-            <a:off x="502919" y="1682496"/>
-            <a:ext cx="5815738" cy="4343400"/>
+            <a:off x="502919" y="1984248"/>
+            <a:ext cx="5761403" cy="4023360"/>
           </a:xfrm>
           <a:prstGeom prst="rect">
             <a:avLst/>
@@ -4562,8 +9693,8 @@
         </p:nvSpPr>
         <p:spPr>
           <a:xfrm>
-            <a:off x="6547258" y="1682496"/>
-            <a:ext cx="5095796" cy="1828800"/>
+            <a:off x="6492923" y="1682496"/>
+            <a:ext cx="5150131" cy="1828800"/>
           </a:xfrm>
           <a:prstGeom prst="rect">
             <a:avLst/>
@@ -4699,8 +9830,8 @@
         </p:nvSpPr>
         <p:spPr>
           <a:xfrm>
-            <a:off x="6547258" y="3447288"/>
-            <a:ext cx="5095796" cy="292608"/>
+            <a:off x="6492923" y="3447288"/>
+            <a:ext cx="5150131" cy="292608"/>
           </a:xfrm>
           <a:prstGeom prst="rect">
             <a:avLst/>
@@ -4745,8 +9876,8 @@
         </p:nvSpPr>
         <p:spPr>
           <a:xfrm>
-            <a:off x="6547258" y="3822191"/>
-            <a:ext cx="5095796" cy="841248"/>
+            <a:off x="6492923" y="3822191"/>
+            <a:ext cx="5150131" cy="841248"/>
           </a:xfrm>
           <a:prstGeom prst="rect">
             <a:avLst/>
@@ -4791,7 +9922,7 @@
         </p:nvSpPr>
         <p:spPr>
           <a:xfrm>
-            <a:off x="6547258" y="3822191"/>
+            <a:off x="6492923" y="3822191"/>
             <a:ext cx="109728" cy="841248"/>
           </a:xfrm>
           <a:prstGeom prst="rect">
@@ -4835,8 +9966,8 @@
         </p:nvSpPr>
         <p:spPr>
           <a:xfrm>
-            <a:off x="6803290" y="3904487"/>
-            <a:ext cx="4711748" cy="704088"/>
+            <a:off x="6748955" y="3904487"/>
+            <a:ext cx="4766083" cy="704088"/>
           </a:xfrm>
           <a:prstGeom prst="rect">
             <a:avLst/>
@@ -4947,8 +10078,8 @@
         </p:nvSpPr>
         <p:spPr>
           <a:xfrm>
-            <a:off x="6547258" y="4791455"/>
-            <a:ext cx="5095796" cy="841248"/>
+            <a:off x="6492923" y="4791455"/>
+            <a:ext cx="5150131" cy="841248"/>
           </a:xfrm>
           <a:prstGeom prst="rect">
             <a:avLst/>
@@ -4993,7 +10124,7 @@
         </p:nvSpPr>
         <p:spPr>
           <a:xfrm>
-            <a:off x="6547258" y="4791455"/>
+            <a:off x="6492923" y="4791455"/>
             <a:ext cx="109728" cy="841248"/>
           </a:xfrm>
           <a:prstGeom prst="rect">
@@ -5037,8 +10168,8 @@
         </p:nvSpPr>
         <p:spPr>
           <a:xfrm>
-            <a:off x="6803290" y="4873751"/>
-            <a:ext cx="4711748" cy="704088"/>
+            <a:off x="6748955" y="4873751"/>
+            <a:ext cx="4766083" cy="704088"/>
           </a:xfrm>
           <a:prstGeom prst="rect">
             <a:avLst/>
@@ -5113,7 +10244,7 @@
                 <a:latin typeface="Times New Roman"/>
                 <a:cs typeface="Times New Roman"/>
               </a:rPr>
-              <a:t>Load fewer bytes DRAM→SRAM each token.</a:t>
+              <a:t>Move fewer bytes into the GPU each token.</a:t>
             </a:r>
           </a:p>
           <a:p>
@@ -5136,7 +10267,7 @@
                 <a:latin typeface="Times New Roman"/>
                 <a:cs typeface="Times New Roman"/>
               </a:rPr>
-              <a:t>Less bandwidth + less compute = lower latency.</a:t>
+              <a:t>Fetch/read time scales with bytes → lower latency.</a:t>
             </a:r>
           </a:p>
         </p:txBody>
@@ -5149,8 +10280,8 @@
         </p:nvSpPr>
         <p:spPr>
           <a:xfrm>
-            <a:off x="6547258" y="5687567"/>
-            <a:ext cx="5095796" cy="274320"/>
+            <a:off x="6492923" y="5687567"/>
+            <a:ext cx="5150131" cy="274320"/>
           </a:xfrm>
           <a:prstGeom prst="rect">
             <a:avLst/>
@@ -5203,6 +10334,4487 @@
                 <a:cs typeface="Times New Roman"/>
               </a:rPr>
               <a:t>.</a:t>
+            </a:r>
+          </a:p>
+        </p:txBody>
+      </p:sp>
+    </p:spTree>
+  </p:cSld>
+  <p:clrMapOvr>
+    <a:masterClrMapping/>
+  </p:clrMapOvr>
+</p:sld>
+</file>
+
+<file path=ppt/slides/slide3.xml><?xml version="1.0" encoding="utf-8"?>
+<p:sld xmlns:a="http://schemas.openxmlformats.org/drawingml/2006/main" xmlns:p="http://schemas.openxmlformats.org/presentationml/2006/main" xmlns:r="http://schemas.openxmlformats.org/officeDocument/2006/relationships">
+  <p:cSld>
+    <p:bg>
+      <p:bgPr>
+        <a:solidFill>
+          <a:srgbClr val="F4F6F9"/>
+        </a:solidFill>
+        <a:effectLst/>
+      </p:bgPr>
+    </p:bg>
+    <p:spTree>
+      <p:nvGrpSpPr>
+        <p:cNvPr id="1" name=""/>
+        <p:cNvGrpSpPr/>
+        <p:nvPr/>
+      </p:nvGrpSpPr>
+      <p:grpSpPr/>
+      <p:sp>
+        <p:nvSpPr>
+          <p:cNvPr id="2" name="Rectangle 1"/>
+          <p:cNvSpPr/>
+          <p:nvPr/>
+        </p:nvSpPr>
+        <p:spPr>
+          <a:xfrm>
+            <a:off x="548640" y="310896"/>
+            <a:ext cx="128016" cy="566928"/>
+          </a:xfrm>
+          <a:prstGeom prst="rect">
+            <a:avLst/>
+          </a:prstGeom>
+          <a:solidFill>
+            <a:srgbClr val="E0A32E"/>
+          </a:solidFill>
+          <a:ln>
+            <a:noFill/>
+          </a:ln>
+          <a:effectLst/>
+        </p:spPr>
+        <p:style>
+          <a:lnRef idx="1">
+            <a:schemeClr val="accent1"/>
+          </a:lnRef>
+          <a:fillRef idx="3">
+            <a:schemeClr val="accent1"/>
+          </a:fillRef>
+          <a:effectRef idx="2">
+            <a:schemeClr val="accent1"/>
+          </a:effectRef>
+          <a:fontRef idx="minor">
+            <a:schemeClr val="lt1"/>
+          </a:fontRef>
+        </p:style>
+        <p:txBody>
+          <a:bodyPr rtlCol="0" anchor="ctr"/>
+          <a:lstStyle/>
+          <a:p>
+            <a:pPr algn="ctr"/>
+          </a:p>
+        </p:txBody>
+      </p:sp>
+      <p:sp>
+        <p:nvSpPr>
+          <p:cNvPr id="3" name="TextBox 2"/>
+          <p:cNvSpPr txBox="1"/>
+          <p:nvPr/>
+        </p:nvSpPr>
+        <p:spPr>
+          <a:xfrm>
+            <a:off x="822959" y="201168"/>
+            <a:ext cx="10820095" cy="786384"/>
+          </a:xfrm>
+          <a:prstGeom prst="rect">
+            <a:avLst/>
+          </a:prstGeom>
+          <a:noFill/>
+        </p:spPr>
+        <p:txBody>
+          <a:bodyPr wrap="square" anchor="ctr" lIns="45720" rIns="45720" tIns="0" bIns="0">
+            <a:spAutoFit/>
+          </a:bodyPr>
+          <a:lstStyle/>
+          <a:p>
+            <a:pPr algn="l">
+              <a:lnSpc>
+                <a:spcPct val="100000"/>
+              </a:lnSpc>
+              <a:spcBef>
+                <a:spcPts val="0"/>
+              </a:spcBef>
+              <a:spcAft>
+                <a:spcPts val="600"/>
+              </a:spcAft>
+            </a:pPr>
+            <a:r>
+              <a:rPr sz="3000" b="1" i="0">
+                <a:solidFill>
+                  <a:srgbClr val="0E2A47"/>
+                </a:solidFill>
+                <a:latin typeface="Times New Roman"/>
+                <a:cs typeface="Times New Roman"/>
+              </a:rPr>
+              <a:t>A Sparse Subset of Channels Suffices</a:t>
+            </a:r>
+          </a:p>
+        </p:txBody>
+      </p:sp>
+      <p:sp>
+        <p:nvSpPr>
+          <p:cNvPr id="4" name="TextBox 3"/>
+          <p:cNvSpPr txBox="1"/>
+          <p:nvPr/>
+        </p:nvSpPr>
+        <p:spPr>
+          <a:xfrm>
+            <a:off x="548640" y="1078992"/>
+            <a:ext cx="11094415" cy="457200"/>
+          </a:xfrm>
+          <a:prstGeom prst="rect">
+            <a:avLst/>
+          </a:prstGeom>
+          <a:noFill/>
+        </p:spPr>
+        <p:txBody>
+          <a:bodyPr wrap="square" anchor="t" lIns="45720" rIns="45720" tIns="0" bIns="0">
+            <a:spAutoFit/>
+          </a:bodyPr>
+          <a:lstStyle/>
+          <a:p>
+            <a:pPr algn="l">
+              <a:lnSpc>
+                <a:spcPct val="100000"/>
+              </a:lnSpc>
+              <a:spcBef>
+                <a:spcPts val="0"/>
+              </a:spcBef>
+              <a:spcAft>
+                <a:spcPts val="600"/>
+              </a:spcAft>
+            </a:pPr>
+            <a:r>
+              <a:rPr sz="2000" b="1" i="0">
+                <a:solidFill>
+                  <a:srgbClr val="1C7293"/>
+                </a:solidFill>
+                <a:latin typeface="Times New Roman"/>
+                <a:cs typeface="Times New Roman"/>
+              </a:rPr>
+              <a:t>Within one expert, a few channels carry almost all the output</a:t>
+            </a:r>
+          </a:p>
+        </p:txBody>
+      </p:sp>
+      <p:pic>
+        <p:nvPicPr>
+          <p:cNvPr id="5" name="Picture 4" descr="amazon_logo.png"/>
+          <p:cNvPicPr>
+            <a:picLocks noChangeAspect="1"/>
+          </p:cNvPicPr>
+          <p:nvPr/>
+        </p:nvPicPr>
+        <p:blipFill>
+          <a:blip r:embed="rId2"/>
+          <a:stretch>
+            <a:fillRect/>
+          </a:stretch>
+        </p:blipFill>
+        <p:spPr>
+          <a:xfrm>
+            <a:off x="192024" y="6309360"/>
+            <a:ext cx="1463040" cy="440740"/>
+          </a:xfrm>
+          <a:prstGeom prst="rect">
+            <a:avLst/>
+          </a:prstGeom>
+        </p:spPr>
+      </p:pic>
+      <p:sp>
+        <p:nvSpPr>
+          <p:cNvPr id="6" name="Rectangle 5"/>
+          <p:cNvSpPr/>
+          <p:nvPr/>
+        </p:nvSpPr>
+        <p:spPr>
+          <a:xfrm>
+            <a:off x="11140135" y="6400800"/>
+            <a:ext cx="109728" cy="237744"/>
+          </a:xfrm>
+          <a:prstGeom prst="rect">
+            <a:avLst/>
+          </a:prstGeom>
+          <a:solidFill>
+            <a:srgbClr val="E0A32E"/>
+          </a:solidFill>
+          <a:ln>
+            <a:noFill/>
+          </a:ln>
+          <a:effectLst/>
+        </p:spPr>
+        <p:style>
+          <a:lnRef idx="1">
+            <a:schemeClr val="accent1"/>
+          </a:lnRef>
+          <a:fillRef idx="3">
+            <a:schemeClr val="accent1"/>
+          </a:fillRef>
+          <a:effectRef idx="2">
+            <a:schemeClr val="accent1"/>
+          </a:effectRef>
+          <a:fontRef idx="minor">
+            <a:schemeClr val="lt1"/>
+          </a:fontRef>
+        </p:style>
+        <p:txBody>
+          <a:bodyPr rtlCol="0" anchor="ctr"/>
+          <a:lstStyle/>
+          <a:p>
+            <a:pPr algn="ctr"/>
+          </a:p>
+        </p:txBody>
+      </p:sp>
+      <p:sp>
+        <p:nvSpPr>
+          <p:cNvPr id="7" name="TextBox 6"/>
+          <p:cNvSpPr txBox="1"/>
+          <p:nvPr/>
+        </p:nvSpPr>
+        <p:spPr>
+          <a:xfrm>
+            <a:off x="11323015" y="6364224"/>
+            <a:ext cx="685800" cy="320040"/>
+          </a:xfrm>
+          <a:prstGeom prst="rect">
+            <a:avLst/>
+          </a:prstGeom>
+          <a:noFill/>
+        </p:spPr>
+        <p:txBody>
+          <a:bodyPr wrap="square" anchor="ctr" lIns="45720" rIns="45720" tIns="0" bIns="0">
+            <a:spAutoFit/>
+          </a:bodyPr>
+          <a:lstStyle/>
+          <a:p>
+            <a:pPr algn="l">
+              <a:lnSpc>
+                <a:spcPct val="100000"/>
+              </a:lnSpc>
+              <a:spcBef>
+                <a:spcPts val="0"/>
+              </a:spcBef>
+              <a:spcAft>
+                <a:spcPts val="600"/>
+              </a:spcAft>
+            </a:pPr>
+            <a:r>
+              <a:rPr sz="1200" b="1" i="0">
+                <a:solidFill>
+                  <a:srgbClr val="5C6B7A"/>
+                </a:solidFill>
+                <a:latin typeface="Times New Roman"/>
+                <a:cs typeface="Times New Roman"/>
+              </a:rPr>
+              <a:t>3</a:t>
+            </a:r>
+          </a:p>
+        </p:txBody>
+      </p:sp>
+      <p:sp>
+        <p:nvSpPr>
+          <p:cNvPr id="8" name="TextBox 7"/>
+          <p:cNvSpPr txBox="1"/>
+          <p:nvPr/>
+        </p:nvSpPr>
+        <p:spPr>
+          <a:xfrm>
+            <a:off x="1828800" y="6382512"/>
+            <a:ext cx="8229600" cy="320040"/>
+          </a:xfrm>
+          <a:prstGeom prst="rect">
+            <a:avLst/>
+          </a:prstGeom>
+          <a:noFill/>
+        </p:spPr>
+        <p:txBody>
+          <a:bodyPr wrap="square" anchor="ctr" lIns="45720" rIns="45720" tIns="0" bIns="0">
+            <a:spAutoFit/>
+          </a:bodyPr>
+          <a:lstStyle/>
+          <a:p>
+            <a:pPr algn="l">
+              <a:lnSpc>
+                <a:spcPct val="100000"/>
+              </a:lnSpc>
+              <a:spcBef>
+                <a:spcPts val="0"/>
+              </a:spcBef>
+              <a:spcAft>
+                <a:spcPts val="600"/>
+              </a:spcAft>
+            </a:pPr>
+            <a:r>
+              <a:rPr sz="1100" b="0" i="1">
+                <a:solidFill>
+                  <a:srgbClr val="5C6B7A"/>
+                </a:solidFill>
+                <a:latin typeface="Times New Roman"/>
+                <a:cs typeface="Times New Roman"/>
+              </a:rPr>
+              <a:t>Per-Token Adaptive Channel Activation for MoE</a:t>
+            </a:r>
+          </a:p>
+        </p:txBody>
+      </p:sp>
+      <p:pic>
+        <p:nvPicPr>
+          <p:cNvPr id="9" name="Picture 8" descr="fig_sparse_suffices.png"/>
+          <p:cNvPicPr>
+            <a:picLocks noChangeAspect="1"/>
+          </p:cNvPicPr>
+          <p:nvPr/>
+        </p:nvPicPr>
+        <p:blipFill>
+          <a:blip r:embed="rId3"/>
+          <a:stretch>
+            <a:fillRect/>
+          </a:stretch>
+        </p:blipFill>
+        <p:spPr>
+          <a:xfrm>
+            <a:off x="3382175" y="1755648"/>
+            <a:ext cx="5427345" cy="3383280"/>
+          </a:xfrm>
+          <a:prstGeom prst="rect">
+            <a:avLst/>
+          </a:prstGeom>
+        </p:spPr>
+      </p:pic>
+      <p:sp>
+        <p:nvSpPr>
+          <p:cNvPr id="10" name="Rectangle 9"/>
+          <p:cNvSpPr/>
+          <p:nvPr/>
+        </p:nvSpPr>
+        <p:spPr>
+          <a:xfrm>
+            <a:off x="548640" y="5303520"/>
+            <a:ext cx="11094415" cy="896112"/>
+          </a:xfrm>
+          <a:prstGeom prst="rect">
+            <a:avLst/>
+          </a:prstGeom>
+          <a:solidFill>
+            <a:srgbClr val="0E2A47"/>
+          </a:solidFill>
+          <a:ln>
+            <a:noFill/>
+          </a:ln>
+          <a:effectLst/>
+        </p:spPr>
+        <p:style>
+          <a:lnRef idx="1">
+            <a:schemeClr val="accent1"/>
+          </a:lnRef>
+          <a:fillRef idx="3">
+            <a:schemeClr val="accent1"/>
+          </a:fillRef>
+          <a:effectRef idx="2">
+            <a:schemeClr val="accent1"/>
+          </a:effectRef>
+          <a:fontRef idx="minor">
+            <a:schemeClr val="lt1"/>
+          </a:fontRef>
+        </p:style>
+        <p:txBody>
+          <a:bodyPr rtlCol="0" anchor="ctr"/>
+          <a:lstStyle/>
+          <a:p>
+            <a:pPr algn="ctr"/>
+          </a:p>
+        </p:txBody>
+      </p:sp>
+      <p:sp>
+        <p:nvSpPr>
+          <p:cNvPr id="11" name="Rectangle 10"/>
+          <p:cNvSpPr/>
+          <p:nvPr/>
+        </p:nvSpPr>
+        <p:spPr>
+          <a:xfrm>
+            <a:off x="548640" y="5303520"/>
+            <a:ext cx="128016" cy="896112"/>
+          </a:xfrm>
+          <a:prstGeom prst="rect">
+            <a:avLst/>
+          </a:prstGeom>
+          <a:solidFill>
+            <a:srgbClr val="E0A32E"/>
+          </a:solidFill>
+          <a:ln>
+            <a:noFill/>
+          </a:ln>
+          <a:effectLst/>
+        </p:spPr>
+        <p:style>
+          <a:lnRef idx="1">
+            <a:schemeClr val="accent1"/>
+          </a:lnRef>
+          <a:fillRef idx="3">
+            <a:schemeClr val="accent1"/>
+          </a:fillRef>
+          <a:effectRef idx="2">
+            <a:schemeClr val="accent1"/>
+          </a:effectRef>
+          <a:fontRef idx="minor">
+            <a:schemeClr val="lt1"/>
+          </a:fontRef>
+        </p:style>
+        <p:txBody>
+          <a:bodyPr rtlCol="0" anchor="ctr"/>
+          <a:lstStyle/>
+          <a:p>
+            <a:pPr algn="ctr"/>
+          </a:p>
+        </p:txBody>
+      </p:sp>
+      <p:sp>
+        <p:nvSpPr>
+          <p:cNvPr id="12" name="TextBox 11"/>
+          <p:cNvSpPr txBox="1"/>
+          <p:nvPr/>
+        </p:nvSpPr>
+        <p:spPr>
+          <a:xfrm>
+            <a:off x="868680" y="5394960"/>
+            <a:ext cx="10454335" cy="731520"/>
+          </a:xfrm>
+          <a:prstGeom prst="rect">
+            <a:avLst/>
+          </a:prstGeom>
+          <a:noFill/>
+        </p:spPr>
+        <p:txBody>
+          <a:bodyPr wrap="square" anchor="ctr" lIns="45720" rIns="45720" tIns="0" bIns="0">
+            <a:spAutoFit/>
+          </a:bodyPr>
+          <a:lstStyle/>
+          <a:p>
+            <a:pPr algn="l">
+              <a:lnSpc>
+                <a:spcPct val="105000"/>
+              </a:lnSpc>
+              <a:spcBef>
+                <a:spcPts val="0"/>
+              </a:spcBef>
+              <a:spcAft>
+                <a:spcPts val="500"/>
+              </a:spcAft>
+            </a:pPr>
+            <a:r>
+              <a:rPr sz="1700" b="0" i="0">
+                <a:solidFill>
+                  <a:srgbClr val="FFFFFF"/>
+                </a:solidFill>
+                <a:latin typeface="Times New Roman"/>
+                <a:cs typeface="Times New Roman"/>
+              </a:rPr>
+              <a:t>An expert's SwiGLU activations are long-tailed — </a:t>
+            </a:r>
+            <a:r>
+              <a:rPr sz="1700" b="1" i="0">
+                <a:solidFill>
+                  <a:srgbClr val="E0A32E"/>
+                </a:solidFill>
+                <a:latin typeface="Times New Roman"/>
+                <a:cs typeface="Times New Roman"/>
+              </a:rPr>
+              <a:t>43% are ≈0</a:t>
+            </a:r>
+            <a:r>
+              <a:rPr sz="1700" b="0" i="0">
+                <a:solidFill>
+                  <a:srgbClr val="FFFFFF"/>
+                </a:solidFill>
+                <a:latin typeface="Times New Roman"/>
+                <a:cs typeface="Times New Roman"/>
+              </a:rPr>
+              <a:t>, and a thin large-magnitude tail dominates the output.</a:t>
+            </a:r>
+          </a:p>
+          <a:p>
+            <a:pPr algn="l">
+              <a:lnSpc>
+                <a:spcPct val="105000"/>
+              </a:lnSpc>
+              <a:spcBef>
+                <a:spcPts val="0"/>
+              </a:spcBef>
+              <a:spcAft>
+                <a:spcPts val="500"/>
+              </a:spcAft>
+            </a:pPr>
+            <a:r>
+              <a:rPr sz="1700" b="0" i="0">
+                <a:solidFill>
+                  <a:srgbClr val="FFFFFF"/>
+                </a:solidFill>
+                <a:latin typeface="Times New Roman"/>
+                <a:cs typeface="Times New Roman"/>
+              </a:rPr>
+              <a:t>Zeroing the smallest 80% of activations barely changes the result: most channels are idle for any given token.</a:t>
+            </a:r>
+          </a:p>
+        </p:txBody>
+      </p:sp>
+    </p:spTree>
+  </p:cSld>
+  <p:clrMapOvr>
+    <a:masterClrMapping/>
+  </p:clrMapOvr>
+</p:sld>
+</file>
+
+<file path=ppt/slides/slide4.xml><?xml version="1.0" encoding="utf-8"?>
+<p:sld xmlns:a="http://schemas.openxmlformats.org/drawingml/2006/main" xmlns:p="http://schemas.openxmlformats.org/presentationml/2006/main" xmlns:r="http://schemas.openxmlformats.org/officeDocument/2006/relationships">
+  <p:cSld>
+    <p:bg>
+      <p:bgPr>
+        <a:solidFill>
+          <a:srgbClr val="F4F6F9"/>
+        </a:solidFill>
+        <a:effectLst/>
+      </p:bgPr>
+    </p:bg>
+    <p:spTree>
+      <p:nvGrpSpPr>
+        <p:cNvPr id="1" name=""/>
+        <p:cNvGrpSpPr/>
+        <p:nvPr/>
+      </p:nvGrpSpPr>
+      <p:grpSpPr/>
+      <p:sp>
+        <p:nvSpPr>
+          <p:cNvPr id="2" name="Rectangle 1"/>
+          <p:cNvSpPr/>
+          <p:nvPr/>
+        </p:nvSpPr>
+        <p:spPr>
+          <a:xfrm>
+            <a:off x="548640" y="310896"/>
+            <a:ext cx="128016" cy="566928"/>
+          </a:xfrm>
+          <a:prstGeom prst="rect">
+            <a:avLst/>
+          </a:prstGeom>
+          <a:solidFill>
+            <a:srgbClr val="E0A32E"/>
+          </a:solidFill>
+          <a:ln>
+            <a:noFill/>
+          </a:ln>
+          <a:effectLst/>
+        </p:spPr>
+        <p:style>
+          <a:lnRef idx="1">
+            <a:schemeClr val="accent1"/>
+          </a:lnRef>
+          <a:fillRef idx="3">
+            <a:schemeClr val="accent1"/>
+          </a:fillRef>
+          <a:effectRef idx="2">
+            <a:schemeClr val="accent1"/>
+          </a:effectRef>
+          <a:fontRef idx="minor">
+            <a:schemeClr val="lt1"/>
+          </a:fontRef>
+        </p:style>
+        <p:txBody>
+          <a:bodyPr rtlCol="0" anchor="ctr"/>
+          <a:lstStyle/>
+          <a:p>
+            <a:pPr algn="ctr"/>
+          </a:p>
+        </p:txBody>
+      </p:sp>
+      <p:sp>
+        <p:nvSpPr>
+          <p:cNvPr id="3" name="TextBox 2"/>
+          <p:cNvSpPr txBox="1"/>
+          <p:nvPr/>
+        </p:nvSpPr>
+        <p:spPr>
+          <a:xfrm>
+            <a:off x="822959" y="201168"/>
+            <a:ext cx="10820095" cy="786384"/>
+          </a:xfrm>
+          <a:prstGeom prst="rect">
+            <a:avLst/>
+          </a:prstGeom>
+          <a:noFill/>
+        </p:spPr>
+        <p:txBody>
+          <a:bodyPr wrap="square" anchor="ctr" lIns="45720" rIns="45720" tIns="0" bIns="0">
+            <a:spAutoFit/>
+          </a:bodyPr>
+          <a:lstStyle/>
+          <a:p>
+            <a:pPr algn="l">
+              <a:lnSpc>
+                <a:spcPct val="100000"/>
+              </a:lnSpc>
+              <a:spcBef>
+                <a:spcPts val="0"/>
+              </a:spcBef>
+              <a:spcAft>
+                <a:spcPts val="600"/>
+              </a:spcAft>
+            </a:pPr>
+            <a:r>
+              <a:rPr sz="3000" b="1" i="0">
+                <a:solidFill>
+                  <a:srgbClr val="0E2A47"/>
+                </a:solidFill>
+                <a:latin typeface="Times New Roman"/>
+                <a:cs typeface="Times New Roman"/>
+              </a:rPr>
+              <a:t>…but the Subset is Token-Specific</a:t>
+            </a:r>
+          </a:p>
+        </p:txBody>
+      </p:sp>
+      <p:sp>
+        <p:nvSpPr>
+          <p:cNvPr id="4" name="TextBox 3"/>
+          <p:cNvSpPr txBox="1"/>
+          <p:nvPr/>
+        </p:nvSpPr>
+        <p:spPr>
+          <a:xfrm>
+            <a:off x="548640" y="1078992"/>
+            <a:ext cx="11094415" cy="457200"/>
+          </a:xfrm>
+          <a:prstGeom prst="rect">
+            <a:avLst/>
+          </a:prstGeom>
+          <a:noFill/>
+        </p:spPr>
+        <p:txBody>
+          <a:bodyPr wrap="square" anchor="t" lIns="45720" rIns="45720" tIns="0" bIns="0">
+            <a:spAutoFit/>
+          </a:bodyPr>
+          <a:lstStyle/>
+          <a:p>
+            <a:pPr algn="l">
+              <a:lnSpc>
+                <a:spcPct val="100000"/>
+              </a:lnSpc>
+              <a:spcBef>
+                <a:spcPts val="0"/>
+              </a:spcBef>
+              <a:spcAft>
+                <a:spcPts val="600"/>
+              </a:spcAft>
+            </a:pPr>
+            <a:r>
+              <a:rPr sz="2000" b="1" i="0">
+                <a:solidFill>
+                  <a:srgbClr val="1C7293"/>
+                </a:solidFill>
+                <a:latin typeface="Times New Roman"/>
+                <a:cs typeface="Times New Roman"/>
+              </a:rPr>
+              <a:t>Which channels matter is re-decided on every token</a:t>
+            </a:r>
+          </a:p>
+        </p:txBody>
+      </p:sp>
+      <p:pic>
+        <p:nvPicPr>
+          <p:cNvPr id="5" name="Picture 4" descr="amazon_logo.png"/>
+          <p:cNvPicPr>
+            <a:picLocks noChangeAspect="1"/>
+          </p:cNvPicPr>
+          <p:nvPr/>
+        </p:nvPicPr>
+        <p:blipFill>
+          <a:blip r:embed="rId2"/>
+          <a:stretch>
+            <a:fillRect/>
+          </a:stretch>
+        </p:blipFill>
+        <p:spPr>
+          <a:xfrm>
+            <a:off x="192024" y="6309360"/>
+            <a:ext cx="1463040" cy="440740"/>
+          </a:xfrm>
+          <a:prstGeom prst="rect">
+            <a:avLst/>
+          </a:prstGeom>
+        </p:spPr>
+      </p:pic>
+      <p:sp>
+        <p:nvSpPr>
+          <p:cNvPr id="6" name="Rectangle 5"/>
+          <p:cNvSpPr/>
+          <p:nvPr/>
+        </p:nvSpPr>
+        <p:spPr>
+          <a:xfrm>
+            <a:off x="11140135" y="6400800"/>
+            <a:ext cx="109728" cy="237744"/>
+          </a:xfrm>
+          <a:prstGeom prst="rect">
+            <a:avLst/>
+          </a:prstGeom>
+          <a:solidFill>
+            <a:srgbClr val="E0A32E"/>
+          </a:solidFill>
+          <a:ln>
+            <a:noFill/>
+          </a:ln>
+          <a:effectLst/>
+        </p:spPr>
+        <p:style>
+          <a:lnRef idx="1">
+            <a:schemeClr val="accent1"/>
+          </a:lnRef>
+          <a:fillRef idx="3">
+            <a:schemeClr val="accent1"/>
+          </a:fillRef>
+          <a:effectRef idx="2">
+            <a:schemeClr val="accent1"/>
+          </a:effectRef>
+          <a:fontRef idx="minor">
+            <a:schemeClr val="lt1"/>
+          </a:fontRef>
+        </p:style>
+        <p:txBody>
+          <a:bodyPr rtlCol="0" anchor="ctr"/>
+          <a:lstStyle/>
+          <a:p>
+            <a:pPr algn="ctr"/>
+          </a:p>
+        </p:txBody>
+      </p:sp>
+      <p:sp>
+        <p:nvSpPr>
+          <p:cNvPr id="7" name="TextBox 6"/>
+          <p:cNvSpPr txBox="1"/>
+          <p:nvPr/>
+        </p:nvSpPr>
+        <p:spPr>
+          <a:xfrm>
+            <a:off x="11323015" y="6364224"/>
+            <a:ext cx="685800" cy="320040"/>
+          </a:xfrm>
+          <a:prstGeom prst="rect">
+            <a:avLst/>
+          </a:prstGeom>
+          <a:noFill/>
+        </p:spPr>
+        <p:txBody>
+          <a:bodyPr wrap="square" anchor="ctr" lIns="45720" rIns="45720" tIns="0" bIns="0">
+            <a:spAutoFit/>
+          </a:bodyPr>
+          <a:lstStyle/>
+          <a:p>
+            <a:pPr algn="l">
+              <a:lnSpc>
+                <a:spcPct val="100000"/>
+              </a:lnSpc>
+              <a:spcBef>
+                <a:spcPts val="0"/>
+              </a:spcBef>
+              <a:spcAft>
+                <a:spcPts val="600"/>
+              </a:spcAft>
+            </a:pPr>
+            <a:r>
+              <a:rPr sz="1200" b="1" i="0">
+                <a:solidFill>
+                  <a:srgbClr val="5C6B7A"/>
+                </a:solidFill>
+                <a:latin typeface="Times New Roman"/>
+                <a:cs typeface="Times New Roman"/>
+              </a:rPr>
+              <a:t>4</a:t>
+            </a:r>
+          </a:p>
+        </p:txBody>
+      </p:sp>
+      <p:sp>
+        <p:nvSpPr>
+          <p:cNvPr id="8" name="TextBox 7"/>
+          <p:cNvSpPr txBox="1"/>
+          <p:nvPr/>
+        </p:nvSpPr>
+        <p:spPr>
+          <a:xfrm>
+            <a:off x="1828800" y="6382512"/>
+            <a:ext cx="8229600" cy="320040"/>
+          </a:xfrm>
+          <a:prstGeom prst="rect">
+            <a:avLst/>
+          </a:prstGeom>
+          <a:noFill/>
+        </p:spPr>
+        <p:txBody>
+          <a:bodyPr wrap="square" anchor="ctr" lIns="45720" rIns="45720" tIns="0" bIns="0">
+            <a:spAutoFit/>
+          </a:bodyPr>
+          <a:lstStyle/>
+          <a:p>
+            <a:pPr algn="l">
+              <a:lnSpc>
+                <a:spcPct val="100000"/>
+              </a:lnSpc>
+              <a:spcBef>
+                <a:spcPts val="0"/>
+              </a:spcBef>
+              <a:spcAft>
+                <a:spcPts val="600"/>
+              </a:spcAft>
+            </a:pPr>
+            <a:r>
+              <a:rPr sz="1100" b="0" i="1">
+                <a:solidFill>
+                  <a:srgbClr val="5C6B7A"/>
+                </a:solidFill>
+                <a:latin typeface="Times New Roman"/>
+                <a:cs typeface="Times New Roman"/>
+              </a:rPr>
+              <a:t>Per-Token Adaptive Channel Activation for MoE</a:t>
+            </a:r>
+          </a:p>
+        </p:txBody>
+      </p:sp>
+      <p:pic>
+        <p:nvPicPr>
+          <p:cNvPr id="9" name="Picture 8" descr="fig_token_specific.png"/>
+          <p:cNvPicPr>
+            <a:picLocks noChangeAspect="1"/>
+          </p:cNvPicPr>
+          <p:nvPr/>
+        </p:nvPicPr>
+        <p:blipFill>
+          <a:blip r:embed="rId3"/>
+          <a:stretch>
+            <a:fillRect/>
+          </a:stretch>
+        </p:blipFill>
+        <p:spPr>
+          <a:xfrm>
+            <a:off x="4069422" y="1755648"/>
+            <a:ext cx="4052850" cy="3383280"/>
+          </a:xfrm>
+          <a:prstGeom prst="rect">
+            <a:avLst/>
+          </a:prstGeom>
+        </p:spPr>
+      </p:pic>
+      <p:sp>
+        <p:nvSpPr>
+          <p:cNvPr id="10" name="Rectangle 9"/>
+          <p:cNvSpPr/>
+          <p:nvPr/>
+        </p:nvSpPr>
+        <p:spPr>
+          <a:xfrm>
+            <a:off x="548640" y="5303520"/>
+            <a:ext cx="11094415" cy="896112"/>
+          </a:xfrm>
+          <a:prstGeom prst="rect">
+            <a:avLst/>
+          </a:prstGeom>
+          <a:solidFill>
+            <a:srgbClr val="0E2A47"/>
+          </a:solidFill>
+          <a:ln>
+            <a:noFill/>
+          </a:ln>
+          <a:effectLst/>
+        </p:spPr>
+        <p:style>
+          <a:lnRef idx="1">
+            <a:schemeClr val="accent1"/>
+          </a:lnRef>
+          <a:fillRef idx="3">
+            <a:schemeClr val="accent1"/>
+          </a:fillRef>
+          <a:effectRef idx="2">
+            <a:schemeClr val="accent1"/>
+          </a:effectRef>
+          <a:fontRef idx="minor">
+            <a:schemeClr val="lt1"/>
+          </a:fontRef>
+        </p:style>
+        <p:txBody>
+          <a:bodyPr rtlCol="0" anchor="ctr"/>
+          <a:lstStyle/>
+          <a:p>
+            <a:pPr algn="ctr"/>
+          </a:p>
+        </p:txBody>
+      </p:sp>
+      <p:sp>
+        <p:nvSpPr>
+          <p:cNvPr id="11" name="Rectangle 10"/>
+          <p:cNvSpPr/>
+          <p:nvPr/>
+        </p:nvSpPr>
+        <p:spPr>
+          <a:xfrm>
+            <a:off x="548640" y="5303520"/>
+            <a:ext cx="128016" cy="896112"/>
+          </a:xfrm>
+          <a:prstGeom prst="rect">
+            <a:avLst/>
+          </a:prstGeom>
+          <a:solidFill>
+            <a:srgbClr val="E0A32E"/>
+          </a:solidFill>
+          <a:ln>
+            <a:noFill/>
+          </a:ln>
+          <a:effectLst/>
+        </p:spPr>
+        <p:style>
+          <a:lnRef idx="1">
+            <a:schemeClr val="accent1"/>
+          </a:lnRef>
+          <a:fillRef idx="3">
+            <a:schemeClr val="accent1"/>
+          </a:fillRef>
+          <a:effectRef idx="2">
+            <a:schemeClr val="accent1"/>
+          </a:effectRef>
+          <a:fontRef idx="minor">
+            <a:schemeClr val="lt1"/>
+          </a:fontRef>
+        </p:style>
+        <p:txBody>
+          <a:bodyPr rtlCol="0" anchor="ctr"/>
+          <a:lstStyle/>
+          <a:p>
+            <a:pPr algn="ctr"/>
+          </a:p>
+        </p:txBody>
+      </p:sp>
+      <p:sp>
+        <p:nvSpPr>
+          <p:cNvPr id="12" name="TextBox 11"/>
+          <p:cNvSpPr txBox="1"/>
+          <p:nvPr/>
+        </p:nvSpPr>
+        <p:spPr>
+          <a:xfrm>
+            <a:off x="868680" y="5394960"/>
+            <a:ext cx="10454335" cy="731520"/>
+          </a:xfrm>
+          <a:prstGeom prst="rect">
+            <a:avLst/>
+          </a:prstGeom>
+          <a:noFill/>
+        </p:spPr>
+        <p:txBody>
+          <a:bodyPr wrap="square" anchor="ctr" lIns="45720" rIns="45720" tIns="0" bIns="0">
+            <a:spAutoFit/>
+          </a:bodyPr>
+          <a:lstStyle/>
+          <a:p>
+            <a:pPr algn="l">
+              <a:lnSpc>
+                <a:spcPct val="105000"/>
+              </a:lnSpc>
+              <a:spcBef>
+                <a:spcPts val="0"/>
+              </a:spcBef>
+              <a:spcAft>
+                <a:spcPts val="500"/>
+              </a:spcAft>
+            </a:pPr>
+            <a:r>
+              <a:rPr sz="1700" b="0" i="0">
+                <a:solidFill>
+                  <a:srgbClr val="FFFFFF"/>
+                </a:solidFill>
+                <a:latin typeface="Times New Roman"/>
+                <a:cs typeface="Times New Roman"/>
+              </a:rPr>
+              <a:t>Consecutive tokens routed to the same expert share only </a:t>
+            </a:r>
+            <a:r>
+              <a:rPr sz="1700" b="1" i="0">
+                <a:solidFill>
+                  <a:srgbClr val="E0A32E"/>
+                </a:solidFill>
+                <a:latin typeface="Times New Roman"/>
+                <a:cs typeface="Times New Roman"/>
+              </a:rPr>
+              <a:t>33% of their kept channels</a:t>
+            </a:r>
+            <a:r>
+              <a:rPr sz="1700" b="0" i="0">
+                <a:solidFill>
+                  <a:srgbClr val="FFFFFF"/>
+                </a:solidFill>
+                <a:latin typeface="Times New Roman"/>
+                <a:cs typeface="Times New Roman"/>
+              </a:rPr>
+              <a:t> — barely above the 25% random baseline.</a:t>
+            </a:r>
+          </a:p>
+          <a:p>
+            <a:pPr algn="l">
+              <a:lnSpc>
+                <a:spcPct val="105000"/>
+              </a:lnSpc>
+              <a:spcBef>
+                <a:spcPts val="0"/>
+              </a:spcBef>
+              <a:spcAft>
+                <a:spcPts val="500"/>
+              </a:spcAft>
+            </a:pPr>
+            <a:r>
+              <a:rPr sz="1700" b="0" i="0">
+                <a:solidFill>
+                  <a:srgbClr val="FFFFFF"/>
+                </a:solidFill>
+                <a:latin typeface="Times New Roman"/>
+                <a:cs typeface="Times New Roman"/>
+              </a:rPr>
+              <a:t>No fixed keep-set works, and even reusing the previous token's mask fails: the choice must be made per token.</a:t>
+            </a:r>
+          </a:p>
+        </p:txBody>
+      </p:sp>
+    </p:spTree>
+  </p:cSld>
+  <p:clrMapOvr>
+    <a:masterClrMapping/>
+  </p:clrMapOvr>
+</p:sld>
+</file>
+
+<file path=ppt/slides/slide5.xml><?xml version="1.0" encoding="utf-8"?>
+<p:sld xmlns:a="http://schemas.openxmlformats.org/drawingml/2006/main" xmlns:p="http://schemas.openxmlformats.org/presentationml/2006/main" xmlns:r="http://schemas.openxmlformats.org/officeDocument/2006/relationships">
+  <p:cSld>
+    <p:bg>
+      <p:bgPr>
+        <a:solidFill>
+          <a:srgbClr val="F4F6F9"/>
+        </a:solidFill>
+        <a:effectLst/>
+      </p:bgPr>
+    </p:bg>
+    <p:spTree>
+      <p:nvGrpSpPr>
+        <p:cNvPr id="1" name=""/>
+        <p:cNvGrpSpPr/>
+        <p:nvPr/>
+      </p:nvGrpSpPr>
+      <p:grpSpPr/>
+      <p:sp>
+        <p:nvSpPr>
+          <p:cNvPr id="2" name="Rectangle 1"/>
+          <p:cNvSpPr/>
+          <p:nvPr/>
+        </p:nvSpPr>
+        <p:spPr>
+          <a:xfrm>
+            <a:off x="548640" y="310896"/>
+            <a:ext cx="128016" cy="566928"/>
+          </a:xfrm>
+          <a:prstGeom prst="rect">
+            <a:avLst/>
+          </a:prstGeom>
+          <a:solidFill>
+            <a:srgbClr val="E0A32E"/>
+          </a:solidFill>
+          <a:ln>
+            <a:noFill/>
+          </a:ln>
+          <a:effectLst/>
+        </p:spPr>
+        <p:style>
+          <a:lnRef idx="1">
+            <a:schemeClr val="accent1"/>
+          </a:lnRef>
+          <a:fillRef idx="3">
+            <a:schemeClr val="accent1"/>
+          </a:fillRef>
+          <a:effectRef idx="2">
+            <a:schemeClr val="accent1"/>
+          </a:effectRef>
+          <a:fontRef idx="minor">
+            <a:schemeClr val="lt1"/>
+          </a:fontRef>
+        </p:style>
+        <p:txBody>
+          <a:bodyPr rtlCol="0" anchor="ctr"/>
+          <a:lstStyle/>
+          <a:p>
+            <a:pPr algn="ctr"/>
+          </a:p>
+        </p:txBody>
+      </p:sp>
+      <p:sp>
+        <p:nvSpPr>
+          <p:cNvPr id="3" name="TextBox 2"/>
+          <p:cNvSpPr txBox="1"/>
+          <p:nvPr/>
+        </p:nvSpPr>
+        <p:spPr>
+          <a:xfrm>
+            <a:off x="822959" y="201168"/>
+            <a:ext cx="10820095" cy="786384"/>
+          </a:xfrm>
+          <a:prstGeom prst="rect">
+            <a:avLst/>
+          </a:prstGeom>
+          <a:noFill/>
+        </p:spPr>
+        <p:txBody>
+          <a:bodyPr wrap="square" anchor="ctr" lIns="45720" rIns="45720" tIns="0" bIns="0">
+            <a:spAutoFit/>
+          </a:bodyPr>
+          <a:lstStyle/>
+          <a:p>
+            <a:pPr algn="l">
+              <a:lnSpc>
+                <a:spcPct val="100000"/>
+              </a:lnSpc>
+              <a:spcBef>
+                <a:spcPts val="0"/>
+              </a:spcBef>
+              <a:spcAft>
+                <a:spcPts val="600"/>
+              </a:spcAft>
+            </a:pPr>
+            <a:r>
+              <a:rPr sz="3000" b="1" i="0">
+                <a:solidFill>
+                  <a:srgbClr val="0E2A47"/>
+                </a:solidFill>
+                <a:latin typeface="Times New Roman"/>
+                <a:cs typeface="Times New Roman"/>
+              </a:rPr>
+              <a:t>Acting on It Holds Near-Dense Accuracy</a:t>
+            </a:r>
+          </a:p>
+        </p:txBody>
+      </p:sp>
+      <p:sp>
+        <p:nvSpPr>
+          <p:cNvPr id="4" name="TextBox 3"/>
+          <p:cNvSpPr txBox="1"/>
+          <p:nvPr/>
+        </p:nvSpPr>
+        <p:spPr>
+          <a:xfrm>
+            <a:off x="548640" y="1078992"/>
+            <a:ext cx="11094415" cy="457200"/>
+          </a:xfrm>
+          <a:prstGeom prst="rect">
+            <a:avLst/>
+          </a:prstGeom>
+          <a:noFill/>
+        </p:spPr>
+        <p:txBody>
+          <a:bodyPr wrap="square" anchor="t" lIns="45720" rIns="45720" tIns="0" bIns="0">
+            <a:spAutoFit/>
+          </a:bodyPr>
+          <a:lstStyle/>
+          <a:p>
+            <a:pPr algn="l">
+              <a:lnSpc>
+                <a:spcPct val="100000"/>
+              </a:lnSpc>
+              <a:spcBef>
+                <a:spcPts val="0"/>
+              </a:spcBef>
+              <a:spcAft>
+                <a:spcPts val="600"/>
+              </a:spcAft>
+            </a:pPr>
+            <a:r>
+              <a:rPr sz="2000" b="1" i="0">
+                <a:solidFill>
+                  <a:srgbClr val="1C7293"/>
+                </a:solidFill>
+                <a:latin typeface="Times New Roman"/>
+                <a:cs typeface="Times New Roman"/>
+              </a:rPr>
+              <a:t>Per-token channel selection on the full dense Qwen3-30B-A3B — no fine-tuning</a:t>
+            </a:r>
+          </a:p>
+        </p:txBody>
+      </p:sp>
+      <p:pic>
+        <p:nvPicPr>
+          <p:cNvPr id="5" name="Picture 4" descr="amazon_logo.png"/>
+          <p:cNvPicPr>
+            <a:picLocks noChangeAspect="1"/>
+          </p:cNvPicPr>
+          <p:nvPr/>
+        </p:nvPicPr>
+        <p:blipFill>
+          <a:blip r:embed="rId2"/>
+          <a:stretch>
+            <a:fillRect/>
+          </a:stretch>
+        </p:blipFill>
+        <p:spPr>
+          <a:xfrm>
+            <a:off x="192024" y="6309360"/>
+            <a:ext cx="1463040" cy="440740"/>
+          </a:xfrm>
+          <a:prstGeom prst="rect">
+            <a:avLst/>
+          </a:prstGeom>
+        </p:spPr>
+      </p:pic>
+      <p:sp>
+        <p:nvSpPr>
+          <p:cNvPr id="6" name="Rectangle 5"/>
+          <p:cNvSpPr/>
+          <p:nvPr/>
+        </p:nvSpPr>
+        <p:spPr>
+          <a:xfrm>
+            <a:off x="11140135" y="6400800"/>
+            <a:ext cx="109728" cy="237744"/>
+          </a:xfrm>
+          <a:prstGeom prst="rect">
+            <a:avLst/>
+          </a:prstGeom>
+          <a:solidFill>
+            <a:srgbClr val="E0A32E"/>
+          </a:solidFill>
+          <a:ln>
+            <a:noFill/>
+          </a:ln>
+          <a:effectLst/>
+        </p:spPr>
+        <p:style>
+          <a:lnRef idx="1">
+            <a:schemeClr val="accent1"/>
+          </a:lnRef>
+          <a:fillRef idx="3">
+            <a:schemeClr val="accent1"/>
+          </a:fillRef>
+          <a:effectRef idx="2">
+            <a:schemeClr val="accent1"/>
+          </a:effectRef>
+          <a:fontRef idx="minor">
+            <a:schemeClr val="lt1"/>
+          </a:fontRef>
+        </p:style>
+        <p:txBody>
+          <a:bodyPr rtlCol="0" anchor="ctr"/>
+          <a:lstStyle/>
+          <a:p>
+            <a:pPr algn="ctr"/>
+          </a:p>
+        </p:txBody>
+      </p:sp>
+      <p:sp>
+        <p:nvSpPr>
+          <p:cNvPr id="7" name="TextBox 6"/>
+          <p:cNvSpPr txBox="1"/>
+          <p:nvPr/>
+        </p:nvSpPr>
+        <p:spPr>
+          <a:xfrm>
+            <a:off x="11323015" y="6364224"/>
+            <a:ext cx="685800" cy="320040"/>
+          </a:xfrm>
+          <a:prstGeom prst="rect">
+            <a:avLst/>
+          </a:prstGeom>
+          <a:noFill/>
+        </p:spPr>
+        <p:txBody>
+          <a:bodyPr wrap="square" anchor="ctr" lIns="45720" rIns="45720" tIns="0" bIns="0">
+            <a:spAutoFit/>
+          </a:bodyPr>
+          <a:lstStyle/>
+          <a:p>
+            <a:pPr algn="l">
+              <a:lnSpc>
+                <a:spcPct val="100000"/>
+              </a:lnSpc>
+              <a:spcBef>
+                <a:spcPts val="0"/>
+              </a:spcBef>
+              <a:spcAft>
+                <a:spcPts val="600"/>
+              </a:spcAft>
+            </a:pPr>
+            <a:r>
+              <a:rPr sz="1200" b="1" i="0">
+                <a:solidFill>
+                  <a:srgbClr val="5C6B7A"/>
+                </a:solidFill>
+                <a:latin typeface="Times New Roman"/>
+                <a:cs typeface="Times New Roman"/>
+              </a:rPr>
+              <a:t>5</a:t>
+            </a:r>
+          </a:p>
+        </p:txBody>
+      </p:sp>
+      <p:sp>
+        <p:nvSpPr>
+          <p:cNvPr id="8" name="TextBox 7"/>
+          <p:cNvSpPr txBox="1"/>
+          <p:nvPr/>
+        </p:nvSpPr>
+        <p:spPr>
+          <a:xfrm>
+            <a:off x="1828800" y="6382512"/>
+            <a:ext cx="8229600" cy="320040"/>
+          </a:xfrm>
+          <a:prstGeom prst="rect">
+            <a:avLst/>
+          </a:prstGeom>
+          <a:noFill/>
+        </p:spPr>
+        <p:txBody>
+          <a:bodyPr wrap="square" anchor="ctr" lIns="45720" rIns="45720" tIns="0" bIns="0">
+            <a:spAutoFit/>
+          </a:bodyPr>
+          <a:lstStyle/>
+          <a:p>
+            <a:pPr algn="l">
+              <a:lnSpc>
+                <a:spcPct val="100000"/>
+              </a:lnSpc>
+              <a:spcBef>
+                <a:spcPts val="0"/>
+              </a:spcBef>
+              <a:spcAft>
+                <a:spcPts val="600"/>
+              </a:spcAft>
+            </a:pPr>
+            <a:r>
+              <a:rPr sz="1100" b="0" i="1">
+                <a:solidFill>
+                  <a:srgbClr val="5C6B7A"/>
+                </a:solidFill>
+                <a:latin typeface="Times New Roman"/>
+                <a:cs typeface="Times New Roman"/>
+              </a:rPr>
+              <a:t>Per-Token Adaptive Channel Activation for MoE</a:t>
+            </a:r>
+          </a:p>
+        </p:txBody>
+      </p:sp>
+      <p:pic>
+        <p:nvPicPr>
+          <p:cNvPr id="9" name="Picture 8" descr="fig_prune_sweep_mmlu.png"/>
+          <p:cNvPicPr>
+            <a:picLocks noChangeAspect="1"/>
+          </p:cNvPicPr>
+          <p:nvPr/>
+        </p:nvPicPr>
+        <p:blipFill>
+          <a:blip r:embed="rId3"/>
+          <a:stretch>
+            <a:fillRect/>
+          </a:stretch>
+        </p:blipFill>
+        <p:spPr>
+          <a:xfrm>
+            <a:off x="1893515" y="1792224"/>
+            <a:ext cx="3996592" cy="2880360"/>
+          </a:xfrm>
+          <a:prstGeom prst="rect">
+            <a:avLst/>
+          </a:prstGeom>
+        </p:spPr>
+      </p:pic>
+      <p:pic>
+        <p:nvPicPr>
+          <p:cNvPr id="10" name="Picture 9" descr="fig_prune_sweep_hellaswag.png"/>
+          <p:cNvPicPr>
+            <a:picLocks noChangeAspect="1"/>
+          </p:cNvPicPr>
+          <p:nvPr/>
+        </p:nvPicPr>
+        <p:blipFill>
+          <a:blip r:embed="rId4"/>
+          <a:stretch>
+            <a:fillRect/>
+          </a:stretch>
+        </p:blipFill>
+        <p:spPr>
+          <a:xfrm>
+            <a:off x="6301587" y="1792224"/>
+            <a:ext cx="3996592" cy="2880360"/>
+          </a:xfrm>
+          <a:prstGeom prst="rect">
+            <a:avLst/>
+          </a:prstGeom>
+        </p:spPr>
+      </p:pic>
+      <p:sp>
+        <p:nvSpPr>
+          <p:cNvPr id="11" name="Rectangle 10"/>
+          <p:cNvSpPr/>
+          <p:nvPr/>
+        </p:nvSpPr>
+        <p:spPr>
+          <a:xfrm>
+            <a:off x="548640" y="5303520"/>
+            <a:ext cx="11094415" cy="896112"/>
+          </a:xfrm>
+          <a:prstGeom prst="rect">
+            <a:avLst/>
+          </a:prstGeom>
+          <a:solidFill>
+            <a:srgbClr val="0E2A47"/>
+          </a:solidFill>
+          <a:ln>
+            <a:noFill/>
+          </a:ln>
+          <a:effectLst/>
+        </p:spPr>
+        <p:style>
+          <a:lnRef idx="1">
+            <a:schemeClr val="accent1"/>
+          </a:lnRef>
+          <a:fillRef idx="3">
+            <a:schemeClr val="accent1"/>
+          </a:fillRef>
+          <a:effectRef idx="2">
+            <a:schemeClr val="accent1"/>
+          </a:effectRef>
+          <a:fontRef idx="minor">
+            <a:schemeClr val="lt1"/>
+          </a:fontRef>
+        </p:style>
+        <p:txBody>
+          <a:bodyPr rtlCol="0" anchor="ctr"/>
+          <a:lstStyle/>
+          <a:p>
+            <a:pPr algn="ctr"/>
+          </a:p>
+        </p:txBody>
+      </p:sp>
+      <p:sp>
+        <p:nvSpPr>
+          <p:cNvPr id="12" name="Rectangle 11"/>
+          <p:cNvSpPr/>
+          <p:nvPr/>
+        </p:nvSpPr>
+        <p:spPr>
+          <a:xfrm>
+            <a:off x="548640" y="5303520"/>
+            <a:ext cx="128016" cy="896112"/>
+          </a:xfrm>
+          <a:prstGeom prst="rect">
+            <a:avLst/>
+          </a:prstGeom>
+          <a:solidFill>
+            <a:srgbClr val="E0A32E"/>
+          </a:solidFill>
+          <a:ln>
+            <a:noFill/>
+          </a:ln>
+          <a:effectLst/>
+        </p:spPr>
+        <p:style>
+          <a:lnRef idx="1">
+            <a:schemeClr val="accent1"/>
+          </a:lnRef>
+          <a:fillRef idx="3">
+            <a:schemeClr val="accent1"/>
+          </a:fillRef>
+          <a:effectRef idx="2">
+            <a:schemeClr val="accent1"/>
+          </a:effectRef>
+          <a:fontRef idx="minor">
+            <a:schemeClr val="lt1"/>
+          </a:fontRef>
+        </p:style>
+        <p:txBody>
+          <a:bodyPr rtlCol="0" anchor="ctr"/>
+          <a:lstStyle/>
+          <a:p>
+            <a:pPr algn="ctr"/>
+          </a:p>
+        </p:txBody>
+      </p:sp>
+      <p:sp>
+        <p:nvSpPr>
+          <p:cNvPr id="13" name="TextBox 12"/>
+          <p:cNvSpPr txBox="1"/>
+          <p:nvPr/>
+        </p:nvSpPr>
+        <p:spPr>
+          <a:xfrm>
+            <a:off x="868680" y="5394960"/>
+            <a:ext cx="10454335" cy="731520"/>
+          </a:xfrm>
+          <a:prstGeom prst="rect">
+            <a:avLst/>
+          </a:prstGeom>
+          <a:noFill/>
+        </p:spPr>
+        <p:txBody>
+          <a:bodyPr wrap="square" anchor="ctr" lIns="45720" rIns="45720" tIns="0" bIns="0">
+            <a:spAutoFit/>
+          </a:bodyPr>
+          <a:lstStyle/>
+          <a:p>
+            <a:pPr algn="l">
+              <a:lnSpc>
+                <a:spcPct val="105000"/>
+              </a:lnSpc>
+              <a:spcBef>
+                <a:spcPts val="0"/>
+              </a:spcBef>
+              <a:spcAft>
+                <a:spcPts val="500"/>
+              </a:spcAft>
+            </a:pPr>
+            <a:r>
+              <a:rPr sz="1700" b="0" i="0">
+                <a:solidFill>
+                  <a:srgbClr val="FFFFFF"/>
+                </a:solidFill>
+                <a:latin typeface="Times New Roman"/>
+                <a:cs typeface="Times New Roman"/>
+              </a:rPr>
+              <a:t>Per-token selection stays within noise of dense out to a </a:t>
+            </a:r>
+            <a:r>
+              <a:rPr sz="1700" b="1" i="0">
+                <a:solidFill>
+                  <a:srgbClr val="E0A32E"/>
+                </a:solidFill>
+                <a:latin typeface="Times New Roman"/>
+                <a:cs typeface="Times New Roman"/>
+              </a:rPr>
+              <a:t>70% cut</a:t>
+            </a:r>
+            <a:r>
+              <a:rPr sz="1700" b="0" i="0">
+                <a:solidFill>
+                  <a:srgbClr val="FFFFFF"/>
+                </a:solidFill>
+                <a:latin typeface="Times New Roman"/>
+                <a:cs typeface="Times New Roman"/>
+              </a:rPr>
+              <a:t> of the active intermediate dimension, on both MMLU and HellaSwag.</a:t>
+            </a:r>
+          </a:p>
+          <a:p>
+            <a:pPr algn="l">
+              <a:lnSpc>
+                <a:spcPct val="105000"/>
+              </a:lnSpc>
+              <a:spcBef>
+                <a:spcPts val="0"/>
+              </a:spcBef>
+              <a:spcAft>
+                <a:spcPts val="500"/>
+              </a:spcAft>
+            </a:pPr>
+            <a:r>
+              <a:rPr sz="1700" b="0" i="0">
+                <a:solidFill>
+                  <a:srgbClr val="FFFFFF"/>
+                </a:solidFill>
+                <a:latin typeface="Times New Roman"/>
+                <a:cs typeface="Times New Roman"/>
+              </a:rPr>
+              <a:t>Accuracy bends only past 80% — a large active-parameter cut, essentially for free.</a:t>
+            </a:r>
+          </a:p>
+        </p:txBody>
+      </p:sp>
+    </p:spTree>
+  </p:cSld>
+  <p:clrMapOvr>
+    <a:masterClrMapping/>
+  </p:clrMapOvr>
+</p:sld>
+</file>
+
+<file path=ppt/slides/slide6.xml><?xml version="1.0" encoding="utf-8"?>
+<p:sld xmlns:a="http://schemas.openxmlformats.org/drawingml/2006/main" xmlns:p="http://schemas.openxmlformats.org/presentationml/2006/main" xmlns:r="http://schemas.openxmlformats.org/officeDocument/2006/relationships">
+  <p:cSld>
+    <p:bg>
+      <p:bgPr>
+        <a:solidFill>
+          <a:srgbClr val="F4F6F9"/>
+        </a:solidFill>
+        <a:effectLst/>
+      </p:bgPr>
+    </p:bg>
+    <p:spTree>
+      <p:nvGrpSpPr>
+        <p:cNvPr id="1" name=""/>
+        <p:cNvGrpSpPr/>
+        <p:nvPr/>
+      </p:nvGrpSpPr>
+      <p:grpSpPr/>
+      <p:sp>
+        <p:nvSpPr>
+          <p:cNvPr id="2" name="Rectangle 1"/>
+          <p:cNvSpPr/>
+          <p:nvPr/>
+        </p:nvSpPr>
+        <p:spPr>
+          <a:xfrm>
+            <a:off x="548640" y="310896"/>
+            <a:ext cx="128016" cy="566928"/>
+          </a:xfrm>
+          <a:prstGeom prst="rect">
+            <a:avLst/>
+          </a:prstGeom>
+          <a:solidFill>
+            <a:srgbClr val="E0A32E"/>
+          </a:solidFill>
+          <a:ln>
+            <a:noFill/>
+          </a:ln>
+          <a:effectLst/>
+        </p:spPr>
+        <p:style>
+          <a:lnRef idx="1">
+            <a:schemeClr val="accent1"/>
+          </a:lnRef>
+          <a:fillRef idx="3">
+            <a:schemeClr val="accent1"/>
+          </a:fillRef>
+          <a:effectRef idx="2">
+            <a:schemeClr val="accent1"/>
+          </a:effectRef>
+          <a:fontRef idx="minor">
+            <a:schemeClr val="lt1"/>
+          </a:fontRef>
+        </p:style>
+        <p:txBody>
+          <a:bodyPr rtlCol="0" anchor="ctr"/>
+          <a:lstStyle/>
+          <a:p>
+            <a:pPr algn="ctr"/>
+          </a:p>
+        </p:txBody>
+      </p:sp>
+      <p:sp>
+        <p:nvSpPr>
+          <p:cNvPr id="3" name="TextBox 2"/>
+          <p:cNvSpPr txBox="1"/>
+          <p:nvPr/>
+        </p:nvSpPr>
+        <p:spPr>
+          <a:xfrm>
+            <a:off x="822959" y="201168"/>
+            <a:ext cx="10820095" cy="786384"/>
+          </a:xfrm>
+          <a:prstGeom prst="rect">
+            <a:avLst/>
+          </a:prstGeom>
+          <a:noFill/>
+        </p:spPr>
+        <p:txBody>
+          <a:bodyPr wrap="square" anchor="ctr" lIns="45720" rIns="45720" tIns="0" bIns="0">
+            <a:spAutoFit/>
+          </a:bodyPr>
+          <a:lstStyle/>
+          <a:p>
+            <a:pPr algn="l">
+              <a:lnSpc>
+                <a:spcPct val="100000"/>
+              </a:lnSpc>
+              <a:spcBef>
+                <a:spcPts val="0"/>
+              </a:spcBef>
+              <a:spcAft>
+                <a:spcPts val="600"/>
+              </a:spcAft>
+            </a:pPr>
+            <a:r>
+              <a:rPr sz="3000" b="1" i="0">
+                <a:solidFill>
+                  <a:srgbClr val="0E2A47"/>
+                </a:solidFill>
+                <a:latin typeface="Times New Roman"/>
+                <a:cs typeface="Times New Roman"/>
+              </a:rPr>
+              <a:t>Online Selection Beats Offline, Decisively</a:t>
+            </a:r>
+          </a:p>
+        </p:txBody>
+      </p:sp>
+      <p:sp>
+        <p:nvSpPr>
+          <p:cNvPr id="4" name="TextBox 3"/>
+          <p:cNvSpPr txBox="1"/>
+          <p:nvPr/>
+        </p:nvSpPr>
+        <p:spPr>
+          <a:xfrm>
+            <a:off x="548640" y="1078992"/>
+            <a:ext cx="11094415" cy="457200"/>
+          </a:xfrm>
+          <a:prstGeom prst="rect">
+            <a:avLst/>
+          </a:prstGeom>
+          <a:noFill/>
+        </p:spPr>
+        <p:txBody>
+          <a:bodyPr wrap="square" anchor="t" lIns="45720" rIns="45720" tIns="0" bIns="0">
+            <a:spAutoFit/>
+          </a:bodyPr>
+          <a:lstStyle/>
+          <a:p>
+            <a:pPr algn="l">
+              <a:lnSpc>
+                <a:spcPct val="100000"/>
+              </a:lnSpc>
+              <a:spcBef>
+                <a:spcPts val="0"/>
+              </a:spcBef>
+              <a:spcAft>
+                <a:spcPts val="600"/>
+              </a:spcAft>
+            </a:pPr>
+            <a:r>
+              <a:rPr sz="2000" b="1" i="0">
+                <a:solidFill>
+                  <a:srgbClr val="1C7293"/>
+                </a:solidFill>
+                <a:latin typeface="Times New Roman"/>
+                <a:cs typeface="Times New Roman"/>
+              </a:rPr>
+              <a:t>The per-token selector stays near dense where static methods collapse</a:t>
+            </a:r>
+          </a:p>
+        </p:txBody>
+      </p:sp>
+      <p:pic>
+        <p:nvPicPr>
+          <p:cNvPr id="5" name="Picture 4" descr="amazon_logo.png"/>
+          <p:cNvPicPr>
+            <a:picLocks noChangeAspect="1"/>
+          </p:cNvPicPr>
+          <p:nvPr/>
+        </p:nvPicPr>
+        <p:blipFill>
+          <a:blip r:embed="rId2"/>
+          <a:stretch>
+            <a:fillRect/>
+          </a:stretch>
+        </p:blipFill>
+        <p:spPr>
+          <a:xfrm>
+            <a:off x="192024" y="6309360"/>
+            <a:ext cx="1463040" cy="440740"/>
+          </a:xfrm>
+          <a:prstGeom prst="rect">
+            <a:avLst/>
+          </a:prstGeom>
+        </p:spPr>
+      </p:pic>
+      <p:sp>
+        <p:nvSpPr>
+          <p:cNvPr id="6" name="Rectangle 5"/>
+          <p:cNvSpPr/>
+          <p:nvPr/>
+        </p:nvSpPr>
+        <p:spPr>
+          <a:xfrm>
+            <a:off x="11140135" y="6400800"/>
+            <a:ext cx="109728" cy="237744"/>
+          </a:xfrm>
+          <a:prstGeom prst="rect">
+            <a:avLst/>
+          </a:prstGeom>
+          <a:solidFill>
+            <a:srgbClr val="E0A32E"/>
+          </a:solidFill>
+          <a:ln>
+            <a:noFill/>
+          </a:ln>
+          <a:effectLst/>
+        </p:spPr>
+        <p:style>
+          <a:lnRef idx="1">
+            <a:schemeClr val="accent1"/>
+          </a:lnRef>
+          <a:fillRef idx="3">
+            <a:schemeClr val="accent1"/>
+          </a:fillRef>
+          <a:effectRef idx="2">
+            <a:schemeClr val="accent1"/>
+          </a:effectRef>
+          <a:fontRef idx="minor">
+            <a:schemeClr val="lt1"/>
+          </a:fontRef>
+        </p:style>
+        <p:txBody>
+          <a:bodyPr rtlCol="0" anchor="ctr"/>
+          <a:lstStyle/>
+          <a:p>
+            <a:pPr algn="ctr"/>
+          </a:p>
+        </p:txBody>
+      </p:sp>
+      <p:sp>
+        <p:nvSpPr>
+          <p:cNvPr id="7" name="TextBox 6"/>
+          <p:cNvSpPr txBox="1"/>
+          <p:nvPr/>
+        </p:nvSpPr>
+        <p:spPr>
+          <a:xfrm>
+            <a:off x="11323015" y="6364224"/>
+            <a:ext cx="685800" cy="320040"/>
+          </a:xfrm>
+          <a:prstGeom prst="rect">
+            <a:avLst/>
+          </a:prstGeom>
+          <a:noFill/>
+        </p:spPr>
+        <p:txBody>
+          <a:bodyPr wrap="square" anchor="ctr" lIns="45720" rIns="45720" tIns="0" bIns="0">
+            <a:spAutoFit/>
+          </a:bodyPr>
+          <a:lstStyle/>
+          <a:p>
+            <a:pPr algn="l">
+              <a:lnSpc>
+                <a:spcPct val="100000"/>
+              </a:lnSpc>
+              <a:spcBef>
+                <a:spcPts val="0"/>
+              </a:spcBef>
+              <a:spcAft>
+                <a:spcPts val="600"/>
+              </a:spcAft>
+            </a:pPr>
+            <a:r>
+              <a:rPr sz="1200" b="1" i="0">
+                <a:solidFill>
+                  <a:srgbClr val="5C6B7A"/>
+                </a:solidFill>
+                <a:latin typeface="Times New Roman"/>
+                <a:cs typeface="Times New Roman"/>
+              </a:rPr>
+              <a:t>6</a:t>
+            </a:r>
+          </a:p>
+        </p:txBody>
+      </p:sp>
+      <p:sp>
+        <p:nvSpPr>
+          <p:cNvPr id="8" name="TextBox 7"/>
+          <p:cNvSpPr txBox="1"/>
+          <p:nvPr/>
+        </p:nvSpPr>
+        <p:spPr>
+          <a:xfrm>
+            <a:off x="1828800" y="6382512"/>
+            <a:ext cx="8229600" cy="320040"/>
+          </a:xfrm>
+          <a:prstGeom prst="rect">
+            <a:avLst/>
+          </a:prstGeom>
+          <a:noFill/>
+        </p:spPr>
+        <p:txBody>
+          <a:bodyPr wrap="square" anchor="ctr" lIns="45720" rIns="45720" tIns="0" bIns="0">
+            <a:spAutoFit/>
+          </a:bodyPr>
+          <a:lstStyle/>
+          <a:p>
+            <a:pPr algn="l">
+              <a:lnSpc>
+                <a:spcPct val="100000"/>
+              </a:lnSpc>
+              <a:spcBef>
+                <a:spcPts val="0"/>
+              </a:spcBef>
+              <a:spcAft>
+                <a:spcPts val="600"/>
+              </a:spcAft>
+            </a:pPr>
+            <a:r>
+              <a:rPr sz="1100" b="0" i="1">
+                <a:solidFill>
+                  <a:srgbClr val="5C6B7A"/>
+                </a:solidFill>
+                <a:latin typeface="Times New Roman"/>
+                <a:cs typeface="Times New Roman"/>
+              </a:rPr>
+              <a:t>Per-Token Adaptive Channel Activation for MoE</a:t>
+            </a:r>
+          </a:p>
+        </p:txBody>
+      </p:sp>
+      <p:pic>
+        <p:nvPicPr>
+          <p:cNvPr id="9" name="Picture 8" descr="fig_offline_vs_online.png"/>
+          <p:cNvPicPr>
+            <a:picLocks noChangeAspect="1"/>
+          </p:cNvPicPr>
+          <p:nvPr/>
+        </p:nvPicPr>
+        <p:blipFill>
+          <a:blip r:embed="rId3"/>
+          <a:stretch>
+            <a:fillRect/>
+          </a:stretch>
+        </p:blipFill>
+        <p:spPr>
+          <a:xfrm>
+            <a:off x="3634300" y="1755648"/>
+            <a:ext cx="4923093" cy="3383280"/>
+          </a:xfrm>
+          <a:prstGeom prst="rect">
+            <a:avLst/>
+          </a:prstGeom>
+        </p:spPr>
+      </p:pic>
+      <p:sp>
+        <p:nvSpPr>
+          <p:cNvPr id="10" name="Rectangle 9"/>
+          <p:cNvSpPr/>
+          <p:nvPr/>
+        </p:nvSpPr>
+        <p:spPr>
+          <a:xfrm>
+            <a:off x="548640" y="5303520"/>
+            <a:ext cx="11094415" cy="896112"/>
+          </a:xfrm>
+          <a:prstGeom prst="rect">
+            <a:avLst/>
+          </a:prstGeom>
+          <a:solidFill>
+            <a:srgbClr val="0E2A47"/>
+          </a:solidFill>
+          <a:ln>
+            <a:noFill/>
+          </a:ln>
+          <a:effectLst/>
+        </p:spPr>
+        <p:style>
+          <a:lnRef idx="1">
+            <a:schemeClr val="accent1"/>
+          </a:lnRef>
+          <a:fillRef idx="3">
+            <a:schemeClr val="accent1"/>
+          </a:fillRef>
+          <a:effectRef idx="2">
+            <a:schemeClr val="accent1"/>
+          </a:effectRef>
+          <a:fontRef idx="minor">
+            <a:schemeClr val="lt1"/>
+          </a:fontRef>
+        </p:style>
+        <p:txBody>
+          <a:bodyPr rtlCol="0" anchor="ctr"/>
+          <a:lstStyle/>
+          <a:p>
+            <a:pPr algn="ctr"/>
+          </a:p>
+        </p:txBody>
+      </p:sp>
+      <p:sp>
+        <p:nvSpPr>
+          <p:cNvPr id="11" name="Rectangle 10"/>
+          <p:cNvSpPr/>
+          <p:nvPr/>
+        </p:nvSpPr>
+        <p:spPr>
+          <a:xfrm>
+            <a:off x="548640" y="5303520"/>
+            <a:ext cx="128016" cy="896112"/>
+          </a:xfrm>
+          <a:prstGeom prst="rect">
+            <a:avLst/>
+          </a:prstGeom>
+          <a:solidFill>
+            <a:srgbClr val="E0A32E"/>
+          </a:solidFill>
+          <a:ln>
+            <a:noFill/>
+          </a:ln>
+          <a:effectLst/>
+        </p:spPr>
+        <p:style>
+          <a:lnRef idx="1">
+            <a:schemeClr val="accent1"/>
+          </a:lnRef>
+          <a:fillRef idx="3">
+            <a:schemeClr val="accent1"/>
+          </a:fillRef>
+          <a:effectRef idx="2">
+            <a:schemeClr val="accent1"/>
+          </a:effectRef>
+          <a:fontRef idx="minor">
+            <a:schemeClr val="lt1"/>
+          </a:fontRef>
+        </p:style>
+        <p:txBody>
+          <a:bodyPr rtlCol="0" anchor="ctr"/>
+          <a:lstStyle/>
+          <a:p>
+            <a:pPr algn="ctr"/>
+          </a:p>
+        </p:txBody>
+      </p:sp>
+      <p:sp>
+        <p:nvSpPr>
+          <p:cNvPr id="12" name="TextBox 11"/>
+          <p:cNvSpPr txBox="1"/>
+          <p:nvPr/>
+        </p:nvSpPr>
+        <p:spPr>
+          <a:xfrm>
+            <a:off x="868680" y="5394960"/>
+            <a:ext cx="10454335" cy="731520"/>
+          </a:xfrm>
+          <a:prstGeom prst="rect">
+            <a:avLst/>
+          </a:prstGeom>
+          <a:noFill/>
+        </p:spPr>
+        <p:txBody>
+          <a:bodyPr wrap="square" anchor="ctr" lIns="45720" rIns="45720" tIns="0" bIns="0">
+            <a:spAutoFit/>
+          </a:bodyPr>
+          <a:lstStyle/>
+          <a:p>
+            <a:pPr algn="l">
+              <a:lnSpc>
+                <a:spcPct val="105000"/>
+              </a:lnSpc>
+              <a:spcBef>
+                <a:spcPts val="0"/>
+              </a:spcBef>
+              <a:spcAft>
+                <a:spcPts val="500"/>
+              </a:spcAft>
+            </a:pPr>
+            <a:r>
+              <a:rPr sz="1700" b="0" i="0">
+                <a:solidFill>
+                  <a:srgbClr val="FFFFFF"/>
+                </a:solidFill>
+                <a:latin typeface="Times New Roman"/>
+                <a:cs typeface="Times New Roman"/>
+              </a:rPr>
+              <a:t>At equal budget, dropping experts or ranking channels </a:t>
+            </a:r>
+            <a:r>
+              <a:rPr sz="1700" b="1" i="0">
+                <a:solidFill>
+                  <a:srgbClr val="E0A32E"/>
+                </a:solidFill>
+                <a:latin typeface="Times New Roman"/>
+                <a:cs typeface="Times New Roman"/>
+              </a:rPr>
+              <a:t>offline</a:t>
+            </a:r>
+            <a:r>
+              <a:rPr sz="1700" b="0" i="0">
+                <a:solidFill>
+                  <a:srgbClr val="FFFFFF"/>
+                </a:solidFill>
+                <a:latin typeface="Times New Roman"/>
+                <a:cs typeface="Times New Roman"/>
+              </a:rPr>
+              <a:t> falls apart as the cut deepens — toward chance by 7/8.</a:t>
+            </a:r>
+          </a:p>
+          <a:p>
+            <a:pPr algn="l">
+              <a:lnSpc>
+                <a:spcPct val="105000"/>
+              </a:lnSpc>
+              <a:spcBef>
+                <a:spcPts val="0"/>
+              </a:spcBef>
+              <a:spcAft>
+                <a:spcPts val="500"/>
+              </a:spcAft>
+            </a:pPr>
+            <a:r>
+              <a:rPr sz="1700" b="0" i="0">
+                <a:solidFill>
+                  <a:srgbClr val="FFFFFF"/>
+                </a:solidFill>
+                <a:latin typeface="Times New Roman"/>
+                <a:cs typeface="Times New Roman"/>
+              </a:rPr>
+              <a:t>Per-token selection holds the dense line; the gap widens to </a:t>
+            </a:r>
+            <a:r>
+              <a:rPr sz="1700" b="1" i="0">
+                <a:solidFill>
+                  <a:srgbClr val="E0A32E"/>
+                </a:solidFill>
+                <a:latin typeface="Times New Roman"/>
+                <a:cs typeface="Times New Roman"/>
+              </a:rPr>
+              <a:t>+33 pt</a:t>
+            </a:r>
+            <a:r>
+              <a:rPr sz="1700" b="0" i="0">
+                <a:solidFill>
+                  <a:srgbClr val="FFFFFF"/>
+                </a:solidFill>
+                <a:latin typeface="Times New Roman"/>
+                <a:cs typeface="Times New Roman"/>
+              </a:rPr>
+              <a:t> at the tightest budget — the information offline methods cannot see.</a:t>
+            </a:r>
+          </a:p>
+        </p:txBody>
+      </p:sp>
+    </p:spTree>
+  </p:cSld>
+  <p:clrMapOvr>
+    <a:masterClrMapping/>
+  </p:clrMapOvr>
+</p:sld>
+</file>
+
+<file path=ppt/slides/slide7.xml><?xml version="1.0" encoding="utf-8"?>
+<p:sld xmlns:a="http://schemas.openxmlformats.org/drawingml/2006/main" xmlns:p="http://schemas.openxmlformats.org/presentationml/2006/main" xmlns:r="http://schemas.openxmlformats.org/officeDocument/2006/relationships">
+  <p:cSld>
+    <p:bg>
+      <p:bgPr>
+        <a:solidFill>
+          <a:srgbClr val="0E2A47"/>
+        </a:solidFill>
+        <a:effectLst/>
+      </p:bgPr>
+    </p:bg>
+    <p:spTree>
+      <p:nvGrpSpPr>
+        <p:cNvPr id="1" name=""/>
+        <p:cNvGrpSpPr/>
+        <p:nvPr/>
+      </p:nvGrpSpPr>
+      <p:grpSpPr/>
+      <p:sp>
+        <p:nvSpPr>
+          <p:cNvPr id="2" name="Rectangle 1"/>
+          <p:cNvSpPr/>
+          <p:nvPr/>
+        </p:nvSpPr>
+        <p:spPr>
+          <a:xfrm>
+            <a:off x="548640" y="2514600"/>
+            <a:ext cx="1280160" cy="128016"/>
+          </a:xfrm>
+          <a:prstGeom prst="rect">
+            <a:avLst/>
+          </a:prstGeom>
+          <a:solidFill>
+            <a:srgbClr val="E0A32E"/>
+          </a:solidFill>
+          <a:ln>
+            <a:noFill/>
+          </a:ln>
+          <a:effectLst/>
+        </p:spPr>
+        <p:style>
+          <a:lnRef idx="1">
+            <a:schemeClr val="accent1"/>
+          </a:lnRef>
+          <a:fillRef idx="3">
+            <a:schemeClr val="accent1"/>
+          </a:fillRef>
+          <a:effectRef idx="2">
+            <a:schemeClr val="accent1"/>
+          </a:effectRef>
+          <a:fontRef idx="minor">
+            <a:schemeClr val="lt1"/>
+          </a:fontRef>
+        </p:style>
+        <p:txBody>
+          <a:bodyPr rtlCol="0" anchor="ctr"/>
+          <a:lstStyle/>
+          <a:p>
+            <a:pPr algn="ctr"/>
+          </a:p>
+        </p:txBody>
+      </p:sp>
+      <p:sp>
+        <p:nvSpPr>
+          <p:cNvPr id="3" name="TextBox 2"/>
+          <p:cNvSpPr txBox="1"/>
+          <p:nvPr/>
+        </p:nvSpPr>
+        <p:spPr>
+          <a:xfrm>
+            <a:off x="548640" y="2852928"/>
+            <a:ext cx="11094415" cy="1097280"/>
+          </a:xfrm>
+          <a:prstGeom prst="rect">
+            <a:avLst/>
+          </a:prstGeom>
+          <a:noFill/>
+        </p:spPr>
+        <p:txBody>
+          <a:bodyPr wrap="square" anchor="t" lIns="45720" rIns="45720" tIns="0" bIns="0">
+            <a:spAutoFit/>
+          </a:bodyPr>
+          <a:lstStyle/>
+          <a:p>
+            <a:pPr algn="l">
+              <a:lnSpc>
+                <a:spcPct val="100000"/>
+              </a:lnSpc>
+              <a:spcBef>
+                <a:spcPts val="0"/>
+              </a:spcBef>
+              <a:spcAft>
+                <a:spcPts val="600"/>
+              </a:spcAft>
+            </a:pPr>
+            <a:r>
+              <a:rPr sz="4000" b="1" i="0">
+                <a:solidFill>
+                  <a:srgbClr val="FFFFFF"/>
+                </a:solidFill>
+                <a:latin typeface="Times New Roman"/>
+                <a:cs typeface="Times New Roman"/>
+              </a:rPr>
+              <a:t>Level 1 — Offline Static Channel Ranking</a:t>
+            </a:r>
+          </a:p>
+        </p:txBody>
+      </p:sp>
+      <p:sp>
+        <p:nvSpPr>
+          <p:cNvPr id="4" name="TextBox 3"/>
+          <p:cNvSpPr txBox="1"/>
+          <p:nvPr/>
+        </p:nvSpPr>
+        <p:spPr>
+          <a:xfrm>
+            <a:off x="548640" y="3703320"/>
+            <a:ext cx="11094415" cy="822960"/>
+          </a:xfrm>
+          <a:prstGeom prst="rect">
+            <a:avLst/>
+          </a:prstGeom>
+          <a:noFill/>
+        </p:spPr>
+        <p:txBody>
+          <a:bodyPr wrap="square" anchor="t" lIns="45720" rIns="45720" tIns="0" bIns="0">
+            <a:spAutoFit/>
+          </a:bodyPr>
+          <a:lstStyle/>
+          <a:p>
+            <a:pPr algn="l">
+              <a:lnSpc>
+                <a:spcPct val="100000"/>
+              </a:lnSpc>
+              <a:spcBef>
+                <a:spcPts val="0"/>
+              </a:spcBef>
+              <a:spcAft>
+                <a:spcPts val="600"/>
+              </a:spcAft>
+            </a:pPr>
+            <a:r>
+              <a:rPr sz="2000" b="0" i="0">
+                <a:solidFill>
+                  <a:srgbClr val="C9D6E3"/>
+                </a:solidFill>
+                <a:latin typeface="Times New Roman"/>
+                <a:cs typeface="Times New Roman"/>
+              </a:rPr>
+              <a:t>Can a fixed, precomputed channel order replace the online scorer?</a:t>
+            </a:r>
+          </a:p>
+        </p:txBody>
+      </p:sp>
+      <p:pic>
+        <p:nvPicPr>
+          <p:cNvPr id="5" name="Picture 4" descr="amazon_logo.png"/>
+          <p:cNvPicPr>
+            <a:picLocks noChangeAspect="1"/>
+          </p:cNvPicPr>
+          <p:nvPr/>
+        </p:nvPicPr>
+        <p:blipFill>
+          <a:blip r:embed="rId2"/>
+          <a:stretch>
+            <a:fillRect/>
+          </a:stretch>
+        </p:blipFill>
+        <p:spPr>
+          <a:xfrm>
+            <a:off x="192024" y="6309360"/>
+            <a:ext cx="1463040" cy="440740"/>
+          </a:xfrm>
+          <a:prstGeom prst="rect">
+            <a:avLst/>
+          </a:prstGeom>
+        </p:spPr>
+      </p:pic>
+    </p:spTree>
+  </p:cSld>
+  <p:clrMapOvr>
+    <a:masterClrMapping/>
+  </p:clrMapOvr>
+</p:sld>
+</file>
+
+<file path=ppt/slides/slide8.xml><?xml version="1.0" encoding="utf-8"?>
+<p:sld xmlns:a="http://schemas.openxmlformats.org/drawingml/2006/main" xmlns:p="http://schemas.openxmlformats.org/presentationml/2006/main" xmlns:r="http://schemas.openxmlformats.org/officeDocument/2006/relationships">
+  <p:cSld>
+    <p:bg>
+      <p:bgPr>
+        <a:solidFill>
+          <a:srgbClr val="F4F6F9"/>
+        </a:solidFill>
+        <a:effectLst/>
+      </p:bgPr>
+    </p:bg>
+    <p:spTree>
+      <p:nvGrpSpPr>
+        <p:cNvPr id="1" name=""/>
+        <p:cNvGrpSpPr/>
+        <p:nvPr/>
+      </p:nvGrpSpPr>
+      <p:grpSpPr/>
+      <p:sp>
+        <p:nvSpPr>
+          <p:cNvPr id="2" name="Rectangle 1"/>
+          <p:cNvSpPr/>
+          <p:nvPr/>
+        </p:nvSpPr>
+        <p:spPr>
+          <a:xfrm>
+            <a:off x="548640" y="310896"/>
+            <a:ext cx="128016" cy="566928"/>
+          </a:xfrm>
+          <a:prstGeom prst="rect">
+            <a:avLst/>
+          </a:prstGeom>
+          <a:solidFill>
+            <a:srgbClr val="E0A32E"/>
+          </a:solidFill>
+          <a:ln>
+            <a:noFill/>
+          </a:ln>
+          <a:effectLst/>
+        </p:spPr>
+        <p:style>
+          <a:lnRef idx="1">
+            <a:schemeClr val="accent1"/>
+          </a:lnRef>
+          <a:fillRef idx="3">
+            <a:schemeClr val="accent1"/>
+          </a:fillRef>
+          <a:effectRef idx="2">
+            <a:schemeClr val="accent1"/>
+          </a:effectRef>
+          <a:fontRef idx="minor">
+            <a:schemeClr val="lt1"/>
+          </a:fontRef>
+        </p:style>
+        <p:txBody>
+          <a:bodyPr rtlCol="0" anchor="ctr"/>
+          <a:lstStyle/>
+          <a:p>
+            <a:pPr algn="ctr"/>
+          </a:p>
+        </p:txBody>
+      </p:sp>
+      <p:sp>
+        <p:nvSpPr>
+          <p:cNvPr id="3" name="TextBox 2"/>
+          <p:cNvSpPr txBox="1"/>
+          <p:nvPr/>
+        </p:nvSpPr>
+        <p:spPr>
+          <a:xfrm>
+            <a:off x="822959" y="201168"/>
+            <a:ext cx="10820095" cy="786384"/>
+          </a:xfrm>
+          <a:prstGeom prst="rect">
+            <a:avLst/>
+          </a:prstGeom>
+          <a:noFill/>
+        </p:spPr>
+        <p:txBody>
+          <a:bodyPr wrap="square" anchor="ctr" lIns="45720" rIns="45720" tIns="0" bIns="0">
+            <a:spAutoFit/>
+          </a:bodyPr>
+          <a:lstStyle/>
+          <a:p>
+            <a:pPr algn="l">
+              <a:lnSpc>
+                <a:spcPct val="100000"/>
+              </a:lnSpc>
+              <a:spcBef>
+                <a:spcPts val="0"/>
+              </a:spcBef>
+              <a:spcAft>
+                <a:spcPts val="600"/>
+              </a:spcAft>
+            </a:pPr>
+            <a:r>
+              <a:rPr sz="3000" b="1" i="0">
+                <a:solidFill>
+                  <a:srgbClr val="0E2A47"/>
+                </a:solidFill>
+                <a:latin typeface="Times New Roman"/>
+                <a:cs typeface="Times New Roman"/>
+              </a:rPr>
+              <a:t>The Target: a Fixed Ranking of Unique Channels</a:t>
+            </a:r>
+          </a:p>
+        </p:txBody>
+      </p:sp>
+      <p:sp>
+        <p:nvSpPr>
+          <p:cNvPr id="4" name="TextBox 3"/>
+          <p:cNvSpPr txBox="1"/>
+          <p:nvPr/>
+        </p:nvSpPr>
+        <p:spPr>
+          <a:xfrm>
+            <a:off x="548640" y="1078992"/>
+            <a:ext cx="11094415" cy="457200"/>
+          </a:xfrm>
+          <a:prstGeom prst="rect">
+            <a:avLst/>
+          </a:prstGeom>
+          <a:noFill/>
+        </p:spPr>
+        <p:txBody>
+          <a:bodyPr wrap="square" anchor="t" lIns="45720" rIns="45720" tIns="0" bIns="0">
+            <a:spAutoFit/>
+          </a:bodyPr>
+          <a:lstStyle/>
+          <a:p>
+            <a:pPr algn="l">
+              <a:lnSpc>
+                <a:spcPct val="100000"/>
+              </a:lnSpc>
+              <a:spcBef>
+                <a:spcPts val="0"/>
+              </a:spcBef>
+              <a:spcAft>
+                <a:spcPts val="600"/>
+              </a:spcAft>
+            </a:pPr>
+            <a:r>
+              <a:rPr sz="2000" b="1" i="0">
+                <a:solidFill>
+                  <a:srgbClr val="1C7293"/>
+                </a:solidFill>
+                <a:latin typeface="Times New Roman"/>
+                <a:cs typeface="Times New Roman"/>
+              </a:rPr>
+              <a:t>If importance were token-independent, we could rank once and skip the online scorer</a:t>
+            </a:r>
+          </a:p>
+        </p:txBody>
+      </p:sp>
+      <p:pic>
+        <p:nvPicPr>
+          <p:cNvPr id="5" name="Picture 4" descr="amazon_logo.png"/>
+          <p:cNvPicPr>
+            <a:picLocks noChangeAspect="1"/>
+          </p:cNvPicPr>
+          <p:nvPr/>
+        </p:nvPicPr>
+        <p:blipFill>
+          <a:blip r:embed="rId2"/>
+          <a:stretch>
+            <a:fillRect/>
+          </a:stretch>
+        </p:blipFill>
+        <p:spPr>
+          <a:xfrm>
+            <a:off x="192024" y="6309360"/>
+            <a:ext cx="1463040" cy="440740"/>
+          </a:xfrm>
+          <a:prstGeom prst="rect">
+            <a:avLst/>
+          </a:prstGeom>
+        </p:spPr>
+      </p:pic>
+      <p:sp>
+        <p:nvSpPr>
+          <p:cNvPr id="6" name="Rectangle 5"/>
+          <p:cNvSpPr/>
+          <p:nvPr/>
+        </p:nvSpPr>
+        <p:spPr>
+          <a:xfrm>
+            <a:off x="11140135" y="6400800"/>
+            <a:ext cx="109728" cy="237744"/>
+          </a:xfrm>
+          <a:prstGeom prst="rect">
+            <a:avLst/>
+          </a:prstGeom>
+          <a:solidFill>
+            <a:srgbClr val="E0A32E"/>
+          </a:solidFill>
+          <a:ln>
+            <a:noFill/>
+          </a:ln>
+          <a:effectLst/>
+        </p:spPr>
+        <p:style>
+          <a:lnRef idx="1">
+            <a:schemeClr val="accent1"/>
+          </a:lnRef>
+          <a:fillRef idx="3">
+            <a:schemeClr val="accent1"/>
+          </a:fillRef>
+          <a:effectRef idx="2">
+            <a:schemeClr val="accent1"/>
+          </a:effectRef>
+          <a:fontRef idx="minor">
+            <a:schemeClr val="lt1"/>
+          </a:fontRef>
+        </p:style>
+        <p:txBody>
+          <a:bodyPr rtlCol="0" anchor="ctr"/>
+          <a:lstStyle/>
+          <a:p>
+            <a:pPr algn="ctr"/>
+          </a:p>
+        </p:txBody>
+      </p:sp>
+      <p:sp>
+        <p:nvSpPr>
+          <p:cNvPr id="7" name="TextBox 6"/>
+          <p:cNvSpPr txBox="1"/>
+          <p:nvPr/>
+        </p:nvSpPr>
+        <p:spPr>
+          <a:xfrm>
+            <a:off x="11323015" y="6364224"/>
+            <a:ext cx="685800" cy="320040"/>
+          </a:xfrm>
+          <a:prstGeom prst="rect">
+            <a:avLst/>
+          </a:prstGeom>
+          <a:noFill/>
+        </p:spPr>
+        <p:txBody>
+          <a:bodyPr wrap="square" anchor="ctr" lIns="45720" rIns="45720" tIns="0" bIns="0">
+            <a:spAutoFit/>
+          </a:bodyPr>
+          <a:lstStyle/>
+          <a:p>
+            <a:pPr algn="l">
+              <a:lnSpc>
+                <a:spcPct val="100000"/>
+              </a:lnSpc>
+              <a:spcBef>
+                <a:spcPts val="0"/>
+              </a:spcBef>
+              <a:spcAft>
+                <a:spcPts val="600"/>
+              </a:spcAft>
+            </a:pPr>
+            <a:r>
+              <a:rPr sz="1200" b="1" i="0">
+                <a:solidFill>
+                  <a:srgbClr val="5C6B7A"/>
+                </a:solidFill>
+                <a:latin typeface="Times New Roman"/>
+                <a:cs typeface="Times New Roman"/>
+              </a:rPr>
+              <a:t>7</a:t>
+            </a:r>
+          </a:p>
+        </p:txBody>
+      </p:sp>
+      <p:sp>
+        <p:nvSpPr>
+          <p:cNvPr id="8" name="TextBox 7"/>
+          <p:cNvSpPr txBox="1"/>
+          <p:nvPr/>
+        </p:nvSpPr>
+        <p:spPr>
+          <a:xfrm>
+            <a:off x="1828800" y="6382512"/>
+            <a:ext cx="8229600" cy="320040"/>
+          </a:xfrm>
+          <a:prstGeom prst="rect">
+            <a:avLst/>
+          </a:prstGeom>
+          <a:noFill/>
+        </p:spPr>
+        <p:txBody>
+          <a:bodyPr wrap="square" anchor="ctr" lIns="45720" rIns="45720" tIns="0" bIns="0">
+            <a:spAutoFit/>
+          </a:bodyPr>
+          <a:lstStyle/>
+          <a:p>
+            <a:pPr algn="l">
+              <a:lnSpc>
+                <a:spcPct val="100000"/>
+              </a:lnSpc>
+              <a:spcBef>
+                <a:spcPts val="0"/>
+              </a:spcBef>
+              <a:spcAft>
+                <a:spcPts val="600"/>
+              </a:spcAft>
+            </a:pPr>
+            <a:r>
+              <a:rPr sz="1100" b="0" i="1">
+                <a:solidFill>
+                  <a:srgbClr val="5C6B7A"/>
+                </a:solidFill>
+                <a:latin typeface="Times New Roman"/>
+                <a:cs typeface="Times New Roman"/>
+              </a:rPr>
+              <a:t>Per-Token Adaptive Channel Activation for MoE</a:t>
+            </a:r>
+          </a:p>
+        </p:txBody>
+      </p:sp>
+      <p:sp>
+        <p:nvSpPr>
+          <p:cNvPr id="9" name="TextBox 8"/>
+          <p:cNvSpPr txBox="1"/>
+          <p:nvPr/>
+        </p:nvSpPr>
+        <p:spPr>
+          <a:xfrm>
+            <a:off x="548640" y="1645920"/>
+            <a:ext cx="11094415" cy="822960"/>
+          </a:xfrm>
+          <a:prstGeom prst="rect">
+            <a:avLst/>
+          </a:prstGeom>
+          <a:noFill/>
+        </p:spPr>
+        <p:txBody>
+          <a:bodyPr wrap="square" anchor="t" lIns="45720" rIns="45720" tIns="0" bIns="0">
+            <a:spAutoFit/>
+          </a:bodyPr>
+          <a:lstStyle/>
+          <a:p>
+            <a:pPr algn="l">
+              <a:lnSpc>
+                <a:spcPct val="105000"/>
+              </a:lnSpc>
+              <a:spcBef>
+                <a:spcPts val="0"/>
+              </a:spcBef>
+              <a:spcAft>
+                <a:spcPts val="600"/>
+              </a:spcAft>
+            </a:pPr>
+            <a:r>
+              <a:rPr sz="1600" b="0" i="0">
+                <a:solidFill>
+                  <a:srgbClr val="222A33"/>
+                </a:solidFill>
+                <a:latin typeface="Times New Roman"/>
+                <a:cs typeface="Times New Roman"/>
+              </a:rPr>
+              <a:t>The online method pins </a:t>
+            </a:r>
+            <a:r>
+              <a:rPr sz="1600" b="1" i="0">
+                <a:solidFill>
+                  <a:srgbClr val="1C7293"/>
+                </a:solidFill>
+                <a:latin typeface="Times New Roman"/>
+                <a:cs typeface="Times New Roman"/>
+              </a:rPr>
+              <a:t>up_proj</a:t>
+            </a:r>
+            <a:r>
+              <a:rPr sz="1600" b="0" i="0">
+                <a:solidFill>
+                  <a:srgbClr val="222A33"/>
+                </a:solidFill>
+                <a:latin typeface="Times New Roman"/>
+                <a:cs typeface="Times New Roman"/>
+              </a:rPr>
+              <a:t> at full width — it </a:t>
+            </a:r>
+            <a:r>
+              <a:rPr sz="1600" b="0" i="1">
+                <a:solidFill>
+                  <a:srgbClr val="222A33"/>
+                </a:solidFill>
+                <a:latin typeface="Times New Roman"/>
+                <a:cs typeface="Times New Roman"/>
+              </a:rPr>
+              <a:t>is</a:t>
+            </a:r>
+            <a:r>
+              <a:rPr sz="1600" b="0" i="0">
+                <a:solidFill>
+                  <a:srgbClr val="222A33"/>
+                </a:solidFill>
+                <a:latin typeface="Times New Roman"/>
+                <a:cs typeface="Times New Roman"/>
+              </a:rPr>
+              <a:t> the scorer. Offline question: precompute a fixed per-expert channel order so inference just keeps the top-B, with </a:t>
+            </a:r>
+            <a:r>
+              <a:rPr sz="1600" b="1" i="0">
+                <a:solidFill>
+                  <a:srgbClr val="0E2A47"/>
+                </a:solidFill>
+                <a:latin typeface="Times New Roman"/>
+                <a:cs typeface="Times New Roman"/>
+              </a:rPr>
+              <a:t>no full-width computation</a:t>
+            </a:r>
+            <a:r>
+              <a:rPr sz="1600" b="0" i="0">
+                <a:solidFill>
+                  <a:srgbClr val="222A33"/>
+                </a:solidFill>
+                <a:latin typeface="Times New Roman"/>
+                <a:cs typeface="Times New Roman"/>
+              </a:rPr>
+              <a:t>?</a:t>
+            </a:r>
+          </a:p>
+        </p:txBody>
+      </p:sp>
+      <p:sp>
+        <p:nvSpPr>
+          <p:cNvPr id="10" name="Rectangle 9"/>
+          <p:cNvSpPr/>
+          <p:nvPr/>
+        </p:nvSpPr>
+        <p:spPr>
+          <a:xfrm>
+            <a:off x="548640" y="2560320"/>
+            <a:ext cx="5410047" cy="1170432"/>
+          </a:xfrm>
+          <a:prstGeom prst="rect">
+            <a:avLst/>
+          </a:prstGeom>
+          <a:solidFill>
+            <a:srgbClr val="FFFFFF"/>
+          </a:solidFill>
+          <a:ln w="12700">
+            <a:solidFill>
+              <a:srgbClr val="D5DEE7"/>
+            </a:solidFill>
+          </a:ln>
+          <a:effectLst/>
+        </p:spPr>
+        <p:style>
+          <a:lnRef idx="1">
+            <a:schemeClr val="accent1"/>
+          </a:lnRef>
+          <a:fillRef idx="3">
+            <a:schemeClr val="accent1"/>
+          </a:fillRef>
+          <a:effectRef idx="2">
+            <a:schemeClr val="accent1"/>
+          </a:effectRef>
+          <a:fontRef idx="minor">
+            <a:schemeClr val="lt1"/>
+          </a:fontRef>
+        </p:style>
+        <p:txBody>
+          <a:bodyPr rtlCol="0" anchor="ctr"/>
+          <a:lstStyle/>
+          <a:p>
+            <a:pPr algn="ctr"/>
+          </a:p>
+        </p:txBody>
+      </p:sp>
+      <p:sp>
+        <p:nvSpPr>
+          <p:cNvPr id="11" name="Rectangle 10"/>
+          <p:cNvSpPr/>
+          <p:nvPr/>
+        </p:nvSpPr>
+        <p:spPr>
+          <a:xfrm>
+            <a:off x="548640" y="2560320"/>
+            <a:ext cx="109728" cy="1170432"/>
+          </a:xfrm>
+          <a:prstGeom prst="rect">
+            <a:avLst/>
+          </a:prstGeom>
+          <a:solidFill>
+            <a:srgbClr val="E0A32E"/>
+          </a:solidFill>
+          <a:ln>
+            <a:noFill/>
+          </a:ln>
+          <a:effectLst/>
+        </p:spPr>
+        <p:style>
+          <a:lnRef idx="1">
+            <a:schemeClr val="accent1"/>
+          </a:lnRef>
+          <a:fillRef idx="3">
+            <a:schemeClr val="accent1"/>
+          </a:fillRef>
+          <a:effectRef idx="2">
+            <a:schemeClr val="accent1"/>
+          </a:effectRef>
+          <a:fontRef idx="minor">
+            <a:schemeClr val="lt1"/>
+          </a:fontRef>
+        </p:style>
+        <p:txBody>
+          <a:bodyPr rtlCol="0" anchor="ctr"/>
+          <a:lstStyle/>
+          <a:p>
+            <a:pPr algn="ctr"/>
+          </a:p>
+        </p:txBody>
+      </p:sp>
+      <p:sp>
+        <p:nvSpPr>
+          <p:cNvPr id="12" name="TextBox 11"/>
+          <p:cNvSpPr txBox="1"/>
+          <p:nvPr/>
+        </p:nvSpPr>
+        <p:spPr>
+          <a:xfrm>
+            <a:off x="786384" y="2651760"/>
+            <a:ext cx="5025999" cy="1005840"/>
+          </a:xfrm>
+          <a:prstGeom prst="rect">
+            <a:avLst/>
+          </a:prstGeom>
+          <a:noFill/>
+        </p:spPr>
+        <p:txBody>
+          <a:bodyPr wrap="square" anchor="t" lIns="45720" rIns="45720" tIns="0" bIns="0">
+            <a:spAutoFit/>
+          </a:bodyPr>
+          <a:lstStyle/>
+          <a:p>
+            <a:pPr algn="l">
+              <a:lnSpc>
+                <a:spcPct val="102000"/>
+              </a:lnSpc>
+              <a:spcBef>
+                <a:spcPts val="0"/>
+              </a:spcBef>
+              <a:spcAft>
+                <a:spcPts val="300"/>
+              </a:spcAft>
+            </a:pPr>
+            <a:r>
+              <a:rPr sz="1500" b="1" i="0">
+                <a:solidFill>
+                  <a:srgbClr val="E0A32E"/>
+                </a:solidFill>
+                <a:latin typeface="Times New Roman"/>
+                <a:cs typeface="Times New Roman"/>
+              </a:rPr>
+              <a:t>①  </a:t>
+            </a:r>
+            <a:r>
+              <a:rPr sz="1500" b="1" i="0">
+                <a:solidFill>
+                  <a:srgbClr val="0E2A47"/>
+                </a:solidFill>
+                <a:latin typeface="Times New Roman"/>
+                <a:cs typeface="Times New Roman"/>
+              </a:rPr>
+              <a:t>Redundancy-aware</a:t>
+            </a:r>
+          </a:p>
+          <a:p>
+            <a:pPr algn="l">
+              <a:lnSpc>
+                <a:spcPct val="102000"/>
+              </a:lnSpc>
+              <a:spcBef>
+                <a:spcPts val="0"/>
+              </a:spcBef>
+              <a:spcAft>
+                <a:spcPts val="300"/>
+              </a:spcAft>
+            </a:pPr>
+            <a:r>
+              <a:rPr sz="1300" b="0" i="0">
+                <a:solidFill>
+                  <a:srgbClr val="222A33"/>
+                </a:solidFill>
+                <a:latin typeface="Times New Roman"/>
+                <a:cs typeface="Times New Roman"/>
+              </a:rPr>
+              <a:t>Don't double-spend budget on duplicate channels.</a:t>
+            </a:r>
+          </a:p>
+        </p:txBody>
+      </p:sp>
+      <p:sp>
+        <p:nvSpPr>
+          <p:cNvPr id="13" name="Rectangle 12"/>
+          <p:cNvSpPr/>
+          <p:nvPr/>
+        </p:nvSpPr>
+        <p:spPr>
+          <a:xfrm>
+            <a:off x="6233007" y="2560320"/>
+            <a:ext cx="5410047" cy="1170432"/>
+          </a:xfrm>
+          <a:prstGeom prst="rect">
+            <a:avLst/>
+          </a:prstGeom>
+          <a:solidFill>
+            <a:srgbClr val="FFFFFF"/>
+          </a:solidFill>
+          <a:ln w="12700">
+            <a:solidFill>
+              <a:srgbClr val="D5DEE7"/>
+            </a:solidFill>
+          </a:ln>
+          <a:effectLst/>
+        </p:spPr>
+        <p:style>
+          <a:lnRef idx="1">
+            <a:schemeClr val="accent1"/>
+          </a:lnRef>
+          <a:fillRef idx="3">
+            <a:schemeClr val="accent1"/>
+          </a:fillRef>
+          <a:effectRef idx="2">
+            <a:schemeClr val="accent1"/>
+          </a:effectRef>
+          <a:fontRef idx="minor">
+            <a:schemeClr val="lt1"/>
+          </a:fontRef>
+        </p:style>
+        <p:txBody>
+          <a:bodyPr rtlCol="0" anchor="ctr"/>
+          <a:lstStyle/>
+          <a:p>
+            <a:pPr algn="ctr"/>
+          </a:p>
+        </p:txBody>
+      </p:sp>
+      <p:sp>
+        <p:nvSpPr>
+          <p:cNvPr id="14" name="Rectangle 13"/>
+          <p:cNvSpPr/>
+          <p:nvPr/>
+        </p:nvSpPr>
+        <p:spPr>
+          <a:xfrm>
+            <a:off x="6233007" y="2560320"/>
+            <a:ext cx="109728" cy="1170432"/>
+          </a:xfrm>
+          <a:prstGeom prst="rect">
+            <a:avLst/>
+          </a:prstGeom>
+          <a:solidFill>
+            <a:srgbClr val="E0A32E"/>
+          </a:solidFill>
+          <a:ln>
+            <a:noFill/>
+          </a:ln>
+          <a:effectLst/>
+        </p:spPr>
+        <p:style>
+          <a:lnRef idx="1">
+            <a:schemeClr val="accent1"/>
+          </a:lnRef>
+          <a:fillRef idx="3">
+            <a:schemeClr val="accent1"/>
+          </a:fillRef>
+          <a:effectRef idx="2">
+            <a:schemeClr val="accent1"/>
+          </a:effectRef>
+          <a:fontRef idx="minor">
+            <a:schemeClr val="lt1"/>
+          </a:fontRef>
+        </p:style>
+        <p:txBody>
+          <a:bodyPr rtlCol="0" anchor="ctr"/>
+          <a:lstStyle/>
+          <a:p>
+            <a:pPr algn="ctr"/>
+          </a:p>
+        </p:txBody>
+      </p:sp>
+      <p:sp>
+        <p:nvSpPr>
+          <p:cNvPr id="15" name="TextBox 14"/>
+          <p:cNvSpPr txBox="1"/>
+          <p:nvPr/>
+        </p:nvSpPr>
+        <p:spPr>
+          <a:xfrm>
+            <a:off x="6470751" y="2651760"/>
+            <a:ext cx="5025999" cy="1005840"/>
+          </a:xfrm>
+          <a:prstGeom prst="rect">
+            <a:avLst/>
+          </a:prstGeom>
+          <a:noFill/>
+        </p:spPr>
+        <p:txBody>
+          <a:bodyPr wrap="square" anchor="t" lIns="45720" rIns="45720" tIns="0" bIns="0">
+            <a:spAutoFit/>
+          </a:bodyPr>
+          <a:lstStyle/>
+          <a:p>
+            <a:pPr algn="l">
+              <a:lnSpc>
+                <a:spcPct val="102000"/>
+              </a:lnSpc>
+              <a:spcBef>
+                <a:spcPts val="0"/>
+              </a:spcBef>
+              <a:spcAft>
+                <a:spcPts val="300"/>
+              </a:spcAft>
+            </a:pPr>
+            <a:r>
+              <a:rPr sz="1500" b="1" i="0">
+                <a:solidFill>
+                  <a:srgbClr val="E0A32E"/>
+                </a:solidFill>
+                <a:latin typeface="Times New Roman"/>
+                <a:cs typeface="Times New Roman"/>
+              </a:rPr>
+              <a:t>②  </a:t>
+            </a:r>
+            <a:r>
+              <a:rPr sz="1500" b="1" i="0">
+                <a:solidFill>
+                  <a:srgbClr val="0E2A47"/>
+                </a:solidFill>
+                <a:latin typeface="Times New Roman"/>
+                <a:cs typeface="Times New Roman"/>
+              </a:rPr>
+              <a:t>Nested order</a:t>
+            </a:r>
+          </a:p>
+          <a:p>
+            <a:pPr algn="l">
+              <a:lnSpc>
+                <a:spcPct val="102000"/>
+              </a:lnSpc>
+              <a:spcBef>
+                <a:spcPts val="0"/>
+              </a:spcBef>
+              <a:spcAft>
+                <a:spcPts val="300"/>
+              </a:spcAft>
+            </a:pPr>
+            <a:r>
+              <a:rPr sz="1300" b="0" i="0">
+                <a:solidFill>
+                  <a:srgbClr val="222A33"/>
+                </a:solidFill>
+                <a:latin typeface="Times New Roman"/>
+                <a:cs typeface="Times New Roman"/>
+              </a:rPr>
+              <a:t>Every prefix must be good — the budget varies per token.</a:t>
+            </a:r>
+          </a:p>
+        </p:txBody>
+      </p:sp>
+      <p:sp>
+        <p:nvSpPr>
+          <p:cNvPr id="16" name="Rectangle 15"/>
+          <p:cNvSpPr/>
+          <p:nvPr/>
+        </p:nvSpPr>
+        <p:spPr>
+          <a:xfrm>
+            <a:off x="548640" y="3877056"/>
+            <a:ext cx="5410047" cy="1170432"/>
+          </a:xfrm>
+          <a:prstGeom prst="rect">
+            <a:avLst/>
+          </a:prstGeom>
+          <a:solidFill>
+            <a:srgbClr val="FFFFFF"/>
+          </a:solidFill>
+          <a:ln w="12700">
+            <a:solidFill>
+              <a:srgbClr val="D5DEE7"/>
+            </a:solidFill>
+          </a:ln>
+          <a:effectLst/>
+        </p:spPr>
+        <p:style>
+          <a:lnRef idx="1">
+            <a:schemeClr val="accent1"/>
+          </a:lnRef>
+          <a:fillRef idx="3">
+            <a:schemeClr val="accent1"/>
+          </a:fillRef>
+          <a:effectRef idx="2">
+            <a:schemeClr val="accent1"/>
+          </a:effectRef>
+          <a:fontRef idx="minor">
+            <a:schemeClr val="lt1"/>
+          </a:fontRef>
+        </p:style>
+        <p:txBody>
+          <a:bodyPr rtlCol="0" anchor="ctr"/>
+          <a:lstStyle/>
+          <a:p>
+            <a:pPr algn="ctr"/>
+          </a:p>
+        </p:txBody>
+      </p:sp>
+      <p:sp>
+        <p:nvSpPr>
+          <p:cNvPr id="17" name="Rectangle 16"/>
+          <p:cNvSpPr/>
+          <p:nvPr/>
+        </p:nvSpPr>
+        <p:spPr>
+          <a:xfrm>
+            <a:off x="548640" y="3877056"/>
+            <a:ext cx="109728" cy="1170432"/>
+          </a:xfrm>
+          <a:prstGeom prst="rect">
+            <a:avLst/>
+          </a:prstGeom>
+          <a:solidFill>
+            <a:srgbClr val="E0A32E"/>
+          </a:solidFill>
+          <a:ln>
+            <a:noFill/>
+          </a:ln>
+          <a:effectLst/>
+        </p:spPr>
+        <p:style>
+          <a:lnRef idx="1">
+            <a:schemeClr val="accent1"/>
+          </a:lnRef>
+          <a:fillRef idx="3">
+            <a:schemeClr val="accent1"/>
+          </a:fillRef>
+          <a:effectRef idx="2">
+            <a:schemeClr val="accent1"/>
+          </a:effectRef>
+          <a:fontRef idx="minor">
+            <a:schemeClr val="lt1"/>
+          </a:fontRef>
+        </p:style>
+        <p:txBody>
+          <a:bodyPr rtlCol="0" anchor="ctr"/>
+          <a:lstStyle/>
+          <a:p>
+            <a:pPr algn="ctr"/>
+          </a:p>
+        </p:txBody>
+      </p:sp>
+      <p:sp>
+        <p:nvSpPr>
+          <p:cNvPr id="18" name="TextBox 17"/>
+          <p:cNvSpPr txBox="1"/>
+          <p:nvPr/>
+        </p:nvSpPr>
+        <p:spPr>
+          <a:xfrm>
+            <a:off x="786384" y="3968496"/>
+            <a:ext cx="5025999" cy="1005840"/>
+          </a:xfrm>
+          <a:prstGeom prst="rect">
+            <a:avLst/>
+          </a:prstGeom>
+          <a:noFill/>
+        </p:spPr>
+        <p:txBody>
+          <a:bodyPr wrap="square" anchor="t" lIns="45720" rIns="45720" tIns="0" bIns="0">
+            <a:spAutoFit/>
+          </a:bodyPr>
+          <a:lstStyle/>
+          <a:p>
+            <a:pPr algn="l">
+              <a:lnSpc>
+                <a:spcPct val="102000"/>
+              </a:lnSpc>
+              <a:spcBef>
+                <a:spcPts val="0"/>
+              </a:spcBef>
+              <a:spcAft>
+                <a:spcPts val="300"/>
+              </a:spcAft>
+            </a:pPr>
+            <a:r>
+              <a:rPr sz="1500" b="1" i="0">
+                <a:solidFill>
+                  <a:srgbClr val="E0A32E"/>
+                </a:solidFill>
+                <a:latin typeface="Times New Roman"/>
+                <a:cs typeface="Times New Roman"/>
+              </a:rPr>
+              <a:t>③  </a:t>
+            </a:r>
+            <a:r>
+              <a:rPr sz="1500" b="1" i="0">
+                <a:solidFill>
+                  <a:srgbClr val="0E2A47"/>
+                </a:solidFill>
+                <a:latin typeface="Times New Roman"/>
+                <a:cs typeface="Times New Roman"/>
+              </a:rPr>
+              <a:t>Cross-expert comparable</a:t>
+            </a:r>
+          </a:p>
+          <a:p>
+            <a:pPr algn="l">
+              <a:lnSpc>
+                <a:spcPct val="102000"/>
+              </a:lnSpc>
+              <a:spcBef>
+                <a:spcPts val="0"/>
+              </a:spcBef>
+              <a:spcAft>
+                <a:spcPts val="300"/>
+              </a:spcAft>
+            </a:pPr>
+            <a:r>
+              <a:rPr sz="1300" b="0" i="0">
+                <a:solidFill>
+                  <a:srgbClr val="222A33"/>
+                </a:solidFill>
+                <a:latin typeface="Times New Roman"/>
+                <a:cs typeface="Times New Roman"/>
+              </a:rPr>
+              <a:t>One global threshold; per-expert quotas emerge on their own.</a:t>
+            </a:r>
+          </a:p>
+        </p:txBody>
+      </p:sp>
+      <p:sp>
+        <p:nvSpPr>
+          <p:cNvPr id="19" name="Rectangle 18"/>
+          <p:cNvSpPr/>
+          <p:nvPr/>
+        </p:nvSpPr>
+        <p:spPr>
+          <a:xfrm>
+            <a:off x="6233007" y="3877056"/>
+            <a:ext cx="5410047" cy="1170432"/>
+          </a:xfrm>
+          <a:prstGeom prst="rect">
+            <a:avLst/>
+          </a:prstGeom>
+          <a:solidFill>
+            <a:srgbClr val="FFFFFF"/>
+          </a:solidFill>
+          <a:ln w="12700">
+            <a:solidFill>
+              <a:srgbClr val="D5DEE7"/>
+            </a:solidFill>
+          </a:ln>
+          <a:effectLst/>
+        </p:spPr>
+        <p:style>
+          <a:lnRef idx="1">
+            <a:schemeClr val="accent1"/>
+          </a:lnRef>
+          <a:fillRef idx="3">
+            <a:schemeClr val="accent1"/>
+          </a:fillRef>
+          <a:effectRef idx="2">
+            <a:schemeClr val="accent1"/>
+          </a:effectRef>
+          <a:fontRef idx="minor">
+            <a:schemeClr val="lt1"/>
+          </a:fontRef>
+        </p:style>
+        <p:txBody>
+          <a:bodyPr rtlCol="0" anchor="ctr"/>
+          <a:lstStyle/>
+          <a:p>
+            <a:pPr algn="ctr"/>
+          </a:p>
+        </p:txBody>
+      </p:sp>
+      <p:sp>
+        <p:nvSpPr>
+          <p:cNvPr id="20" name="Rectangle 19"/>
+          <p:cNvSpPr/>
+          <p:nvPr/>
+        </p:nvSpPr>
+        <p:spPr>
+          <a:xfrm>
+            <a:off x="6233007" y="3877056"/>
+            <a:ext cx="109728" cy="1170432"/>
+          </a:xfrm>
+          <a:prstGeom prst="rect">
+            <a:avLst/>
+          </a:prstGeom>
+          <a:solidFill>
+            <a:srgbClr val="E0A32E"/>
+          </a:solidFill>
+          <a:ln>
+            <a:noFill/>
+          </a:ln>
+          <a:effectLst/>
+        </p:spPr>
+        <p:style>
+          <a:lnRef idx="1">
+            <a:schemeClr val="accent1"/>
+          </a:lnRef>
+          <a:fillRef idx="3">
+            <a:schemeClr val="accent1"/>
+          </a:fillRef>
+          <a:effectRef idx="2">
+            <a:schemeClr val="accent1"/>
+          </a:effectRef>
+          <a:fontRef idx="minor">
+            <a:schemeClr val="lt1"/>
+          </a:fontRef>
+        </p:style>
+        <p:txBody>
+          <a:bodyPr rtlCol="0" anchor="ctr"/>
+          <a:lstStyle/>
+          <a:p>
+            <a:pPr algn="ctr"/>
+          </a:p>
+        </p:txBody>
+      </p:sp>
+      <p:sp>
+        <p:nvSpPr>
+          <p:cNvPr id="21" name="TextBox 20"/>
+          <p:cNvSpPr txBox="1"/>
+          <p:nvPr/>
+        </p:nvSpPr>
+        <p:spPr>
+          <a:xfrm>
+            <a:off x="6470751" y="3968496"/>
+            <a:ext cx="5025999" cy="1005840"/>
+          </a:xfrm>
+          <a:prstGeom prst="rect">
+            <a:avLst/>
+          </a:prstGeom>
+          <a:noFill/>
+        </p:spPr>
+        <p:txBody>
+          <a:bodyPr wrap="square" anchor="t" lIns="45720" rIns="45720" tIns="0" bIns="0">
+            <a:spAutoFit/>
+          </a:bodyPr>
+          <a:lstStyle/>
+          <a:p>
+            <a:pPr algn="l">
+              <a:lnSpc>
+                <a:spcPct val="102000"/>
+              </a:lnSpc>
+              <a:spcBef>
+                <a:spcPts val="0"/>
+              </a:spcBef>
+              <a:spcAft>
+                <a:spcPts val="300"/>
+              </a:spcAft>
+            </a:pPr>
+            <a:r>
+              <a:rPr sz="1500" b="1" i="0">
+                <a:solidFill>
+                  <a:srgbClr val="E0A32E"/>
+                </a:solidFill>
+                <a:latin typeface="Times New Roman"/>
+                <a:cs typeface="Times New Roman"/>
+              </a:rPr>
+              <a:t>④  </a:t>
+            </a:r>
+            <a:r>
+              <a:rPr sz="1500" b="1" i="0">
+                <a:solidFill>
+                  <a:srgbClr val="0E2A47"/>
+                </a:solidFill>
+                <a:latin typeface="Times New Roman"/>
+                <a:cs typeface="Times New Roman"/>
+              </a:rPr>
+              <a:t>Reweightable by router</a:t>
+            </a:r>
+          </a:p>
+          <a:p>
+            <a:pPr algn="l">
+              <a:lnSpc>
+                <a:spcPct val="102000"/>
+              </a:lnSpc>
+              <a:spcBef>
+                <a:spcPts val="0"/>
+              </a:spcBef>
+              <a:spcAft>
+                <a:spcPts val="300"/>
+              </a:spcAft>
+            </a:pPr>
+            <a:r>
+              <a:rPr sz="1300" b="0" i="0">
+                <a:solidFill>
+                  <a:srgbClr val="222A33"/>
+                </a:solidFill>
+                <a:latin typeface="Times New Roman"/>
+                <a:cs typeface="Times New Roman"/>
+              </a:rPr>
+              <a:t>The only free online signal is the gate weight g_e(x).</a:t>
+            </a:r>
+          </a:p>
+        </p:txBody>
+      </p:sp>
+      <p:sp>
+        <p:nvSpPr>
+          <p:cNvPr id="22" name="Rectangle 21"/>
+          <p:cNvSpPr/>
+          <p:nvPr/>
+        </p:nvSpPr>
+        <p:spPr>
+          <a:xfrm>
+            <a:off x="548640" y="5193792"/>
+            <a:ext cx="11094415" cy="713232"/>
+          </a:xfrm>
+          <a:prstGeom prst="rect">
+            <a:avLst/>
+          </a:prstGeom>
+          <a:solidFill>
+            <a:srgbClr val="0E2A47"/>
+          </a:solidFill>
+          <a:ln>
+            <a:noFill/>
+          </a:ln>
+          <a:effectLst/>
+        </p:spPr>
+        <p:style>
+          <a:lnRef idx="1">
+            <a:schemeClr val="accent1"/>
+          </a:lnRef>
+          <a:fillRef idx="3">
+            <a:schemeClr val="accent1"/>
+          </a:fillRef>
+          <a:effectRef idx="2">
+            <a:schemeClr val="accent1"/>
+          </a:effectRef>
+          <a:fontRef idx="minor">
+            <a:schemeClr val="lt1"/>
+          </a:fontRef>
+        </p:style>
+        <p:txBody>
+          <a:bodyPr rtlCol="0" anchor="ctr"/>
+          <a:lstStyle/>
+          <a:p>
+            <a:pPr algn="ctr"/>
+          </a:p>
+        </p:txBody>
+      </p:sp>
+      <p:sp>
+        <p:nvSpPr>
+          <p:cNvPr id="23" name="Rectangle 22"/>
+          <p:cNvSpPr/>
+          <p:nvPr/>
+        </p:nvSpPr>
+        <p:spPr>
+          <a:xfrm>
+            <a:off x="548640" y="5193792"/>
+            <a:ext cx="128016" cy="713232"/>
+          </a:xfrm>
+          <a:prstGeom prst="rect">
+            <a:avLst/>
+          </a:prstGeom>
+          <a:solidFill>
+            <a:srgbClr val="E0A32E"/>
+          </a:solidFill>
+          <a:ln>
+            <a:noFill/>
+          </a:ln>
+          <a:effectLst/>
+        </p:spPr>
+        <p:style>
+          <a:lnRef idx="1">
+            <a:schemeClr val="accent1"/>
+          </a:lnRef>
+          <a:fillRef idx="3">
+            <a:schemeClr val="accent1"/>
+          </a:fillRef>
+          <a:effectRef idx="2">
+            <a:schemeClr val="accent1"/>
+          </a:effectRef>
+          <a:fontRef idx="minor">
+            <a:schemeClr val="lt1"/>
+          </a:fontRef>
+        </p:style>
+        <p:txBody>
+          <a:bodyPr rtlCol="0" anchor="ctr"/>
+          <a:lstStyle/>
+          <a:p>
+            <a:pPr algn="ctr"/>
+          </a:p>
+        </p:txBody>
+      </p:sp>
+      <p:sp>
+        <p:nvSpPr>
+          <p:cNvPr id="24" name="TextBox 23"/>
+          <p:cNvSpPr txBox="1"/>
+          <p:nvPr/>
+        </p:nvSpPr>
+        <p:spPr>
+          <a:xfrm>
+            <a:off x="868680" y="5285231"/>
+            <a:ext cx="10454335" cy="548640"/>
+          </a:xfrm>
+          <a:prstGeom prst="rect">
+            <a:avLst/>
+          </a:prstGeom>
+          <a:noFill/>
+        </p:spPr>
+        <p:txBody>
+          <a:bodyPr wrap="square" anchor="ctr" lIns="45720" rIns="45720" tIns="0" bIns="0">
+            <a:spAutoFit/>
+          </a:bodyPr>
+          <a:lstStyle/>
+          <a:p>
+            <a:pPr algn="l">
+              <a:lnSpc>
+                <a:spcPct val="105000"/>
+              </a:lnSpc>
+              <a:spcBef>
+                <a:spcPts val="0"/>
+              </a:spcBef>
+              <a:spcAft>
+                <a:spcPts val="500"/>
+              </a:spcAft>
+            </a:pPr>
+            <a:r>
+              <a:rPr sz="1600" b="1" i="0">
+                <a:solidFill>
+                  <a:srgbClr val="E0A32E"/>
+                </a:solidFill>
+                <a:latin typeface="Times New Roman"/>
+                <a:cs typeface="Times New Roman"/>
+              </a:rPr>
+              <a:t>Payoff if it worked: </a:t>
+            </a:r>
+            <a:r>
+              <a:rPr sz="1600" b="0" i="0">
+                <a:solidFill>
+                  <a:srgbClr val="FFFFFF"/>
+                </a:solidFill>
+                <a:latin typeface="Times New Roman"/>
+                <a:cs typeface="Times New Roman"/>
+              </a:rPr>
+              <a:t>all three matrices narrow, “keep top-B” is a contiguous prefix slice, and the online cost is ≈ 0.</a:t>
+            </a:r>
+          </a:p>
+        </p:txBody>
+      </p:sp>
+    </p:spTree>
+  </p:cSld>
+  <p:clrMapOvr>
+    <a:masterClrMapping/>
+  </p:clrMapOvr>
+</p:sld>
+</file>
+
+<file path=ppt/slides/slide9.xml><?xml version="1.0" encoding="utf-8"?>
+<p:sld xmlns:a="http://schemas.openxmlformats.org/drawingml/2006/main" xmlns:p="http://schemas.openxmlformats.org/presentationml/2006/main" xmlns:r="http://schemas.openxmlformats.org/officeDocument/2006/relationships">
+  <p:cSld>
+    <p:bg>
+      <p:bgPr>
+        <a:solidFill>
+          <a:srgbClr val="F4F6F9"/>
+        </a:solidFill>
+        <a:effectLst/>
+      </p:bgPr>
+    </p:bg>
+    <p:spTree>
+      <p:nvGrpSpPr>
+        <p:cNvPr id="1" name=""/>
+        <p:cNvGrpSpPr/>
+        <p:nvPr/>
+      </p:nvGrpSpPr>
+      <p:grpSpPr/>
+      <p:sp>
+        <p:nvSpPr>
+          <p:cNvPr id="2" name="Rectangle 1"/>
+          <p:cNvSpPr/>
+          <p:nvPr/>
+        </p:nvSpPr>
+        <p:spPr>
+          <a:xfrm>
+            <a:off x="548640" y="310896"/>
+            <a:ext cx="128016" cy="566928"/>
+          </a:xfrm>
+          <a:prstGeom prst="rect">
+            <a:avLst/>
+          </a:prstGeom>
+          <a:solidFill>
+            <a:srgbClr val="E0A32E"/>
+          </a:solidFill>
+          <a:ln>
+            <a:noFill/>
+          </a:ln>
+          <a:effectLst/>
+        </p:spPr>
+        <p:style>
+          <a:lnRef idx="1">
+            <a:schemeClr val="accent1"/>
+          </a:lnRef>
+          <a:fillRef idx="3">
+            <a:schemeClr val="accent1"/>
+          </a:fillRef>
+          <a:effectRef idx="2">
+            <a:schemeClr val="accent1"/>
+          </a:effectRef>
+          <a:fontRef idx="minor">
+            <a:schemeClr val="lt1"/>
+          </a:fontRef>
+        </p:style>
+        <p:txBody>
+          <a:bodyPr rtlCol="0" anchor="ctr"/>
+          <a:lstStyle/>
+          <a:p>
+            <a:pPr algn="ctr"/>
+          </a:p>
+        </p:txBody>
+      </p:sp>
+      <p:sp>
+        <p:nvSpPr>
+          <p:cNvPr id="3" name="TextBox 2"/>
+          <p:cNvSpPr txBox="1"/>
+          <p:nvPr/>
+        </p:nvSpPr>
+        <p:spPr>
+          <a:xfrm>
+            <a:off x="822959" y="201168"/>
+            <a:ext cx="10820095" cy="786384"/>
+          </a:xfrm>
+          <a:prstGeom prst="rect">
+            <a:avLst/>
+          </a:prstGeom>
+          <a:noFill/>
+        </p:spPr>
+        <p:txBody>
+          <a:bodyPr wrap="square" anchor="ctr" lIns="45720" rIns="45720" tIns="0" bIns="0">
+            <a:spAutoFit/>
+          </a:bodyPr>
+          <a:lstStyle/>
+          <a:p>
+            <a:pPr algn="l">
+              <a:lnSpc>
+                <a:spcPct val="100000"/>
+              </a:lnSpc>
+              <a:spcBef>
+                <a:spcPts val="0"/>
+              </a:spcBef>
+              <a:spcAft>
+                <a:spcPts val="600"/>
+              </a:spcAft>
+            </a:pPr>
+            <a:r>
+              <a:rPr sz="3000" b="1" i="0">
+                <a:solidFill>
+                  <a:srgbClr val="0E2A47"/>
+                </a:solidFill>
+                <a:latin typeface="Times New Roman"/>
+                <a:cs typeface="Times New Roman"/>
+              </a:rPr>
+              <a:t>Pivoted-Cholesky: Greedy, Conditional Selection</a:t>
+            </a:r>
+          </a:p>
+        </p:txBody>
+      </p:sp>
+      <p:sp>
+        <p:nvSpPr>
+          <p:cNvPr id="4" name="TextBox 3"/>
+          <p:cNvSpPr txBox="1"/>
+          <p:nvPr/>
+        </p:nvSpPr>
+        <p:spPr>
+          <a:xfrm>
+            <a:off x="548640" y="1078992"/>
+            <a:ext cx="11094415" cy="457200"/>
+          </a:xfrm>
+          <a:prstGeom prst="rect">
+            <a:avLst/>
+          </a:prstGeom>
+          <a:noFill/>
+        </p:spPr>
+        <p:txBody>
+          <a:bodyPr wrap="square" anchor="t" lIns="45720" rIns="45720" tIns="0" bIns="0">
+            <a:spAutoFit/>
+          </a:bodyPr>
+          <a:lstStyle/>
+          <a:p>
+            <a:pPr algn="l">
+              <a:lnSpc>
+                <a:spcPct val="100000"/>
+              </a:lnSpc>
+              <a:spcBef>
+                <a:spcPts val="0"/>
+              </a:spcBef>
+              <a:spcAft>
+                <a:spcPts val="600"/>
+              </a:spcAft>
+            </a:pPr>
+            <a:r>
+              <a:rPr sz="2000" b="1" i="0">
+                <a:solidFill>
+                  <a:srgbClr val="1C7293"/>
+                </a:solidFill>
+                <a:latin typeface="Times New Roman"/>
+                <a:cs typeface="Times New Roman"/>
+              </a:rPr>
+              <a:t>Pick the most important channel, then subtract what it already explains</a:t>
+            </a:r>
+          </a:p>
+        </p:txBody>
+      </p:sp>
+      <p:pic>
+        <p:nvPicPr>
+          <p:cNvPr id="5" name="Picture 4" descr="amazon_logo.png"/>
+          <p:cNvPicPr>
+            <a:picLocks noChangeAspect="1"/>
+          </p:cNvPicPr>
+          <p:nvPr/>
+        </p:nvPicPr>
+        <p:blipFill>
+          <a:blip r:embed="rId2"/>
+          <a:stretch>
+            <a:fillRect/>
+          </a:stretch>
+        </p:blipFill>
+        <p:spPr>
+          <a:xfrm>
+            <a:off x="192024" y="6309360"/>
+            <a:ext cx="1463040" cy="440740"/>
+          </a:xfrm>
+          <a:prstGeom prst="rect">
+            <a:avLst/>
+          </a:prstGeom>
+        </p:spPr>
+      </p:pic>
+      <p:sp>
+        <p:nvSpPr>
+          <p:cNvPr id="6" name="Rectangle 5"/>
+          <p:cNvSpPr/>
+          <p:nvPr/>
+        </p:nvSpPr>
+        <p:spPr>
+          <a:xfrm>
+            <a:off x="11140135" y="6400800"/>
+            <a:ext cx="109728" cy="237744"/>
+          </a:xfrm>
+          <a:prstGeom prst="rect">
+            <a:avLst/>
+          </a:prstGeom>
+          <a:solidFill>
+            <a:srgbClr val="E0A32E"/>
+          </a:solidFill>
+          <a:ln>
+            <a:noFill/>
+          </a:ln>
+          <a:effectLst/>
+        </p:spPr>
+        <p:style>
+          <a:lnRef idx="1">
+            <a:schemeClr val="accent1"/>
+          </a:lnRef>
+          <a:fillRef idx="3">
+            <a:schemeClr val="accent1"/>
+          </a:fillRef>
+          <a:effectRef idx="2">
+            <a:schemeClr val="accent1"/>
+          </a:effectRef>
+          <a:fontRef idx="minor">
+            <a:schemeClr val="lt1"/>
+          </a:fontRef>
+        </p:style>
+        <p:txBody>
+          <a:bodyPr rtlCol="0" anchor="ctr"/>
+          <a:lstStyle/>
+          <a:p>
+            <a:pPr algn="ctr"/>
+          </a:p>
+        </p:txBody>
+      </p:sp>
+      <p:sp>
+        <p:nvSpPr>
+          <p:cNvPr id="7" name="TextBox 6"/>
+          <p:cNvSpPr txBox="1"/>
+          <p:nvPr/>
+        </p:nvSpPr>
+        <p:spPr>
+          <a:xfrm>
+            <a:off x="11323015" y="6364224"/>
+            <a:ext cx="685800" cy="320040"/>
+          </a:xfrm>
+          <a:prstGeom prst="rect">
+            <a:avLst/>
+          </a:prstGeom>
+          <a:noFill/>
+        </p:spPr>
+        <p:txBody>
+          <a:bodyPr wrap="square" anchor="ctr" lIns="45720" rIns="45720" tIns="0" bIns="0">
+            <a:spAutoFit/>
+          </a:bodyPr>
+          <a:lstStyle/>
+          <a:p>
+            <a:pPr algn="l">
+              <a:lnSpc>
+                <a:spcPct val="100000"/>
+              </a:lnSpc>
+              <a:spcBef>
+                <a:spcPts val="0"/>
+              </a:spcBef>
+              <a:spcAft>
+                <a:spcPts val="600"/>
+              </a:spcAft>
+            </a:pPr>
+            <a:r>
+              <a:rPr sz="1200" b="1" i="0">
+                <a:solidFill>
+                  <a:srgbClr val="5C6B7A"/>
+                </a:solidFill>
+                <a:latin typeface="Times New Roman"/>
+                <a:cs typeface="Times New Roman"/>
+              </a:rPr>
+              <a:t>8</a:t>
+            </a:r>
+          </a:p>
+        </p:txBody>
+      </p:sp>
+      <p:sp>
+        <p:nvSpPr>
+          <p:cNvPr id="8" name="TextBox 7"/>
+          <p:cNvSpPr txBox="1"/>
+          <p:nvPr/>
+        </p:nvSpPr>
+        <p:spPr>
+          <a:xfrm>
+            <a:off x="1828800" y="6382512"/>
+            <a:ext cx="8229600" cy="320040"/>
+          </a:xfrm>
+          <a:prstGeom prst="rect">
+            <a:avLst/>
+          </a:prstGeom>
+          <a:noFill/>
+        </p:spPr>
+        <p:txBody>
+          <a:bodyPr wrap="square" anchor="ctr" lIns="45720" rIns="45720" tIns="0" bIns="0">
+            <a:spAutoFit/>
+          </a:bodyPr>
+          <a:lstStyle/>
+          <a:p>
+            <a:pPr algn="l">
+              <a:lnSpc>
+                <a:spcPct val="100000"/>
+              </a:lnSpc>
+              <a:spcBef>
+                <a:spcPts val="0"/>
+              </a:spcBef>
+              <a:spcAft>
+                <a:spcPts val="600"/>
+              </a:spcAft>
+            </a:pPr>
+            <a:r>
+              <a:rPr sz="1100" b="0" i="1">
+                <a:solidFill>
+                  <a:srgbClr val="5C6B7A"/>
+                </a:solidFill>
+                <a:latin typeface="Times New Roman"/>
+                <a:cs typeface="Times New Roman"/>
+              </a:rPr>
+              <a:t>Per-Token Adaptive Channel Activation for MoE</a:t>
+            </a:r>
+          </a:p>
+        </p:txBody>
+      </p:sp>
+      <p:sp>
+        <p:nvSpPr>
+          <p:cNvPr id="9" name="TextBox 8"/>
+          <p:cNvSpPr txBox="1"/>
+          <p:nvPr/>
+        </p:nvSpPr>
+        <p:spPr>
+          <a:xfrm>
+            <a:off x="548640" y="1664208"/>
+            <a:ext cx="11094415" cy="1097280"/>
+          </a:xfrm>
+          <a:prstGeom prst="rect">
+            <a:avLst/>
+          </a:prstGeom>
+          <a:noFill/>
+        </p:spPr>
+        <p:txBody>
+          <a:bodyPr wrap="square" lIns="0" rIns="0" tIns="0" bIns="0">
+            <a:spAutoFit/>
+          </a:bodyPr>
+          <a:lstStyle/>
+          <a:p>
+            <a:pPr indent="-256032" marL="256032">
+              <a:lnSpc>
+                <a:spcPct val="105000"/>
+              </a:lnSpc>
+              <a:spcBef>
+                <a:spcPts val="0"/>
+              </a:spcBef>
+              <a:spcAft>
+                <a:spcPts val="800"/>
+              </a:spcAft>
+              <a:buClr>
+                <a:srgbClr val="E0A32E"/>
+              </a:buClr>
+              <a:buFont typeface="Times New Roman"/>
+              <a:buChar char="▪"/>
+            </a:pPr>
+            <a:r>
+              <a:rPr sz="1600" b="0" i="0">
+                <a:solidFill>
+                  <a:srgbClr val="222A33"/>
+                </a:solidFill>
+                <a:latin typeface="Times New Roman"/>
+                <a:cs typeface="Times New Roman"/>
+              </a:rPr>
+              <a:t>Build a per-expert </a:t>
+            </a:r>
+            <a:r>
+              <a:rPr sz="1600" b="1" i="0">
+                <a:solidFill>
+                  <a:srgbClr val="0E2A47"/>
+                </a:solidFill>
+                <a:latin typeface="Times New Roman"/>
+                <a:cs typeface="Times New Roman"/>
+              </a:rPr>
+              <a:t>coupling matrix</a:t>
+            </a:r>
+            <a:r>
+              <a:rPr sz="1600" b="0" i="0">
+                <a:solidFill>
+                  <a:srgbClr val="222A33"/>
+                </a:solidFill>
+                <a:latin typeface="Times New Roman"/>
+                <a:cs typeface="Times New Roman"/>
+              </a:rPr>
+              <a:t> (activation covariance ⊙ weight Gram), then run pivoted Cholesky: greedily select the largest-residual channel and </a:t>
+            </a:r>
+            <a:r>
+              <a:rPr sz="1600" b="1" i="0">
+                <a:solidFill>
+                  <a:srgbClr val="1C7293"/>
+                </a:solidFill>
+                <a:latin typeface="Times New Roman"/>
+                <a:cs typeface="Times New Roman"/>
+              </a:rPr>
+              <a:t>downdate</a:t>
+            </a:r>
+            <a:r>
+              <a:rPr sz="1600" b="0" i="0">
+                <a:solidFill>
+                  <a:srgbClr val="222A33"/>
+                </a:solidFill>
+                <a:latin typeface="Times New Roman"/>
+                <a:cs typeface="Times New Roman"/>
+              </a:rPr>
+              <a:t> every remaining channel by what the chosen one explains.</a:t>
+            </a:r>
+          </a:p>
+          <a:p>
+            <a:pPr indent="-256032" marL="256032">
+              <a:lnSpc>
+                <a:spcPct val="105000"/>
+              </a:lnSpc>
+              <a:spcBef>
+                <a:spcPts val="0"/>
+              </a:spcBef>
+              <a:spcAft>
+                <a:spcPts val="800"/>
+              </a:spcAft>
+              <a:buClr>
+                <a:srgbClr val="E0A32E"/>
+              </a:buClr>
+              <a:buFont typeface="Times New Roman"/>
+              <a:buChar char="▪"/>
+            </a:pPr>
+            <a:r>
+              <a:rPr sz="1600" b="1" i="0">
+                <a:solidFill>
+                  <a:srgbClr val="0E2A47"/>
+                </a:solidFill>
+                <a:latin typeface="Times New Roman"/>
+                <a:cs typeface="Times New Roman"/>
+              </a:rPr>
+              <a:t>Duplicates collapse to ≈ 0</a:t>
+            </a:r>
+            <a:r>
+              <a:rPr sz="1600" b="0" i="0">
+                <a:solidFill>
+                  <a:srgbClr val="222A33"/>
+                </a:solidFill>
+                <a:latin typeface="Times New Roman"/>
+                <a:cs typeface="Times New Roman"/>
+              </a:rPr>
+              <a:t> — a channel already explained is never picked again.</a:t>
+            </a:r>
+          </a:p>
+        </p:txBody>
+      </p:sp>
+      <p:sp>
+        <p:nvSpPr>
+          <p:cNvPr id="10" name="Rectangle 9"/>
+          <p:cNvSpPr/>
+          <p:nvPr/>
+        </p:nvSpPr>
+        <p:spPr>
+          <a:xfrm>
+            <a:off x="548640" y="3081528"/>
+            <a:ext cx="11094415" cy="786384"/>
+          </a:xfrm>
+          <a:prstGeom prst="rect">
+            <a:avLst/>
+          </a:prstGeom>
+          <a:solidFill>
+            <a:srgbClr val="FFFFFF"/>
+          </a:solidFill>
+          <a:ln w="12700">
+            <a:solidFill>
+              <a:srgbClr val="D5DEE7"/>
+            </a:solidFill>
+          </a:ln>
+          <a:effectLst/>
+        </p:spPr>
+        <p:style>
+          <a:lnRef idx="1">
+            <a:schemeClr val="accent1"/>
+          </a:lnRef>
+          <a:fillRef idx="3">
+            <a:schemeClr val="accent1"/>
+          </a:fillRef>
+          <a:effectRef idx="2">
+            <a:schemeClr val="accent1"/>
+          </a:effectRef>
+          <a:fontRef idx="minor">
+            <a:schemeClr val="lt1"/>
+          </a:fontRef>
+        </p:style>
+        <p:txBody>
+          <a:bodyPr rtlCol="0" anchor="ctr"/>
+          <a:lstStyle/>
+          <a:p>
+            <a:pPr algn="ctr"/>
+          </a:p>
+        </p:txBody>
+      </p:sp>
+      <p:sp>
+        <p:nvSpPr>
+          <p:cNvPr id="11" name="Rectangle 10"/>
+          <p:cNvSpPr/>
+          <p:nvPr/>
+        </p:nvSpPr>
+        <p:spPr>
+          <a:xfrm>
+            <a:off x="548640" y="3081528"/>
+            <a:ext cx="128016" cy="786384"/>
+          </a:xfrm>
+          <a:prstGeom prst="rect">
+            <a:avLst/>
+          </a:prstGeom>
+          <a:solidFill>
+            <a:srgbClr val="E0A32E"/>
+          </a:solidFill>
+          <a:ln>
+            <a:noFill/>
+          </a:ln>
+          <a:effectLst/>
+        </p:spPr>
+        <p:style>
+          <a:lnRef idx="1">
+            <a:schemeClr val="accent1"/>
+          </a:lnRef>
+          <a:fillRef idx="3">
+            <a:schemeClr val="accent1"/>
+          </a:fillRef>
+          <a:effectRef idx="2">
+            <a:schemeClr val="accent1"/>
+          </a:effectRef>
+          <a:fontRef idx="minor">
+            <a:schemeClr val="lt1"/>
+          </a:fontRef>
+        </p:style>
+        <p:txBody>
+          <a:bodyPr rtlCol="0" anchor="ctr"/>
+          <a:lstStyle/>
+          <a:p>
+            <a:pPr algn="ctr"/>
+          </a:p>
+        </p:txBody>
+      </p:sp>
+      <p:sp>
+        <p:nvSpPr>
+          <p:cNvPr id="12" name="TextBox 11"/>
+          <p:cNvSpPr txBox="1"/>
+          <p:nvPr/>
+        </p:nvSpPr>
+        <p:spPr>
+          <a:xfrm>
+            <a:off x="841247" y="3172968"/>
+            <a:ext cx="10545775" cy="603504"/>
+          </a:xfrm>
+          <a:prstGeom prst="rect">
+            <a:avLst/>
+          </a:prstGeom>
+          <a:noFill/>
+        </p:spPr>
+        <p:txBody>
+          <a:bodyPr wrap="square" anchor="t" lIns="45720" rIns="45720" tIns="0" bIns="0">
+            <a:spAutoFit/>
+          </a:bodyPr>
+          <a:lstStyle/>
+          <a:p>
+            <a:pPr algn="l">
+              <a:lnSpc>
+                <a:spcPct val="100000"/>
+              </a:lnSpc>
+              <a:spcBef>
+                <a:spcPts val="0"/>
+              </a:spcBef>
+              <a:spcAft>
+                <a:spcPts val="300"/>
+              </a:spcAft>
+            </a:pPr>
+            <a:r>
+              <a:rPr sz="1900" b="1" i="0">
+                <a:solidFill>
+                  <a:srgbClr val="0E2A47"/>
+                </a:solidFill>
+                <a:latin typeface="Consolas"/>
+                <a:cs typeface="Consolas"/>
+              </a:rPr>
+              <a:t>Online score:   g²(x) · σ</a:t>
+            </a:r>
+            <a:r>
+              <a:rPr sz="1300" b="1" i="0">
+                <a:solidFill>
+                  <a:srgbClr val="0E2A47"/>
+                </a:solidFill>
+                <a:latin typeface="Consolas"/>
+                <a:cs typeface="Consolas"/>
+              </a:rPr>
+              <a:t>e,r</a:t>
+            </a:r>
+            <a:r>
+              <a:rPr sz="1900" b="1" i="0">
+                <a:solidFill>
+                  <a:srgbClr val="0E2A47"/>
+                </a:solidFill>
+                <a:latin typeface="Consolas"/>
+                <a:cs typeface="Consolas"/>
+              </a:rPr>
+              <a:t>        keep global top-B</a:t>
+            </a:r>
+          </a:p>
+          <a:p>
+            <a:pPr algn="l">
+              <a:lnSpc>
+                <a:spcPct val="100000"/>
+              </a:lnSpc>
+              <a:spcBef>
+                <a:spcPts val="0"/>
+              </a:spcBef>
+              <a:spcAft>
+                <a:spcPts val="300"/>
+              </a:spcAft>
+            </a:pPr>
+            <a:r>
+              <a:rPr sz="1300" b="0" i="0">
+                <a:solidFill>
+                  <a:srgbClr val="5C6B7A"/>
+                </a:solidFill>
+                <a:latin typeface="Consolas"/>
+                <a:cs typeface="Consolas"/>
+              </a:rPr>
+              <a:t>router weight  ×  precomputed marginal gain</a:t>
+            </a:r>
+          </a:p>
+        </p:txBody>
+      </p:sp>
+      <p:sp>
+        <p:nvSpPr>
+          <p:cNvPr id="13" name="TextBox 12"/>
+          <p:cNvSpPr txBox="1"/>
+          <p:nvPr/>
+        </p:nvSpPr>
+        <p:spPr>
+          <a:xfrm>
+            <a:off x="548640" y="4014216"/>
+            <a:ext cx="11094415" cy="1737360"/>
+          </a:xfrm>
+          <a:prstGeom prst="rect">
+            <a:avLst/>
+          </a:prstGeom>
+          <a:noFill/>
+        </p:spPr>
+        <p:txBody>
+          <a:bodyPr wrap="square" lIns="0" rIns="0" tIns="0" bIns="0">
+            <a:spAutoFit/>
+          </a:bodyPr>
+          <a:lstStyle/>
+          <a:p>
+            <a:pPr indent="-256032" marL="256032">
+              <a:lnSpc>
+                <a:spcPct val="105000"/>
+              </a:lnSpc>
+              <a:spcBef>
+                <a:spcPts val="0"/>
+              </a:spcBef>
+              <a:spcAft>
+                <a:spcPts val="800"/>
+              </a:spcAft>
+              <a:buClr>
+                <a:srgbClr val="E0A32E"/>
+              </a:buClr>
+              <a:buFont typeface="Times New Roman"/>
+              <a:buChar char="▪"/>
+            </a:pPr>
+            <a:r>
+              <a:rPr sz="1600" b="0" i="0">
+                <a:solidFill>
+                  <a:srgbClr val="222A33"/>
+                </a:solidFill>
+                <a:latin typeface="Times New Roman"/>
+                <a:cs typeface="Times New Roman"/>
+              </a:rPr>
+              <a:t>Pivot order is </a:t>
+            </a:r>
+            <a:r>
+              <a:rPr sz="1600" b="1" i="0">
+                <a:solidFill>
+                  <a:srgbClr val="0E2A47"/>
+                </a:solidFill>
+                <a:latin typeface="Times New Roman"/>
+                <a:cs typeface="Times New Roman"/>
+              </a:rPr>
+              <a:t>nested and monotone</a:t>
+            </a:r>
+            <a:r>
+              <a:rPr sz="1600" b="0" i="0">
+                <a:solidFill>
+                  <a:srgbClr val="222A33"/>
+                </a:solidFill>
+                <a:latin typeface="Times New Roman"/>
+                <a:cs typeface="Times New Roman"/>
+              </a:rPr>
+              <a:t> → a single global threshold cuts a clean prefix.</a:t>
+            </a:r>
+          </a:p>
+          <a:p>
+            <a:pPr indent="-256032" marL="256032">
+              <a:lnSpc>
+                <a:spcPct val="105000"/>
+              </a:lnSpc>
+              <a:spcBef>
+                <a:spcPts val="0"/>
+              </a:spcBef>
+              <a:spcAft>
+                <a:spcPts val="800"/>
+              </a:spcAft>
+              <a:buClr>
+                <a:srgbClr val="E0A32E"/>
+              </a:buClr>
+              <a:buFont typeface="Times New Roman"/>
+              <a:buChar char="▪"/>
+            </a:pPr>
+            <a:r>
+              <a:rPr sz="1600" b="0" i="0">
+                <a:solidFill>
+                  <a:srgbClr val="222A33"/>
+                </a:solidFill>
+                <a:latin typeface="Times New Roman"/>
+                <a:cs typeface="Times New Roman"/>
+              </a:rPr>
+              <a:t>Budget-agnostic: stored once (~57 MB), no weight modified.</a:t>
+            </a:r>
+          </a:p>
+          <a:p>
+            <a:pPr indent="-256032" marL="256032">
+              <a:lnSpc>
+                <a:spcPct val="105000"/>
+              </a:lnSpc>
+              <a:spcBef>
+                <a:spcPts val="0"/>
+              </a:spcBef>
+              <a:spcAft>
+                <a:spcPts val="800"/>
+              </a:spcAft>
+              <a:buClr>
+                <a:srgbClr val="E0A32E"/>
+              </a:buClr>
+              <a:buFont typeface="Times New Roman"/>
+              <a:buChar char="▪"/>
+            </a:pPr>
+            <a:r>
+              <a:rPr sz="1600" b="0" i="0">
+                <a:solidFill>
+                  <a:srgbClr val="222A33"/>
+                </a:solidFill>
+                <a:latin typeface="Times New Roman"/>
+                <a:cs typeface="Times New Roman"/>
+              </a:rPr>
+              <a:t>Overhead ≈ </a:t>
+            </a:r>
+            <a:r>
+              <a:rPr sz="1600" b="1" i="0">
+                <a:solidFill>
+                  <a:srgbClr val="1C7293"/>
+                </a:solidFill>
+                <a:latin typeface="Times New Roman"/>
+                <a:cs typeface="Times New Roman"/>
+              </a:rPr>
+              <a:t>0.016%</a:t>
+            </a:r>
+            <a:r>
+              <a:rPr sz="1600" b="0" i="0">
+                <a:solidFill>
+                  <a:srgbClr val="222A33"/>
+                </a:solidFill>
+                <a:latin typeface="Times New Roman"/>
+                <a:cs typeface="Times New Roman"/>
+              </a:rPr>
+              <a:t> of expert-FFN MACs.</a:t>
+            </a:r>
+          </a:p>
+        </p:txBody>
+      </p:sp>
+      <p:sp>
+        <p:nvSpPr>
+          <p:cNvPr id="14" name="Rectangle 13"/>
+          <p:cNvSpPr/>
+          <p:nvPr/>
+        </p:nvSpPr>
+        <p:spPr>
+          <a:xfrm>
+            <a:off x="548640" y="5504688"/>
+            <a:ext cx="11094415" cy="731520"/>
+          </a:xfrm>
+          <a:prstGeom prst="rect">
+            <a:avLst/>
+          </a:prstGeom>
+          <a:solidFill>
+            <a:srgbClr val="0E2A47"/>
+          </a:solidFill>
+          <a:ln>
+            <a:noFill/>
+          </a:ln>
+          <a:effectLst/>
+        </p:spPr>
+        <p:style>
+          <a:lnRef idx="1">
+            <a:schemeClr val="accent1"/>
+          </a:lnRef>
+          <a:fillRef idx="3">
+            <a:schemeClr val="accent1"/>
+          </a:fillRef>
+          <a:effectRef idx="2">
+            <a:schemeClr val="accent1"/>
+          </a:effectRef>
+          <a:fontRef idx="minor">
+            <a:schemeClr val="lt1"/>
+          </a:fontRef>
+        </p:style>
+        <p:txBody>
+          <a:bodyPr rtlCol="0" anchor="ctr"/>
+          <a:lstStyle/>
+          <a:p>
+            <a:pPr algn="ctr"/>
+          </a:p>
+        </p:txBody>
+      </p:sp>
+      <p:sp>
+        <p:nvSpPr>
+          <p:cNvPr id="15" name="Rectangle 14"/>
+          <p:cNvSpPr/>
+          <p:nvPr/>
+        </p:nvSpPr>
+        <p:spPr>
+          <a:xfrm>
+            <a:off x="548640" y="5504688"/>
+            <a:ext cx="128016" cy="731520"/>
+          </a:xfrm>
+          <a:prstGeom prst="rect">
+            <a:avLst/>
+          </a:prstGeom>
+          <a:solidFill>
+            <a:srgbClr val="E0A32E"/>
+          </a:solidFill>
+          <a:ln>
+            <a:noFill/>
+          </a:ln>
+          <a:effectLst/>
+        </p:spPr>
+        <p:style>
+          <a:lnRef idx="1">
+            <a:schemeClr val="accent1"/>
+          </a:lnRef>
+          <a:fillRef idx="3">
+            <a:schemeClr val="accent1"/>
+          </a:fillRef>
+          <a:effectRef idx="2">
+            <a:schemeClr val="accent1"/>
+          </a:effectRef>
+          <a:fontRef idx="minor">
+            <a:schemeClr val="lt1"/>
+          </a:fontRef>
+        </p:style>
+        <p:txBody>
+          <a:bodyPr rtlCol="0" anchor="ctr"/>
+          <a:lstStyle/>
+          <a:p>
+            <a:pPr algn="ctr"/>
+          </a:p>
+        </p:txBody>
+      </p:sp>
+      <p:sp>
+        <p:nvSpPr>
+          <p:cNvPr id="16" name="TextBox 15"/>
+          <p:cNvSpPr txBox="1"/>
+          <p:nvPr/>
+        </p:nvSpPr>
+        <p:spPr>
+          <a:xfrm>
+            <a:off x="868680" y="5596128"/>
+            <a:ext cx="10454335" cy="566928"/>
+          </a:xfrm>
+          <a:prstGeom prst="rect">
+            <a:avLst/>
+          </a:prstGeom>
+          <a:noFill/>
+        </p:spPr>
+        <p:txBody>
+          <a:bodyPr wrap="square" anchor="ctr" lIns="45720" rIns="45720" tIns="0" bIns="0">
+            <a:spAutoFit/>
+          </a:bodyPr>
+          <a:lstStyle/>
+          <a:p>
+            <a:pPr algn="l">
+              <a:lnSpc>
+                <a:spcPct val="105000"/>
+              </a:lnSpc>
+              <a:spcBef>
+                <a:spcPts val="0"/>
+              </a:spcBef>
+              <a:spcAft>
+                <a:spcPts val="500"/>
+              </a:spcAft>
+            </a:pPr>
+            <a:r>
+              <a:rPr sz="1700" b="0" i="0">
+                <a:solidFill>
+                  <a:srgbClr val="FFFFFF"/>
+                </a:solidFill>
+                <a:latin typeface="Times New Roman"/>
+                <a:cs typeface="Times New Roman"/>
+              </a:rPr>
+              <a:t>Every requirement met by construction — a redundancy-aware, nested, cross-expert-comparable, router-reweightable ranking.</a:t>
             </a:r>
           </a:p>
         </p:txBody>
